--- a/docs/GeoSentry_Capstone_Presentation.pptx
+++ b/docs/GeoSentry_Capstone_Presentation.pptx
@@ -3112,7 +3112,7 @@
             <a:avLst/>
           </a:prstGeom>
           <a:solidFill>
-            <a:srgbClr val="0B0F19"/>
+            <a:srgbClr val="0B1320"/>
           </a:solidFill>
           <a:ln>
             <a:noFill/>
@@ -3142,24 +3142,89 @@
       </p:sp>
       <p:sp>
         <p:nvSpPr>
-          <p:cNvPr id="3" name="Rounded Rectangle 2"/>
+          <p:cNvPr id="3" name="TextBox 2"/>
+          <p:cNvSpPr txBox="1"/>
+          <p:nvPr/>
+        </p:nvSpPr>
+        <p:spPr>
+          <a:xfrm>
+            <a:off x="731520" y="1097280"/>
+            <a:ext cx="10698480" cy="2560320"/>
+          </a:xfrm>
+          <a:prstGeom prst="rect">
+            <a:avLst/>
+          </a:prstGeom>
+          <a:noFill/>
+        </p:spPr>
+        <p:txBody>
+          <a:bodyPr wrap="square">
+            <a:spAutoFit/>
+          </a:bodyPr>
+          <a:lstStyle/>
+          <a:p>
+            <a:pPr>
+              <a:defRPr sz="1300" b="1">
+                <a:solidFill>
+                  <a:srgbClr val="FF8C00"/>
+                </a:solidFill>
+              </a:defRPr>
+            </a:pPr>
+            <a:r>
+              <a:t>ĐỒ ÁN TỐT NGHIỆP KỸ SƯ PHẦN MỀM (CAPSTONE PROJECT)</a:t>
+            </a:r>
+          </a:p>
+          <a:p>
+            <a:pPr>
+              <a:spcBef>
+                <a:spcPts val="600"/>
+              </a:spcBef>
+              <a:defRPr sz="4400" b="1">
+                <a:solidFill>
+                  <a:srgbClr val="FFFFFF"/>
+                </a:solidFill>
+              </a:defRPr>
+            </a:pPr>
+            <a:r>
+              <a:t>GEOSENTRY (TERRAWATCH)</a:t>
+            </a:r>
+          </a:p>
+          <a:p>
+            <a:pPr>
+              <a:spcBef>
+                <a:spcPts val="800"/>
+              </a:spcBef>
+              <a:defRPr sz="1800">
+                <a:solidFill>
+                  <a:srgbClr val="00D4FF"/>
+                </a:solidFill>
+              </a:defRPr>
+            </a:pPr>
+            <a:r>
+              <a:t>Hệ Thống Viễn Thám &amp; Trí Tuệ Nhân Tạo Cảnh Báo Sớm Sạt Lở Đất Miền Núi</a:t>
+            </a:r>
+          </a:p>
+        </p:txBody>
+      </p:sp>
+      <p:sp>
+        <p:nvSpPr>
+          <p:cNvPr id="4" name="Rounded Rectangle 3"/>
           <p:cNvSpPr/>
           <p:nvPr/>
         </p:nvSpPr>
         <p:spPr>
           <a:xfrm>
-            <a:off x="731520" y="1005840"/>
-            <a:ext cx="4114800" cy="411480"/>
+            <a:off x="731520" y="3840480"/>
+            <a:ext cx="10698480" cy="2011680"/>
           </a:xfrm>
           <a:prstGeom prst="roundRect">
             <a:avLst/>
           </a:prstGeom>
           <a:solidFill>
-            <a:srgbClr val="0E2D4B"/>
+            <a:srgbClr val="131E31"/>
           </a:solidFill>
-          <a:ln w="12700">
+          <a:ln>
             <a:solidFill>
-              <a:srgbClr val="0EA5E9"/>
+              <a:srgbClr val="1F3A52"/>
             </a:solidFill>
           </a:ln>
         </p:spPr>
@@ -3178,121 +3243,13 @@
           </a:fontRef>
         </p:style>
         <p:txBody>
-          <a:bodyPr rtlCol="0" anchor="ctr"/>
-          <a:lstStyle/>
-          <a:p>
-            <a:pPr algn="ctr">
-              <a:defRPr sz="1000" b="1">
-                <a:solidFill>
-                  <a:srgbClr val="0EA5E9"/>
-                </a:solidFill>
-              </a:defRPr>
-            </a:pPr>
-            <a:r>
-              <a:t>🛰️ SOFTWARE ENGINEERING CAPSTONE PROJECT</a:t>
-            </a:r>
-          </a:p>
-        </p:txBody>
-      </p:sp>
-      <p:sp>
-        <p:nvSpPr>
-          <p:cNvPr id="4" name="TextBox 3"/>
-          <p:cNvSpPr txBox="1"/>
-          <p:nvPr/>
-        </p:nvSpPr>
-        <p:spPr>
-          <a:xfrm>
-            <a:off x="731520" y="1554480"/>
-            <a:ext cx="10515600" cy="1645920"/>
-          </a:xfrm>
-          <a:prstGeom prst="rect">
-            <a:avLst/>
-          </a:prstGeom>
-          <a:noFill/>
-        </p:spPr>
-        <p:txBody>
-          <a:bodyPr wrap="square">
-            <a:spAutoFit/>
-          </a:bodyPr>
-          <a:lstStyle/>
-          <a:p>
-            <a:pPr>
-              <a:defRPr sz="3600" b="1">
-                <a:solidFill>
-                  <a:srgbClr val="FFFFFF"/>
-                </a:solidFill>
-              </a:defRPr>
-            </a:pPr>
-            <a:r>
-              <a:t>GEOSENTRY (TERRAWATCH)</a:t>
-            </a:r>
-          </a:p>
-          <a:p>
-            <a:pPr>
-              <a:spcBef>
-                <a:spcPts val="800"/>
-              </a:spcBef>
-              <a:defRPr sz="1800">
-                <a:solidFill>
-                  <a:srgbClr val="0EA5E9"/>
-                </a:solidFill>
-              </a:defRPr>
-            </a:pPr>
-            <a:r>
-              <a:t>Hệ Thống Viễn Thám, Trí Tuệ Nhân Tạo &amp; Mô Hình 3D</a:t>
-            </a:r>
-            <a:br/>
-            <a:r>
-              <a:t>Cảnh Báo Sớm và Hỗ Trợ Điều Phối Cứu Hộ Sạt Lở Đất Miền Núi</a:t>
-            </a:r>
-          </a:p>
-        </p:txBody>
-      </p:sp>
-      <p:sp>
-        <p:nvSpPr>
-          <p:cNvPr id="5" name="Rounded Rectangle 4"/>
-          <p:cNvSpPr/>
-          <p:nvPr/>
-        </p:nvSpPr>
-        <p:spPr>
-          <a:xfrm>
-            <a:off x="731520" y="3840480"/>
-            <a:ext cx="10698480" cy="2011680"/>
-          </a:xfrm>
-          <a:prstGeom prst="roundRect">
-            <a:avLst/>
-          </a:prstGeom>
-          <a:solidFill>
-            <a:srgbClr val="151E32"/>
-          </a:solidFill>
-          <a:ln>
-            <a:solidFill>
-              <a:srgbClr val="2A3B5C"/>
-            </a:solidFill>
-          </a:ln>
-        </p:spPr>
-        <p:style>
-          <a:lnRef idx="1">
-            <a:schemeClr val="accent1"/>
-          </a:lnRef>
-          <a:fillRef idx="3">
-            <a:schemeClr val="accent1"/>
-          </a:fillRef>
-          <a:effectRef idx="2">
-            <a:schemeClr val="accent1"/>
-          </a:effectRef>
-          <a:fontRef idx="minor">
-            <a:schemeClr val="lt1"/>
-          </a:fontRef>
-        </p:style>
-        <p:txBody>
           <a:bodyPr rtlCol="0" anchor="ctr" tIns="182880" lIns="365760"/>
           <a:lstStyle/>
           <a:p>
             <a:pPr algn="ctr">
               <a:defRPr sz="1200" b="1">
                 <a:solidFill>
-                  <a:srgbClr val="F97316"/>
+                  <a:srgbClr val="FF8C00"/>
                 </a:solidFill>
               </a:defRPr>
             </a:pPr>
@@ -3312,7 +3269,7 @@
               </a:defRPr>
             </a:pPr>
             <a:r>
-              <a:t>1. Duẫn — AI / Computer Vision Engineer (Model DeepLabV3+ ONNX, Tensor 8 kênh, AI Rescue Route)</a:t>
+              <a:t>1. Duẫn — AI / Computer Vision Engineer (Model DeepLabV3+ ONNX, Tensor 8 kênh, Xếp hạng mức nguy cơ)</a:t>
             </a:r>
           </a:p>
           <a:p>
@@ -3342,7 +3299,7 @@
               </a:defRPr>
             </a:pPr>
             <a:r>
-              <a:t>3. Thuận — Backend Engineer &amp; System Architect (Spring Boot 3, JWT 4 Roles, Redis Bus, Gateway)</a:t>
+              <a:t>3. Thuận — Backend Engineer &amp; System Architect (Spring Boot 3, JWT 3 Roles, Phát cảnh báo SMS/Push, Gateway)</a:t>
             </a:r>
           </a:p>
           <a:p>
@@ -3357,7 +3314,7 @@
               </a:defRPr>
             </a:pPr>
             <a:r>
-              <a:t>4. Huy — Frontend WebGIS Engineer (React 18 / Next.js, Mapbox 3D Terrain, 3D Rescue Map, Time-slider)</a:t>
+              <a:t>4. Huy — Frontend WebGIS Engineer (React 18 + Vite, Mapbox 3D Terrain, Hàng đợi duyệt, Nút Cảnh báo Admin)</a:t>
             </a:r>
           </a:p>
           <a:p>
@@ -3372,7 +3329,7 @@
               </a:defRPr>
             </a:pPr>
             <a:r>
-              <a:t>5. Lâm — Mobile App Engineer (Flutter 3.x, SQLite Offline 10,000 đa giác, Geofencing Hú Còi, 1-Tap SOS)</a:t>
+              <a:t>5. Lâm — Mobile App Engineer (Flutter 3.x, SQLite Offline 10,000 đa giác, Geofencing Hú Còi, Nhận cảnh báo Push/SMS)</a:t>
             </a:r>
           </a:p>
         </p:txBody>
@@ -3410,7 +3367,7 @@
             <a:avLst/>
           </a:prstGeom>
           <a:solidFill>
-            <a:srgbClr val="0B0F19"/>
+            <a:srgbClr val="0B1320"/>
           </a:solidFill>
           <a:ln>
             <a:noFill/>
@@ -3446,8 +3403,8 @@
         </p:nvSpPr>
         <p:spPr>
           <a:xfrm>
-            <a:off x="731520" y="365760"/>
-            <a:ext cx="10515600" cy="365760"/>
+            <a:off x="731520" y="457200"/>
+            <a:ext cx="10698480" cy="1005840"/>
           </a:xfrm>
           <a:prstGeom prst="rect">
             <a:avLst/>
@@ -3455,47 +3412,27 @@
           <a:noFill/>
         </p:spPr>
         <p:txBody>
-          <a:bodyPr wrap="square" tIns="0" bIns="0" lIns="0" rIns="0">
+          <a:bodyPr wrap="square" lIns="0" tIns="0" rIns="0" bIns="0">
             <a:spAutoFit/>
           </a:bodyPr>
           <a:lstStyle/>
           <a:p>
             <a:pPr>
-              <a:defRPr sz="1000" b="1">
-                <a:solidFill>
-                  <a:srgbClr val="0EA5E9"/>
-                </a:solidFill>
-              </a:defRPr>
-            </a:pPr>
-            <a:r>
-              <a:t>GEOSENTRY (TERRAWATCH) • SOFTWARE ENGINEERING CAPSTONE</a:t>
-            </a:r>
-          </a:p>
-        </p:txBody>
-      </p:sp>
-      <p:sp>
-        <p:nvSpPr>
-          <p:cNvPr id="4" name="TextBox 3"/>
-          <p:cNvSpPr txBox="1"/>
-          <p:nvPr/>
-        </p:nvSpPr>
-        <p:spPr>
-          <a:xfrm>
-            <a:off x="731520" y="640080"/>
-            <a:ext cx="10515600" cy="640080"/>
-          </a:xfrm>
-          <a:prstGeom prst="rect">
-            <a:avLst/>
-          </a:prstGeom>
-          <a:noFill/>
-        </p:spPr>
-        <p:txBody>
-          <a:bodyPr wrap="square" tIns="0" bIns="0" lIns="0" rIns="0">
-            <a:spAutoFit/>
-          </a:bodyPr>
-          <a:lstStyle/>
-          <a:p>
-            <a:pPr>
+              <a:defRPr sz="1050" b="1">
+                <a:solidFill>
+                  <a:srgbClr val="FF8C00"/>
+                </a:solidFill>
+              </a:defRPr>
+            </a:pPr>
+            <a:r>
+              <a:t>GEOSENTRY • CAPSTONE DEFENSE 2026</a:t>
+            </a:r>
+          </a:p>
+          <a:p>
+            <a:pPr>
+              <a:spcBef>
+                <a:spcPts val="300"/>
+              </a:spcBef>
               <a:defRPr sz="2200" b="1">
                 <a:solidFill>
                   <a:srgbClr val="FFFFFF"/>
@@ -3510,7 +3447,7 @@
       </p:sp>
       <p:sp>
         <p:nvSpPr>
-          <p:cNvPr id="5" name="Rounded Rectangle 4"/>
+          <p:cNvPr id="4" name="Rounded Rectangle 3"/>
           <p:cNvSpPr/>
           <p:nvPr/>
         </p:nvSpPr>
@@ -3523,11 +3460,11 @@
             <a:avLst/>
           </a:prstGeom>
           <a:solidFill>
-            <a:srgbClr val="151E32"/>
+            <a:srgbClr val="131E31"/>
           </a:solidFill>
-          <a:ln w="15240">
+          <a:ln w="12700">
             <a:solidFill>
-              <a:srgbClr val="2A3B5C"/>
+              <a:srgbClr val="1F3A52"/>
             </a:solidFill>
           </a:ln>
         </p:spPr>
@@ -3555,135 +3492,23 @@
       </p:sp>
       <p:sp>
         <p:nvSpPr>
-          <p:cNvPr id="6" name="TextBox 5"/>
-          <p:cNvSpPr txBox="1"/>
-          <p:nvPr/>
-        </p:nvSpPr>
-        <p:spPr>
-          <a:xfrm>
-            <a:off x="914400" y="1828800"/>
-            <a:ext cx="4754880" cy="1737360"/>
-          </a:xfrm>
-          <a:prstGeom prst="rect">
-            <a:avLst/>
-          </a:prstGeom>
-          <a:noFill/>
-        </p:spPr>
-        <p:txBody>
-          <a:bodyPr wrap="square" tIns="0" bIns="0" lIns="0" rIns="0">
-            <a:spAutoFit/>
-          </a:bodyPr>
-          <a:lstStyle/>
-          <a:p>
-            <a:pPr>
-              <a:defRPr sz="1400" b="1">
-                <a:solidFill>
-                  <a:srgbClr val="0EA5E9"/>
-                </a:solidFill>
-              </a:defRPr>
-            </a:pPr>
-            <a:r>
-              <a:t>🚀 Kế Hoạch 5 Tuần Tốc Lực (MVP)</a:t>
-            </a:r>
-          </a:p>
-          <a:p>
-            <a:pPr>
-              <a:spcAft>
-                <a:spcPts val="400"/>
-              </a:spcAft>
-              <a:defRPr sz="1050">
-                <a:solidFill>
-                  <a:srgbClr val="FFFFFF"/>
-                </a:solidFill>
-              </a:defRPr>
-            </a:pPr>
-            <a:r>
-              <a:t>•  Tuần 1: Dựng nền tảng, PostGIS &amp; Auth JWT 4 roles.</a:t>
-            </a:r>
-          </a:p>
-          <a:p>
-            <a:pPr>
-              <a:spcAft>
-                <a:spcPts val="400"/>
-              </a:spcAft>
-              <a:defRPr sz="1050">
-                <a:solidFill>
-                  <a:srgbClr val="FFFFFF"/>
-                </a:solidFill>
-              </a:defRPr>
-            </a:pPr>
-            <a:r>
-              <a:t>•  Tuần 2: Ingestion Sentinel-2, DEM Slope và API nhận SOS.</a:t>
-            </a:r>
-          </a:p>
-          <a:p>
-            <a:pPr>
-              <a:spcAft>
-                <a:spcPts val="400"/>
-              </a:spcAft>
-              <a:defRPr sz="1050">
-                <a:solidFill>
-                  <a:srgbClr val="FFFFFF"/>
-                </a:solidFill>
-              </a:defRPr>
-            </a:pPr>
-            <a:r>
-              <a:t>•  Tuần 3: Tích hợp mô hình ONNX thật, cắt ảnh Tiling và AI Rescue Route.</a:t>
-            </a:r>
-          </a:p>
-          <a:p>
-            <a:pPr>
-              <a:spcAft>
-                <a:spcPts val="400"/>
-              </a:spcAft>
-              <a:defRPr sz="1050">
-                <a:solidFill>
-                  <a:srgbClr val="FFFFFF"/>
-                </a:solidFill>
-              </a:defRPr>
-            </a:pPr>
-            <a:r>
-              <a:t>•  Tuần 4: Dashboard WebGIS 3D Command Center và Mobile SOS.</a:t>
-            </a:r>
-          </a:p>
-          <a:p>
-            <a:pPr>
-              <a:spcAft>
-                <a:spcPts val="400"/>
-              </a:spcAft>
-              <a:defRPr sz="1050">
-                <a:solidFill>
-                  <a:srgbClr val="FFFFFF"/>
-                </a:solidFill>
-              </a:defRPr>
-            </a:pPr>
-            <a:r>
-              <a:t>•  Tuần 5: Thông luồng 100%, kiểm thử tải và demo kịch bản thực tế Làng Nủ.</a:t>
-            </a:r>
-          </a:p>
-        </p:txBody>
-      </p:sp>
-      <p:sp>
-        <p:nvSpPr>
-          <p:cNvPr id="7" name="Rounded Rectangle 6"/>
+          <p:cNvPr id="5" name="Rounded Rectangle 4"/>
           <p:cNvSpPr/>
           <p:nvPr/>
         </p:nvSpPr>
         <p:spPr>
           <a:xfrm>
-            <a:off x="6309360" y="1645920"/>
-            <a:ext cx="5120640" cy="2103120"/>
+            <a:off x="731520" y="1645920"/>
+            <a:ext cx="5120640" cy="73152"/>
           </a:xfrm>
           <a:prstGeom prst="roundRect">
             <a:avLst/>
           </a:prstGeom>
           <a:solidFill>
-            <a:srgbClr val="151E32"/>
+            <a:srgbClr val="00D4FF"/>
           </a:solidFill>
-          <a:ln w="15240">
-            <a:solidFill>
-              <a:srgbClr val="2A3B5C"/>
-            </a:solidFill>
+          <a:ln>
+            <a:noFill/>
           </a:ln>
         </p:spPr>
         <p:style>
@@ -3710,14 +3535,14 @@
       </p:sp>
       <p:sp>
         <p:nvSpPr>
-          <p:cNvPr id="8" name="TextBox 7"/>
+          <p:cNvPr id="6" name="TextBox 5"/>
           <p:cNvSpPr txBox="1"/>
           <p:nvPr/>
         </p:nvSpPr>
         <p:spPr>
           <a:xfrm>
-            <a:off x="6492240" y="1828800"/>
-            <a:ext cx="4754880" cy="1737360"/>
+            <a:off x="914400" y="1810512"/>
+            <a:ext cx="4754880" cy="1874520"/>
           </a:xfrm>
           <a:prstGeom prst="rect">
             <a:avLst/>
@@ -3725,87 +3550,285 @@
           <a:noFill/>
         </p:spPr>
         <p:txBody>
-          <a:bodyPr wrap="square" tIns="0" bIns="0" lIns="0" rIns="0">
+          <a:bodyPr wrap="square" lIns="0" tIns="0" rIns="0" bIns="0">
             <a:spAutoFit/>
           </a:bodyPr>
           <a:lstStyle/>
           <a:p>
             <a:pPr>
-              <a:defRPr sz="1400" b="1">
-                <a:solidFill>
-                  <a:srgbClr val="F97316"/>
-                </a:solidFill>
-              </a:defRPr>
-            </a:pPr>
-            <a:r>
-              <a:t>📦 Nâng Cấp Capstone (Tháng 3 - Tháng 6)</a:t>
-            </a:r>
-          </a:p>
-          <a:p>
-            <a:pPr>
-              <a:spcAft>
-                <a:spcPts val="400"/>
-              </a:spcAft>
-              <a:defRPr sz="1050">
-                <a:solidFill>
-                  <a:srgbClr val="FFFFFF"/>
-                </a:solidFill>
-              </a:defRPr>
-            </a:pPr>
-            <a:r>
-              <a:t>•  Trạm IoT ESP32 quan trắc rung chấn sườn dốc (cảm biến rung &amp; độ ẩm đất đẩy MQTT).</a:t>
-            </a:r>
-          </a:p>
-          <a:p>
-            <a:pPr>
-              <a:spcAft>
-                <a:spcPts val="400"/>
-              </a:spcAft>
-              <a:defRPr sz="1050">
-                <a:solidFill>
-                  <a:srgbClr val="FFFFFF"/>
-                </a:solidFill>
-              </a:defRPr>
-            </a:pPr>
-            <a:r>
-              <a:t>•  Tích hợp ảnh Radar SAR Sentinel-1 quan sát xuyên mây trong mùa mưa bão.</a:t>
-            </a:r>
-          </a:p>
-          <a:p>
-            <a:pPr>
-              <a:spcAft>
-                <a:spcPts val="400"/>
-              </a:spcAft>
-              <a:defRPr sz="1050">
-                <a:solidFill>
-                  <a:srgbClr val="FFFFFF"/>
-                </a:solidFill>
-              </a:defRPr>
-            </a:pPr>
-            <a:r>
-              <a:t>•  Tích hợp chỉ số mưa tích lũy Antecedent Rainfall Index (ARI) từ vệ tinh GPM NASA.</a:t>
-            </a:r>
-          </a:p>
-          <a:p>
-            <a:pPr>
-              <a:spcAft>
-                <a:spcPts val="400"/>
-              </a:spcAft>
-              <a:defRPr sz="1050">
-                <a:solidFill>
-                  <a:srgbClr val="FFFFFF"/>
-                </a:solidFill>
-              </a:defRPr>
-            </a:pPr>
-            <a:r>
-              <a:t>•  Chạy thử nghiệm trên tập dữ liệu thực tế Lào Cai / Yên Bái sau bão Yagi.</a:t>
-            </a:r>
-          </a:p>
-        </p:txBody>
-      </p:sp>
-      <p:sp>
-        <p:nvSpPr>
-          <p:cNvPr id="9" name="Rounded Rectangle 8"/>
+              <a:defRPr sz="1300" b="1">
+                <a:solidFill>
+                  <a:srgbClr val="00D4FF"/>
+                </a:solidFill>
+              </a:defRPr>
+            </a:pPr>
+            <a:r>
+              <a:t>🚀 Kế Hoạch 5 Tuần Tốc Lực (MVP)</a:t>
+            </a:r>
+          </a:p>
+          <a:p>
+            <a:pPr>
+              <a:spcBef>
+                <a:spcPts val="300"/>
+              </a:spcBef>
+              <a:defRPr sz="1000">
+                <a:solidFill>
+                  <a:srgbClr val="FFFFFF"/>
+                </a:solidFill>
+              </a:defRPr>
+            </a:pPr>
+            <a:r>
+              <a:t>• Tuần 1: Dựng nền tảng, PostGIS &amp; Auth JWT 3 roles.</a:t>
+            </a:r>
+          </a:p>
+          <a:p>
+            <a:pPr>
+              <a:spcBef>
+                <a:spcPts val="300"/>
+              </a:spcBef>
+              <a:defRPr sz="1000">
+                <a:solidFill>
+                  <a:srgbClr val="FFFFFF"/>
+                </a:solidFill>
+              </a:defRPr>
+            </a:pPr>
+            <a:r>
+              <a:t>• Tuần 2: Ingestion Sentinel-2, DEM Slope và API báo cáo hiện trường.</a:t>
+            </a:r>
+          </a:p>
+          <a:p>
+            <a:pPr>
+              <a:spcBef>
+                <a:spcPts val="300"/>
+              </a:spcBef>
+              <a:defRPr sz="1000">
+                <a:solidFill>
+                  <a:srgbClr val="FFFFFF"/>
+                </a:solidFill>
+              </a:defRPr>
+            </a:pPr>
+            <a:r>
+              <a:t>• Tuần 3: Tích hợp mô hình ONNX thật, cắt ảnh Tiling và xếp hạng nguy cơ.</a:t>
+            </a:r>
+          </a:p>
+          <a:p>
+            <a:pPr>
+              <a:spcBef>
+                <a:spcPts val="300"/>
+              </a:spcBef>
+              <a:defRPr sz="1000">
+                <a:solidFill>
+                  <a:srgbClr val="FFFFFF"/>
+                </a:solidFill>
+              </a:defRPr>
+            </a:pPr>
+            <a:r>
+              <a:t>• Tuần 4: Dashboard WebGIS thẩm định, Nút Cảnh Báo Khẩn Cấp Admin và Mobile FCM.</a:t>
+            </a:r>
+          </a:p>
+          <a:p>
+            <a:pPr>
+              <a:spcBef>
+                <a:spcPts val="300"/>
+              </a:spcBef>
+              <a:defRPr sz="1000">
+                <a:solidFill>
+                  <a:srgbClr val="FFFFFF"/>
+                </a:solidFill>
+              </a:defRPr>
+            </a:pPr>
+            <a:r>
+              <a:t>• Tuần 5: Thông luồng 100%, kiểm thử tải và demo kịch bản thực tế Làng Nủ.</a:t>
+            </a:r>
+          </a:p>
+        </p:txBody>
+      </p:sp>
+      <p:sp>
+        <p:nvSpPr>
+          <p:cNvPr id="7" name="Rounded Rectangle 6"/>
+          <p:cNvSpPr/>
+          <p:nvPr/>
+        </p:nvSpPr>
+        <p:spPr>
+          <a:xfrm>
+            <a:off x="6309360" y="1645920"/>
+            <a:ext cx="5120640" cy="2103120"/>
+          </a:xfrm>
+          <a:prstGeom prst="roundRect">
+            <a:avLst/>
+          </a:prstGeom>
+          <a:solidFill>
+            <a:srgbClr val="131E31"/>
+          </a:solidFill>
+          <a:ln w="12700">
+            <a:solidFill>
+              <a:srgbClr val="1F3A52"/>
+            </a:solidFill>
+          </a:ln>
+        </p:spPr>
+        <p:style>
+          <a:lnRef idx="1">
+            <a:schemeClr val="accent1"/>
+          </a:lnRef>
+          <a:fillRef idx="3">
+            <a:schemeClr val="accent1"/>
+          </a:fillRef>
+          <a:effectRef idx="2">
+            <a:schemeClr val="accent1"/>
+          </a:effectRef>
+          <a:fontRef idx="minor">
+            <a:schemeClr val="lt1"/>
+          </a:fontRef>
+        </p:style>
+        <p:txBody>
+          <a:bodyPr rtlCol="0" anchor="ctr"/>
+          <a:lstStyle/>
+          <a:p>
+            <a:pPr algn="ctr"/>
+          </a:p>
+        </p:txBody>
+      </p:sp>
+      <p:sp>
+        <p:nvSpPr>
+          <p:cNvPr id="8" name="Rounded Rectangle 7"/>
+          <p:cNvSpPr/>
+          <p:nvPr/>
+        </p:nvSpPr>
+        <p:spPr>
+          <a:xfrm>
+            <a:off x="6309360" y="1645920"/>
+            <a:ext cx="5120640" cy="73152"/>
+          </a:xfrm>
+          <a:prstGeom prst="roundRect">
+            <a:avLst/>
+          </a:prstGeom>
+          <a:solidFill>
+            <a:srgbClr val="FF8C00"/>
+          </a:solidFill>
+          <a:ln>
+            <a:noFill/>
+          </a:ln>
+        </p:spPr>
+        <p:style>
+          <a:lnRef idx="1">
+            <a:schemeClr val="accent1"/>
+          </a:lnRef>
+          <a:fillRef idx="3">
+            <a:schemeClr val="accent1"/>
+          </a:fillRef>
+          <a:effectRef idx="2">
+            <a:schemeClr val="accent1"/>
+          </a:effectRef>
+          <a:fontRef idx="minor">
+            <a:schemeClr val="lt1"/>
+          </a:fontRef>
+        </p:style>
+        <p:txBody>
+          <a:bodyPr rtlCol="0" anchor="ctr"/>
+          <a:lstStyle/>
+          <a:p>
+            <a:pPr algn="ctr"/>
+          </a:p>
+        </p:txBody>
+      </p:sp>
+      <p:sp>
+        <p:nvSpPr>
+          <p:cNvPr id="9" name="TextBox 8"/>
+          <p:cNvSpPr txBox="1"/>
+          <p:nvPr/>
+        </p:nvSpPr>
+        <p:spPr>
+          <a:xfrm>
+            <a:off x="6492240" y="1810512"/>
+            <a:ext cx="4754880" cy="1874520"/>
+          </a:xfrm>
+          <a:prstGeom prst="rect">
+            <a:avLst/>
+          </a:prstGeom>
+          <a:noFill/>
+        </p:spPr>
+        <p:txBody>
+          <a:bodyPr wrap="square" lIns="0" tIns="0" rIns="0" bIns="0">
+            <a:spAutoFit/>
+          </a:bodyPr>
+          <a:lstStyle/>
+          <a:p>
+            <a:pPr>
+              <a:defRPr sz="1300" b="1">
+                <a:solidFill>
+                  <a:srgbClr val="FF8C00"/>
+                </a:solidFill>
+              </a:defRPr>
+            </a:pPr>
+            <a:r>
+              <a:t>📦 Nâng Cấp Capstone (Hướng phát triển Epic 6)</a:t>
+            </a:r>
+          </a:p>
+          <a:p>
+            <a:pPr>
+              <a:spcBef>
+                <a:spcPts val="300"/>
+              </a:spcBef>
+              <a:defRPr sz="1000">
+                <a:solidFill>
+                  <a:srgbClr val="FFFFFF"/>
+                </a:solidFill>
+              </a:defRPr>
+            </a:pPr>
+            <a:r>
+              <a:t>• Trạm IoT ESP32 quan trắc rung chấn sườn dốc (cảm biến rung &amp; độ ẩm đất đẩy MQTT).</a:t>
+            </a:r>
+          </a:p>
+          <a:p>
+            <a:pPr>
+              <a:spcBef>
+                <a:spcPts val="300"/>
+              </a:spcBef>
+              <a:defRPr sz="1000">
+                <a:solidFill>
+                  <a:srgbClr val="FFFFFF"/>
+                </a:solidFill>
+              </a:defRPr>
+            </a:pPr>
+            <a:r>
+              <a:t>• Tích hợp ảnh Radar SAR Sentinel-1 quan sát xuyên mây trong mùa mưa bão.</a:t>
+            </a:r>
+          </a:p>
+          <a:p>
+            <a:pPr>
+              <a:spcBef>
+                <a:spcPts val="300"/>
+              </a:spcBef>
+              <a:defRPr sz="1000">
+                <a:solidFill>
+                  <a:srgbClr val="FFFFFF"/>
+                </a:solidFill>
+              </a:defRPr>
+            </a:pPr>
+            <a:r>
+              <a:t>• Tích hợp chỉ số mưa tích lũy Antecedent Rainfall Index (ARI) từ vệ tinh GPM NASA.</a:t>
+            </a:r>
+          </a:p>
+          <a:p>
+            <a:pPr>
+              <a:spcBef>
+                <a:spcPts val="300"/>
+              </a:spcBef>
+              <a:defRPr sz="1000">
+                <a:solidFill>
+                  <a:srgbClr val="FFFFFF"/>
+                </a:solidFill>
+              </a:defRPr>
+            </a:pPr>
+            <a:r>
+              <a:t>• Chạy thử nghiệm trên tập dữ liệu thực tế Lào Cai / Yên Bái sau bão Yagi.</a:t>
+            </a:r>
+          </a:p>
+        </p:txBody>
+      </p:sp>
+      <p:sp>
+        <p:nvSpPr>
+          <p:cNvPr id="10" name="Rounded Rectangle 9"/>
           <p:cNvSpPr/>
           <p:nvPr/>
         </p:nvSpPr>
@@ -3867,7 +3890,7 @@
               </a:defRPr>
             </a:pPr>
             <a:r>
-              <a:t>1. Giải quyết bài toán cấp bách mang tính nhân văn sâu sắc: Bảo vệ tính mạng đồng bào miền núi trước thiên tai sạt lở đất.</a:t>
+              <a:t>1. Giải quyết bài toán cấp bách mang tính nhân văn sâu sắc: Giám sát, phát hiện và cảnh báo sớm thiên tai sạt lở đất bảo vệ người dân.</a:t>
             </a:r>
           </a:p>
           <a:p>
@@ -3897,7 +3920,7 @@
               </a:defRPr>
             </a:pPr>
             <a:r>
-              <a:t>3. Đột phá với cơ chế Geofencing Ngoại tuyến: Đảm bảo người dân vẫn được còi hú cứu mạng ngay cả khi mất sạch 100% sóng 4G/Internet.</a:t>
+              <a:t>3. Tích hợp nút Phát Cảnh Báo Khẩn Cấp cho Admin: Chủ động cảnh báo người dân qua cả SMS và thông báo đẩy ứng dụng di động.</a:t>
             </a:r>
           </a:p>
           <a:p>
@@ -3912,7 +3935,7 @@
               </a:defRPr>
             </a:pPr>
             <a:r>
-              <a:t>4. Đầy đủ điều kiện kỹ thuật, tính khoa học và tính thực tiễn để bảo vệ đạt điểm Xuất sắc (A+) trước Hội đồng Kỹ sư Phần mềm.</a:t>
+              <a:t>4. Đột phá với cơ chế Geofencing Ngoại tuyến: Đảm bảo người dân vẫn được còi hú cứu mạng ngay cả khi mất sạch 100% sóng 4G/Internet.</a:t>
             </a:r>
           </a:p>
         </p:txBody>
@@ -3950,7 +3973,7 @@
             <a:avLst/>
           </a:prstGeom>
           <a:solidFill>
-            <a:srgbClr val="0B0F19"/>
+            <a:srgbClr val="0B1320"/>
           </a:solidFill>
           <a:ln>
             <a:noFill/>
@@ -3986,8 +4009,8 @@
         </p:nvSpPr>
         <p:spPr>
           <a:xfrm>
-            <a:off x="731520" y="365760"/>
-            <a:ext cx="10515600" cy="365760"/>
+            <a:off x="731520" y="457200"/>
+            <a:ext cx="10698480" cy="1005840"/>
           </a:xfrm>
           <a:prstGeom prst="rect">
             <a:avLst/>
@@ -3995,47 +4018,27 @@
           <a:noFill/>
         </p:spPr>
         <p:txBody>
-          <a:bodyPr wrap="square" tIns="0" bIns="0" lIns="0" rIns="0">
+          <a:bodyPr wrap="square" lIns="0" tIns="0" rIns="0" bIns="0">
             <a:spAutoFit/>
           </a:bodyPr>
           <a:lstStyle/>
           <a:p>
             <a:pPr>
-              <a:defRPr sz="1000" b="1">
-                <a:solidFill>
-                  <a:srgbClr val="0EA5E9"/>
-                </a:solidFill>
-              </a:defRPr>
-            </a:pPr>
-            <a:r>
-              <a:t>GEOSENTRY (TERRAWATCH) • SOFTWARE ENGINEERING CAPSTONE</a:t>
-            </a:r>
-          </a:p>
-        </p:txBody>
-      </p:sp>
-      <p:sp>
-        <p:nvSpPr>
-          <p:cNvPr id="4" name="TextBox 3"/>
-          <p:cNvSpPr txBox="1"/>
-          <p:nvPr/>
-        </p:nvSpPr>
-        <p:spPr>
-          <a:xfrm>
-            <a:off x="731520" y="640080"/>
-            <a:ext cx="10515600" cy="640080"/>
-          </a:xfrm>
-          <a:prstGeom prst="rect">
-            <a:avLst/>
-          </a:prstGeom>
-          <a:noFill/>
-        </p:spPr>
-        <p:txBody>
-          <a:bodyPr wrap="square" tIns="0" bIns="0" lIns="0" rIns="0">
-            <a:spAutoFit/>
-          </a:bodyPr>
-          <a:lstStyle/>
-          <a:p>
-            <a:pPr>
+              <a:defRPr sz="1050" b="1">
+                <a:solidFill>
+                  <a:srgbClr val="FF8C00"/>
+                </a:solidFill>
+              </a:defRPr>
+            </a:pPr>
+            <a:r>
+              <a:t>GEOSENTRY • CAPSTONE DEFENSE 2026</a:t>
+            </a:r>
+          </a:p>
+          <a:p>
+            <a:pPr>
+              <a:spcBef>
+                <a:spcPts val="300"/>
+              </a:spcBef>
               <a:defRPr sz="2200" b="1">
                 <a:solidFill>
                   <a:srgbClr val="FFFFFF"/>
@@ -4043,14 +4046,14 @@
               </a:defRPr>
             </a:pPr>
             <a:r>
-              <a:t>TÍNH CẤP THIẾT &amp; 4 ĐIỂM NGHẼN TRONG CỨU HỘ SẠT LỞ</a:t>
-            </a:r>
-          </a:p>
-        </p:txBody>
-      </p:sp>
-      <p:sp>
-        <p:nvSpPr>
-          <p:cNvPr id="5" name="Rounded Rectangle 4"/>
+              <a:t>TÍNH CẤP THIẾT &amp; 4 ĐIỂM NGHẼN TRONG CẢNH BÁO SẠT LỞ</a:t>
+            </a:r>
+          </a:p>
+        </p:txBody>
+      </p:sp>
+      <p:sp>
+        <p:nvSpPr>
+          <p:cNvPr id="4" name="Rounded Rectangle 3"/>
           <p:cNvSpPr/>
           <p:nvPr/>
         </p:nvSpPr>
@@ -4063,11 +4066,11 @@
             <a:avLst/>
           </a:prstGeom>
           <a:solidFill>
-            <a:srgbClr val="151E32"/>
+            <a:srgbClr val="131E31"/>
           </a:solidFill>
-          <a:ln w="15240">
+          <a:ln w="12700">
             <a:solidFill>
-              <a:srgbClr val="2A3B5C"/>
+              <a:srgbClr val="1F3A52"/>
             </a:solidFill>
           </a:ln>
         </p:spPr>
@@ -4095,135 +4098,23 @@
       </p:sp>
       <p:sp>
         <p:nvSpPr>
-          <p:cNvPr id="6" name="TextBox 5"/>
-          <p:cNvSpPr txBox="1"/>
-          <p:nvPr/>
-        </p:nvSpPr>
-        <p:spPr>
-          <a:xfrm>
-            <a:off x="914400" y="1828800"/>
-            <a:ext cx="2103120" cy="4023360"/>
-          </a:xfrm>
-          <a:prstGeom prst="rect">
-            <a:avLst/>
-          </a:prstGeom>
-          <a:noFill/>
-        </p:spPr>
-        <p:txBody>
-          <a:bodyPr wrap="square" tIns="0" bIns="0" lIns="0" rIns="0">
-            <a:spAutoFit/>
-          </a:bodyPr>
-          <a:lstStyle/>
-          <a:p>
-            <a:pPr>
-              <a:defRPr sz="1400" b="1">
-                <a:solidFill>
-                  <a:srgbClr val="EF4444"/>
-                </a:solidFill>
-              </a:defRPr>
-            </a:pPr>
-            <a:r>
-              <a:t>1. Phát Hiện Chậm Trễ</a:t>
-            </a:r>
-          </a:p>
-          <a:p>
-            <a:pPr>
-              <a:spcAft>
-                <a:spcPts val="600"/>
-              </a:spcAft>
-              <a:defRPr sz="1000" i="1">
-                <a:solidFill>
-                  <a:srgbClr val="94A3B8"/>
-                </a:solidFill>
-              </a:defRPr>
-            </a:pPr>
-            <a:r>
-              <a:t>Phụ thuộc báo tin thủ công</a:t>
-            </a:r>
-          </a:p>
-          <a:p>
-            <a:pPr>
-              <a:spcAft>
-                <a:spcPts val="400"/>
-              </a:spcAft>
-              <a:defRPr sz="1050">
-                <a:solidFill>
-                  <a:srgbClr val="FFFFFF"/>
-                </a:solidFill>
-              </a:defRPr>
-            </a:pPr>
-            <a:r>
-              <a:t>•  Sạt lở xảy ra bất ngờ sau mưa dầm kéo dài tại vùng núi hiểm trở.</a:t>
-            </a:r>
-          </a:p>
-          <a:p>
-            <a:pPr>
-              <a:spcAft>
-                <a:spcPts val="400"/>
-              </a:spcAft>
-              <a:defRPr sz="1050">
-                <a:solidFill>
-                  <a:srgbClr val="FFFFFF"/>
-                </a:solidFill>
-              </a:defRPr>
-            </a:pPr>
-            <a:r>
-              <a:t>•  Điển hình: Vụ sạt lở Làng Nủ (Lào Cai) sau bão Yagi 2024.</a:t>
-            </a:r>
-          </a:p>
-          <a:p>
-            <a:pPr>
-              <a:spcAft>
-                <a:spcPts val="400"/>
-              </a:spcAft>
-              <a:defRPr sz="1050">
-                <a:solidFill>
-                  <a:srgbClr val="FFFFFF"/>
-                </a:solidFill>
-              </a:defRPr>
-            </a:pPr>
-            <a:r>
-              <a:t>•  Hiện tại chỉ phát hiện khi thảm họa đã ập xuống hoặc có người sống sót chạy bộ về báo xã.</a:t>
-            </a:r>
-          </a:p>
-          <a:p>
-            <a:pPr>
-              <a:spcAft>
-                <a:spcPts val="400"/>
-              </a:spcAft>
-              <a:defRPr sz="1050">
-                <a:solidFill>
-                  <a:srgbClr val="FFFFFF"/>
-                </a:solidFill>
-              </a:defRPr>
-            </a:pPr>
-            <a:r>
-              <a:t>•  Thiếu cơ chế cảnh báo vĩ mô tự động trên diện rộng.</a:t>
-            </a:r>
-          </a:p>
-        </p:txBody>
-      </p:sp>
-      <p:sp>
-        <p:nvSpPr>
-          <p:cNvPr id="7" name="Rounded Rectangle 6"/>
+          <p:cNvPr id="5" name="Rounded Rectangle 4"/>
           <p:cNvSpPr/>
           <p:nvPr/>
         </p:nvSpPr>
         <p:spPr>
           <a:xfrm>
-            <a:off x="3474720" y="1645920"/>
-            <a:ext cx="2468880" cy="4389120"/>
+            <a:off x="731520" y="1645920"/>
+            <a:ext cx="2468880" cy="73152"/>
           </a:xfrm>
           <a:prstGeom prst="roundRect">
             <a:avLst/>
           </a:prstGeom>
           <a:solidFill>
-            <a:srgbClr val="151E32"/>
+            <a:srgbClr val="EF4444"/>
           </a:solidFill>
-          <a:ln w="15240">
-            <a:solidFill>
-              <a:srgbClr val="2A3B5C"/>
-            </a:solidFill>
+          <a:ln>
+            <a:noFill/>
           </a:ln>
         </p:spPr>
         <p:style>
@@ -4250,14 +4141,14 @@
       </p:sp>
       <p:sp>
         <p:nvSpPr>
-          <p:cNvPr id="8" name="TextBox 7"/>
+          <p:cNvPr id="6" name="TextBox 5"/>
           <p:cNvSpPr txBox="1"/>
           <p:nvPr/>
         </p:nvSpPr>
         <p:spPr>
           <a:xfrm>
-            <a:off x="3657600" y="1828800"/>
-            <a:ext cx="2103120" cy="4023360"/>
+            <a:off x="914400" y="1810512"/>
+            <a:ext cx="2103120" cy="4160520"/>
           </a:xfrm>
           <a:prstGeom prst="rect">
             <a:avLst/>
@@ -4265,35 +4156,20 @@
           <a:noFill/>
         </p:spPr>
         <p:txBody>
-          <a:bodyPr wrap="square" tIns="0" bIns="0" lIns="0" rIns="0">
+          <a:bodyPr wrap="square" lIns="0" tIns="0" rIns="0" bIns="0">
             <a:spAutoFit/>
           </a:bodyPr>
           <a:lstStyle/>
           <a:p>
             <a:pPr>
-              <a:defRPr sz="1400" b="1">
-                <a:solidFill>
-                  <a:srgbClr val="F97316"/>
-                </a:solidFill>
-              </a:defRPr>
-            </a:pPr>
-            <a:r>
-              <a:t>2. Mất Sóng Viễn Thông</a:t>
-            </a:r>
-          </a:p>
-          <a:p>
-            <a:pPr>
-              <a:spcAft>
-                <a:spcPts val="600"/>
-              </a:spcAft>
-              <a:defRPr sz="1000" i="1">
-                <a:solidFill>
-                  <a:srgbClr val="94A3B8"/>
-                </a:solidFill>
-              </a:defRPr>
-            </a:pPr>
-            <a:r>
-              <a:t>Cô lập hoàn toàn kết nối</a:t>
+              <a:defRPr sz="1300" b="1">
+                <a:solidFill>
+                  <a:srgbClr val="EF4444"/>
+                </a:solidFill>
+              </a:defRPr>
+            </a:pPr>
+            <a:r>
+              <a:t>1. Phát Hiện Chậm Trễ</a:t>
             </a:r>
           </a:p>
           <a:p>
@@ -4301,83 +4177,98 @@
               <a:spcAft>
                 <a:spcPts val="400"/>
               </a:spcAft>
-              <a:defRPr sz="1050">
-                <a:solidFill>
-                  <a:srgbClr val="FFFFFF"/>
-                </a:solidFill>
-              </a:defRPr>
-            </a:pPr>
-            <a:r>
-              <a:t>•  Mưa bão quật đổ cột BTS, sạt đường đứt cáp quang.</a:t>
-            </a:r>
-          </a:p>
-          <a:p>
-            <a:pPr>
-              <a:spcAft>
-                <a:spcPts val="400"/>
-              </a:spcAft>
-              <a:defRPr sz="1050">
-                <a:solidFill>
-                  <a:srgbClr val="FFFFFF"/>
-                </a:solidFill>
-              </a:defRPr>
-            </a:pPr>
-            <a:r>
-              <a:t>•  Các bản làng bị cô lập mất sạch 100% sóng 4G/Internet.</a:t>
-            </a:r>
-          </a:p>
-          <a:p>
-            <a:pPr>
-              <a:spcAft>
-                <a:spcPts val="400"/>
-              </a:spcAft>
-              <a:defRPr sz="1050">
-                <a:solidFill>
-                  <a:srgbClr val="FFFFFF"/>
-                </a:solidFill>
-              </a:defRPr>
-            </a:pPr>
-            <a:r>
-              <a:t>•  Người dân không thể nhận tin nhắn SMS hay thông báo đẩy online.</a:t>
-            </a:r>
-          </a:p>
-          <a:p>
-            <a:pPr>
-              <a:spcAft>
-                <a:spcPts val="400"/>
-              </a:spcAft>
-              <a:defRPr sz="1050">
-                <a:solidFill>
-                  <a:srgbClr val="FFFFFF"/>
-                </a:solidFill>
-              </a:defRPr>
-            </a:pPr>
-            <a:r>
-              <a:t>•  Ứng dụng cảnh báo thông thường trở nên vô dụng khi mất mạng.</a:t>
-            </a:r>
-          </a:p>
-        </p:txBody>
-      </p:sp>
-      <p:sp>
-        <p:nvSpPr>
-          <p:cNvPr id="9" name="Rounded Rectangle 8"/>
+              <a:defRPr sz="950">
+                <a:solidFill>
+                  <a:srgbClr val="9CB2C9"/>
+                </a:solidFill>
+              </a:defRPr>
+            </a:pPr>
+            <a:r>
+              <a:t>Phụ thuộc báo tin thủ công</a:t>
+            </a:r>
+          </a:p>
+          <a:p>
+            <a:pPr>
+              <a:spcBef>
+                <a:spcPts val="300"/>
+              </a:spcBef>
+              <a:defRPr sz="1000">
+                <a:solidFill>
+                  <a:srgbClr val="FFFFFF"/>
+                </a:solidFill>
+              </a:defRPr>
+            </a:pPr>
+            <a:r>
+              <a:t>• Sạt lở xảy ra bất ngờ sau mưa dầm kéo dài tại vùng núi hiểm trở.</a:t>
+            </a:r>
+          </a:p>
+          <a:p>
+            <a:pPr>
+              <a:spcBef>
+                <a:spcPts val="300"/>
+              </a:spcBef>
+              <a:defRPr sz="1000">
+                <a:solidFill>
+                  <a:srgbClr val="FFFFFF"/>
+                </a:solidFill>
+              </a:defRPr>
+            </a:pPr>
+            <a:r>
+              <a:t>• Điển hình: Vụ sạt lở Làng Nủ (Lào Cai) sau bão Yagi 2024.</a:t>
+            </a:r>
+          </a:p>
+          <a:p>
+            <a:pPr>
+              <a:spcBef>
+                <a:spcPts val="300"/>
+              </a:spcBef>
+              <a:defRPr sz="1000">
+                <a:solidFill>
+                  <a:srgbClr val="FFFFFF"/>
+                </a:solidFill>
+              </a:defRPr>
+            </a:pPr>
+            <a:r>
+              <a:t>• Hiện tại chỉ phát hiện khi thảm họa đã ập xuống hoặc có người dân chạy bộ về báo.</a:t>
+            </a:r>
+          </a:p>
+          <a:p>
+            <a:pPr>
+              <a:spcBef>
+                <a:spcPts val="300"/>
+              </a:spcBef>
+              <a:defRPr sz="1000">
+                <a:solidFill>
+                  <a:srgbClr val="FFFFFF"/>
+                </a:solidFill>
+              </a:defRPr>
+            </a:pPr>
+            <a:r>
+              <a:t>• Thiếu cơ chế quan trắc diện rộng tự động liên tục.</a:t>
+            </a:r>
+          </a:p>
+        </p:txBody>
+      </p:sp>
+      <p:sp>
+        <p:nvSpPr>
+          <p:cNvPr id="7" name="Rounded Rectangle 6"/>
           <p:cNvSpPr/>
           <p:nvPr/>
         </p:nvSpPr>
         <p:spPr>
           <a:xfrm>
-            <a:off x="6217920" y="1645920"/>
+            <a:off x="3474720" y="1645920"/>
             <a:ext cx="2468880" cy="4389120"/>
           </a:xfrm>
           <a:prstGeom prst="roundRect">
             <a:avLst/>
           </a:prstGeom>
           <a:solidFill>
-            <a:srgbClr val="151E32"/>
+            <a:srgbClr val="131E31"/>
           </a:solidFill>
-          <a:ln w="15240">
+          <a:ln w="12700">
             <a:solidFill>
-              <a:srgbClr val="2A3B5C"/>
+              <a:srgbClr val="1F3A52"/>
             </a:solidFill>
           </a:ln>
         </p:spPr>
@@ -4405,135 +4296,23 @@
       </p:sp>
       <p:sp>
         <p:nvSpPr>
-          <p:cNvPr id="10" name="TextBox 9"/>
-          <p:cNvSpPr txBox="1"/>
-          <p:nvPr/>
-        </p:nvSpPr>
-        <p:spPr>
-          <a:xfrm>
-            <a:off x="6400800" y="1828800"/>
-            <a:ext cx="2103120" cy="4023360"/>
-          </a:xfrm>
-          <a:prstGeom prst="rect">
-            <a:avLst/>
-          </a:prstGeom>
-          <a:noFill/>
-        </p:spPr>
-        <p:txBody>
-          <a:bodyPr wrap="square" tIns="0" bIns="0" lIns="0" rIns="0">
-            <a:spAutoFit/>
-          </a:bodyPr>
-          <a:lstStyle/>
-          <a:p>
-            <a:pPr>
-              <a:defRPr sz="1400" b="1">
-                <a:solidFill>
-                  <a:srgbClr val="0EA5E9"/>
-                </a:solidFill>
-              </a:defRPr>
-            </a:pPr>
-            <a:r>
-              <a:t>3. Bản Đồ 2D Thiếu Trực Quan</a:t>
-            </a:r>
-          </a:p>
-          <a:p>
-            <a:pPr>
-              <a:spcAft>
-                <a:spcPts val="600"/>
-              </a:spcAft>
-              <a:defRPr sz="1000" i="1">
-                <a:solidFill>
-                  <a:srgbClr val="94A3B8"/>
-                </a:solidFill>
-              </a:defRPr>
-            </a:pPr>
-            <a:r>
-              <a:t>Hạn chế của bản đồ phẳng</a:t>
-            </a:r>
-          </a:p>
-          <a:p>
-            <a:pPr>
-              <a:spcAft>
-                <a:spcPts val="400"/>
-              </a:spcAft>
-              <a:defRPr sz="1050">
-                <a:solidFill>
-                  <a:srgbClr val="FFFFFF"/>
-                </a:solidFill>
-              </a:defRPr>
-            </a:pPr>
-            <a:r>
-              <a:t>•  Bản đồ 2D phẳng không thể hiện được độ dốc sườn núi hiểm trở.</a:t>
-            </a:r>
-          </a:p>
-          <a:p>
-            <a:pPr>
-              <a:spcAft>
-                <a:spcPts val="400"/>
-              </a:spcAft>
-              <a:defRPr sz="1050">
-                <a:solidFill>
-                  <a:srgbClr val="FFFFFF"/>
-                </a:solidFill>
-              </a:defRPr>
-            </a:pPr>
-            <a:r>
-              <a:t>•  Không quan sát được vết trượt bùn đất đang lan rộng theo hướng nào.</a:t>
-            </a:r>
-          </a:p>
-          <a:p>
-            <a:pPr>
-              <a:spcAft>
-                <a:spcPts val="400"/>
-              </a:spcAft>
-              <a:defRPr sz="1050">
-                <a:solidFill>
-                  <a:srgbClr val="FFFFFF"/>
-                </a:solidFill>
-              </a:defRPr>
-            </a:pPr>
-            <a:r>
-              <a:t>•  Không định vị được không gian 3 chiều giữa vị trí nạn nhân và chướng ngại vật.</a:t>
-            </a:r>
-          </a:p>
-          <a:p>
-            <a:pPr>
-              <a:spcAft>
-                <a:spcPts val="400"/>
-              </a:spcAft>
-              <a:defRPr sz="1050">
-                <a:solidFill>
-                  <a:srgbClr val="FFFFFF"/>
-                </a:solidFill>
-              </a:defRPr>
-            </a:pPr>
-            <a:r>
-              <a:t>•  Chỉ huy cứu hộ gặp khó khăn khi đánh giá hiện trường.</a:t>
-            </a:r>
-          </a:p>
-        </p:txBody>
-      </p:sp>
-      <p:sp>
-        <p:nvSpPr>
-          <p:cNvPr id="11" name="Rounded Rectangle 10"/>
+          <p:cNvPr id="8" name="Rounded Rectangle 7"/>
           <p:cNvSpPr/>
           <p:nvPr/>
         </p:nvSpPr>
         <p:spPr>
           <a:xfrm>
-            <a:off x="8961120" y="1645920"/>
-            <a:ext cx="2468880" cy="4389120"/>
+            <a:off x="3474720" y="1645920"/>
+            <a:ext cx="2468880" cy="73152"/>
           </a:xfrm>
           <a:prstGeom prst="roundRect">
             <a:avLst/>
           </a:prstGeom>
           <a:solidFill>
-            <a:srgbClr val="151E32"/>
+            <a:srgbClr val="FF8C00"/>
           </a:solidFill>
-          <a:ln w="15240">
-            <a:solidFill>
-              <a:srgbClr val="2A3B5C"/>
-            </a:solidFill>
+          <a:ln>
+            <a:noFill/>
           </a:ln>
         </p:spPr>
         <p:style>
@@ -4560,14 +4339,14 @@
       </p:sp>
       <p:sp>
         <p:nvSpPr>
-          <p:cNvPr id="12" name="TextBox 11"/>
+          <p:cNvPr id="9" name="TextBox 8"/>
           <p:cNvSpPr txBox="1"/>
           <p:nvPr/>
         </p:nvSpPr>
         <p:spPr>
           <a:xfrm>
-            <a:off x="9144000" y="1828800"/>
-            <a:ext cx="2103120" cy="4023360"/>
+            <a:off x="3657600" y="1810512"/>
+            <a:ext cx="2103120" cy="4160520"/>
           </a:xfrm>
           <a:prstGeom prst="rect">
             <a:avLst/>
@@ -4575,35 +4354,20 @@
           <a:noFill/>
         </p:spPr>
         <p:txBody>
-          <a:bodyPr wrap="square" tIns="0" bIns="0" lIns="0" rIns="0">
+          <a:bodyPr wrap="square" lIns="0" tIns="0" rIns="0" bIns="0">
             <a:spAutoFit/>
           </a:bodyPr>
           <a:lstStyle/>
           <a:p>
             <a:pPr>
-              <a:defRPr sz="1400" b="1">
-                <a:solidFill>
-                  <a:srgbClr val="10B981"/>
-                </a:solidFill>
-              </a:defRPr>
-            </a:pPr>
-            <a:r>
-              <a:t>4. Đội Cứu Hộ Thiếu Lộ Trình</a:t>
-            </a:r>
-          </a:p>
-          <a:p>
-            <a:pPr>
-              <a:spcAft>
-                <a:spcPts val="600"/>
-              </a:spcAft>
-              <a:defRPr sz="1000" i="1">
-                <a:solidFill>
-                  <a:srgbClr val="94A3B8"/>
-                </a:solidFill>
-              </a:defRPr>
-            </a:pPr>
-            <a:r>
-              <a:t>Nguy cơ đe dọa người cứu hộ</a:t>
+              <a:defRPr sz="1300" b="1">
+                <a:solidFill>
+                  <a:srgbClr val="FF8C00"/>
+                </a:solidFill>
+              </a:defRPr>
+            </a:pPr>
+            <a:r>
+              <a:t>2. Mất Sóng Khi Mưa Bão</a:t>
             </a:r>
           </a:p>
           <a:p>
@@ -4611,14 +4375,197 @@
               <a:spcAft>
                 <a:spcPts val="400"/>
               </a:spcAft>
-              <a:defRPr sz="1050">
-                <a:solidFill>
-                  <a:srgbClr val="FFFFFF"/>
-                </a:solidFill>
-              </a:defRPr>
-            </a:pPr>
-            <a:r>
-              <a:t>•  Đội cứu hộ di chuyển vào vùng thiên tai thường gặp đèo sụt lún.</a:t>
+              <a:defRPr sz="950">
+                <a:solidFill>
+                  <a:srgbClr val="9CB2C9"/>
+                </a:solidFill>
+              </a:defRPr>
+            </a:pPr>
+            <a:r>
+              <a:t>Mất kết nối hoàn toàn</a:t>
+            </a:r>
+          </a:p>
+          <a:p>
+            <a:pPr>
+              <a:spcBef>
+                <a:spcPts val="300"/>
+              </a:spcBef>
+              <a:defRPr sz="1000">
+                <a:solidFill>
+                  <a:srgbClr val="FFFFFF"/>
+                </a:solidFill>
+              </a:defRPr>
+            </a:pPr>
+            <a:r>
+              <a:t>• Mưa bão quật đổ cột BTS, sạt đường đứt cáp viễn thông.</a:t>
+            </a:r>
+          </a:p>
+          <a:p>
+            <a:pPr>
+              <a:spcBef>
+                <a:spcPts val="300"/>
+              </a:spcBef>
+              <a:defRPr sz="1000">
+                <a:solidFill>
+                  <a:srgbClr val="FFFFFF"/>
+                </a:solidFill>
+              </a:defRPr>
+            </a:pPr>
+            <a:r>
+              <a:t>• Các bản làng bị cô lập mất sạch 100% sóng 4G/Internet.</a:t>
+            </a:r>
+          </a:p>
+          <a:p>
+            <a:pPr>
+              <a:spcBef>
+                <a:spcPts val="300"/>
+              </a:spcBef>
+              <a:defRPr sz="1000">
+                <a:solidFill>
+                  <a:srgbClr val="FFFFFF"/>
+                </a:solidFill>
+              </a:defRPr>
+            </a:pPr>
+            <a:r>
+              <a:t>• Người dân không thể nhận tin tức qua mạng khi di chuyển qua vùng nguy hiểm.</a:t>
+            </a:r>
+          </a:p>
+          <a:p>
+            <a:pPr>
+              <a:spcBef>
+                <a:spcPts val="300"/>
+              </a:spcBef>
+              <a:defRPr sz="1000">
+                <a:solidFill>
+                  <a:srgbClr val="FFFFFF"/>
+                </a:solidFill>
+              </a:defRPr>
+            </a:pPr>
+            <a:r>
+              <a:t>• Ứng dụng thông thường hoàn toàn tê liệt khi không có Internet.</a:t>
+            </a:r>
+          </a:p>
+        </p:txBody>
+      </p:sp>
+      <p:sp>
+        <p:nvSpPr>
+          <p:cNvPr id="10" name="Rounded Rectangle 9"/>
+          <p:cNvSpPr/>
+          <p:nvPr/>
+        </p:nvSpPr>
+        <p:spPr>
+          <a:xfrm>
+            <a:off x="6217920" y="1645920"/>
+            <a:ext cx="2468880" cy="4389120"/>
+          </a:xfrm>
+          <a:prstGeom prst="roundRect">
+            <a:avLst/>
+          </a:prstGeom>
+          <a:solidFill>
+            <a:srgbClr val="131E31"/>
+          </a:solidFill>
+          <a:ln w="12700">
+            <a:solidFill>
+              <a:srgbClr val="1F3A52"/>
+            </a:solidFill>
+          </a:ln>
+        </p:spPr>
+        <p:style>
+          <a:lnRef idx="1">
+            <a:schemeClr val="accent1"/>
+          </a:lnRef>
+          <a:fillRef idx="3">
+            <a:schemeClr val="accent1"/>
+          </a:fillRef>
+          <a:effectRef idx="2">
+            <a:schemeClr val="accent1"/>
+          </a:effectRef>
+          <a:fontRef idx="minor">
+            <a:schemeClr val="lt1"/>
+          </a:fontRef>
+        </p:style>
+        <p:txBody>
+          <a:bodyPr rtlCol="0" anchor="ctr"/>
+          <a:lstStyle/>
+          <a:p>
+            <a:pPr algn="ctr"/>
+          </a:p>
+        </p:txBody>
+      </p:sp>
+      <p:sp>
+        <p:nvSpPr>
+          <p:cNvPr id="11" name="Rounded Rectangle 10"/>
+          <p:cNvSpPr/>
+          <p:nvPr/>
+        </p:nvSpPr>
+        <p:spPr>
+          <a:xfrm>
+            <a:off x="6217920" y="1645920"/>
+            <a:ext cx="2468880" cy="73152"/>
+          </a:xfrm>
+          <a:prstGeom prst="roundRect">
+            <a:avLst/>
+          </a:prstGeom>
+          <a:solidFill>
+            <a:srgbClr val="00D4FF"/>
+          </a:solidFill>
+          <a:ln>
+            <a:noFill/>
+          </a:ln>
+        </p:spPr>
+        <p:style>
+          <a:lnRef idx="1">
+            <a:schemeClr val="accent1"/>
+          </a:lnRef>
+          <a:fillRef idx="3">
+            <a:schemeClr val="accent1"/>
+          </a:fillRef>
+          <a:effectRef idx="2">
+            <a:schemeClr val="accent1"/>
+          </a:effectRef>
+          <a:fontRef idx="minor">
+            <a:schemeClr val="lt1"/>
+          </a:fontRef>
+        </p:style>
+        <p:txBody>
+          <a:bodyPr rtlCol="0" anchor="ctr"/>
+          <a:lstStyle/>
+          <a:p>
+            <a:pPr algn="ctr"/>
+          </a:p>
+        </p:txBody>
+      </p:sp>
+      <p:sp>
+        <p:nvSpPr>
+          <p:cNvPr id="12" name="TextBox 11"/>
+          <p:cNvSpPr txBox="1"/>
+          <p:nvPr/>
+        </p:nvSpPr>
+        <p:spPr>
+          <a:xfrm>
+            <a:off x="6400800" y="1810512"/>
+            <a:ext cx="2103120" cy="4160520"/>
+          </a:xfrm>
+          <a:prstGeom prst="rect">
+            <a:avLst/>
+          </a:prstGeom>
+          <a:noFill/>
+        </p:spPr>
+        <p:txBody>
+          <a:bodyPr wrap="square" lIns="0" tIns="0" rIns="0" bIns="0">
+            <a:spAutoFit/>
+          </a:bodyPr>
+          <a:lstStyle/>
+          <a:p>
+            <a:pPr>
+              <a:defRPr sz="1300" b="1">
+                <a:solidFill>
+                  <a:srgbClr val="00D4FF"/>
+                </a:solidFill>
+              </a:defRPr>
+            </a:pPr>
+            <a:r>
+              <a:t>3. Bản Đồ 2D Thiếu Trực Quan</a:t>
             </a:r>
           </a:p>
           <a:p>
@@ -4626,14 +4573,197 @@
               <a:spcAft>
                 <a:spcPts val="400"/>
               </a:spcAft>
-              <a:defRPr sz="1050">
-                <a:solidFill>
-                  <a:srgbClr val="FFFFFF"/>
-                </a:solidFill>
-              </a:defRPr>
-            </a:pPr>
-            <a:r>
-              <a:t>•  Không biết cung đường nào bị đất đá vùi lấp, đường nào an toàn.</a:t>
+              <a:defRPr sz="950">
+                <a:solidFill>
+                  <a:srgbClr val="9CB2C9"/>
+                </a:solidFill>
+              </a:defRPr>
+            </a:pPr>
+            <a:r>
+              <a:t>Hạn chế của bản đồ phẳng</a:t>
+            </a:r>
+          </a:p>
+          <a:p>
+            <a:pPr>
+              <a:spcBef>
+                <a:spcPts val="300"/>
+              </a:spcBef>
+              <a:defRPr sz="1000">
+                <a:solidFill>
+                  <a:srgbClr val="FFFFFF"/>
+                </a:solidFill>
+              </a:defRPr>
+            </a:pPr>
+            <a:r>
+              <a:t>• Bản đồ 2D phẳng không thể hiện được độ dốc sườn núi hiểm trở.</a:t>
+            </a:r>
+          </a:p>
+          <a:p>
+            <a:pPr>
+              <a:spcBef>
+                <a:spcPts val="300"/>
+              </a:spcBef>
+              <a:defRPr sz="1000">
+                <a:solidFill>
+                  <a:srgbClr val="FFFFFF"/>
+                </a:solidFill>
+              </a:defRPr>
+            </a:pPr>
+            <a:r>
+              <a:t>• Không quan sát được vết trượt bùn đất đang lan rộng theo hướng nào.</a:t>
+            </a:r>
+          </a:p>
+          <a:p>
+            <a:pPr>
+              <a:spcBef>
+                <a:spcPts val="300"/>
+              </a:spcBef>
+              <a:defRPr sz="1000">
+                <a:solidFill>
+                  <a:srgbClr val="FFFFFF"/>
+                </a:solidFill>
+              </a:defRPr>
+            </a:pPr>
+            <a:r>
+              <a:t>• Cán bộ khó đánh giá tương quan giữa vách dốc và khu dân cư.</a:t>
+            </a:r>
+          </a:p>
+          <a:p>
+            <a:pPr>
+              <a:spcBef>
+                <a:spcPts val="300"/>
+              </a:spcBef>
+              <a:defRPr sz="1000">
+                <a:solidFill>
+                  <a:srgbClr val="FFFFFF"/>
+                </a:solidFill>
+              </a:defRPr>
+            </a:pPr>
+            <a:r>
+              <a:t>• Khó đối chiếu ảnh vệ tinh trước và sau để thẩm định nguy cơ.</a:t>
+            </a:r>
+          </a:p>
+        </p:txBody>
+      </p:sp>
+      <p:sp>
+        <p:nvSpPr>
+          <p:cNvPr id="13" name="Rounded Rectangle 12"/>
+          <p:cNvSpPr/>
+          <p:nvPr/>
+        </p:nvSpPr>
+        <p:spPr>
+          <a:xfrm>
+            <a:off x="8961120" y="1645920"/>
+            <a:ext cx="2468880" cy="4389120"/>
+          </a:xfrm>
+          <a:prstGeom prst="roundRect">
+            <a:avLst/>
+          </a:prstGeom>
+          <a:solidFill>
+            <a:srgbClr val="131E31"/>
+          </a:solidFill>
+          <a:ln w="12700">
+            <a:solidFill>
+              <a:srgbClr val="1F3A52"/>
+            </a:solidFill>
+          </a:ln>
+        </p:spPr>
+        <p:style>
+          <a:lnRef idx="1">
+            <a:schemeClr val="accent1"/>
+          </a:lnRef>
+          <a:fillRef idx="3">
+            <a:schemeClr val="accent1"/>
+          </a:fillRef>
+          <a:effectRef idx="2">
+            <a:schemeClr val="accent1"/>
+          </a:effectRef>
+          <a:fontRef idx="minor">
+            <a:schemeClr val="lt1"/>
+          </a:fontRef>
+        </p:style>
+        <p:txBody>
+          <a:bodyPr rtlCol="0" anchor="ctr"/>
+          <a:lstStyle/>
+          <a:p>
+            <a:pPr algn="ctr"/>
+          </a:p>
+        </p:txBody>
+      </p:sp>
+      <p:sp>
+        <p:nvSpPr>
+          <p:cNvPr id="14" name="Rounded Rectangle 13"/>
+          <p:cNvSpPr/>
+          <p:nvPr/>
+        </p:nvSpPr>
+        <p:spPr>
+          <a:xfrm>
+            <a:off x="8961120" y="1645920"/>
+            <a:ext cx="2468880" cy="73152"/>
+          </a:xfrm>
+          <a:prstGeom prst="roundRect">
+            <a:avLst/>
+          </a:prstGeom>
+          <a:solidFill>
+            <a:srgbClr val="10B981"/>
+          </a:solidFill>
+          <a:ln>
+            <a:noFill/>
+          </a:ln>
+        </p:spPr>
+        <p:style>
+          <a:lnRef idx="1">
+            <a:schemeClr val="accent1"/>
+          </a:lnRef>
+          <a:fillRef idx="3">
+            <a:schemeClr val="accent1"/>
+          </a:fillRef>
+          <a:effectRef idx="2">
+            <a:schemeClr val="accent1"/>
+          </a:effectRef>
+          <a:fontRef idx="minor">
+            <a:schemeClr val="lt1"/>
+          </a:fontRef>
+        </p:style>
+        <p:txBody>
+          <a:bodyPr rtlCol="0" anchor="ctr"/>
+          <a:lstStyle/>
+          <a:p>
+            <a:pPr algn="ctr"/>
+          </a:p>
+        </p:txBody>
+      </p:sp>
+      <p:sp>
+        <p:nvSpPr>
+          <p:cNvPr id="15" name="TextBox 14"/>
+          <p:cNvSpPr txBox="1"/>
+          <p:nvPr/>
+        </p:nvSpPr>
+        <p:spPr>
+          <a:xfrm>
+            <a:off x="9144000" y="1810512"/>
+            <a:ext cx="2103120" cy="4160520"/>
+          </a:xfrm>
+          <a:prstGeom prst="rect">
+            <a:avLst/>
+          </a:prstGeom>
+          <a:noFill/>
+        </p:spPr>
+        <p:txBody>
+          <a:bodyPr wrap="square" lIns="0" tIns="0" rIns="0" bIns="0">
+            <a:spAutoFit/>
+          </a:bodyPr>
+          <a:lstStyle/>
+          <a:p>
+            <a:pPr>
+              <a:defRPr sz="1300" b="1">
+                <a:solidFill>
+                  <a:srgbClr val="10B981"/>
+                </a:solidFill>
+              </a:defRPr>
+            </a:pPr>
+            <a:r>
+              <a:t>4. Cảnh Báo Thiếu Kịp Thời</a:t>
             </a:r>
           </a:p>
           <a:p>
@@ -4641,29 +4771,74 @@
               <a:spcAft>
                 <a:spcPts val="400"/>
               </a:spcAft>
-              <a:defRPr sz="1050">
-                <a:solidFill>
-                  <a:srgbClr val="FFFFFF"/>
-                </a:solidFill>
-              </a:defRPr>
-            </a:pPr>
-            <a:r>
-              <a:t>•  Nguy cơ xe cứu nạn bị mắc kẹt hoặc gặp sạt trượt thứ cấp.</a:t>
-            </a:r>
-          </a:p>
-          <a:p>
-            <a:pPr>
-              <a:spcAft>
-                <a:spcPts val="400"/>
-              </a:spcAft>
-              <a:defRPr sz="1050">
-                <a:solidFill>
-                  <a:srgbClr val="FFFFFF"/>
-                </a:solidFill>
-              </a:defRPr>
-            </a:pPr>
-            <a:r>
-              <a:t>•  Thiếu thuật toán AI đề xuất tuyến đường né tránh vùng nguy hiểm.</a:t>
+              <a:defRPr sz="950">
+                <a:solidFill>
+                  <a:srgbClr val="9CB2C9"/>
+                </a:solidFill>
+              </a:defRPr>
+            </a:pPr>
+            <a:r>
+              <a:t>Thiếu kênh cảnh báo tức thì</a:t>
+            </a:r>
+          </a:p>
+          <a:p>
+            <a:pPr>
+              <a:spcBef>
+                <a:spcPts val="300"/>
+              </a:spcBef>
+              <a:defRPr sz="1000">
+                <a:solidFill>
+                  <a:srgbClr val="FFFFFF"/>
+                </a:solidFill>
+              </a:defRPr>
+            </a:pPr>
+            <a:r>
+              <a:t>• Thiếu công cụ cho người có thẩm quyền chủ động phát cảnh báo khẩn cấp.</a:t>
+            </a:r>
+          </a:p>
+          <a:p>
+            <a:pPr>
+              <a:spcBef>
+                <a:spcPts val="300"/>
+              </a:spcBef>
+              <a:defRPr sz="1000">
+                <a:solidFill>
+                  <a:srgbClr val="FFFFFF"/>
+                </a:solidFill>
+              </a:defRPr>
+            </a:pPr>
+            <a:r>
+              <a:t>• Chưa tích hợp đồng thời kênh SMS trực tiếp và Push Notification di động.</a:t>
+            </a:r>
+          </a:p>
+          <a:p>
+            <a:pPr>
+              <a:spcBef>
+                <a:spcPts val="300"/>
+              </a:spcBef>
+              <a:defRPr sz="1000">
+                <a:solidFill>
+                  <a:srgbClr val="FFFFFF"/>
+                </a:solidFill>
+              </a:defRPr>
+            </a:pPr>
+            <a:r>
+              <a:t>• Chưa có cơ chế lọc người nhận chính xác theo khu vực chịu ảnh hưởng.</a:t>
+            </a:r>
+          </a:p>
+          <a:p>
+            <a:pPr>
+              <a:spcBef>
+                <a:spcPts val="300"/>
+              </a:spcBef>
+              <a:defRPr sz="1000">
+                <a:solidFill>
+                  <a:srgbClr val="FFFFFF"/>
+                </a:solidFill>
+              </a:defRPr>
+            </a:pPr>
+            <a:r>
+              <a:t>• Người dân không nhận được chỉ thị sơ tán khẩn cấp trước giờ G.</a:t>
             </a:r>
           </a:p>
         </p:txBody>
@@ -4701,7 +4876,7 @@
             <a:avLst/>
           </a:prstGeom>
           <a:solidFill>
-            <a:srgbClr val="0B0F19"/>
+            <a:srgbClr val="0B1320"/>
           </a:solidFill>
           <a:ln>
             <a:noFill/>
@@ -4737,8 +4912,8 @@
         </p:nvSpPr>
         <p:spPr>
           <a:xfrm>
-            <a:off x="731520" y="365760"/>
-            <a:ext cx="10515600" cy="365760"/>
+            <a:off x="731520" y="457200"/>
+            <a:ext cx="10698480" cy="1005840"/>
           </a:xfrm>
           <a:prstGeom prst="rect">
             <a:avLst/>
@@ -4746,47 +4921,27 @@
           <a:noFill/>
         </p:spPr>
         <p:txBody>
-          <a:bodyPr wrap="square" tIns="0" bIns="0" lIns="0" rIns="0">
+          <a:bodyPr wrap="square" lIns="0" tIns="0" rIns="0" bIns="0">
             <a:spAutoFit/>
           </a:bodyPr>
           <a:lstStyle/>
           <a:p>
             <a:pPr>
-              <a:defRPr sz="1000" b="1">
-                <a:solidFill>
-                  <a:srgbClr val="0EA5E9"/>
-                </a:solidFill>
-              </a:defRPr>
-            </a:pPr>
-            <a:r>
-              <a:t>GEOSENTRY (TERRAWATCH) • SOFTWARE ENGINEERING CAPSTONE</a:t>
-            </a:r>
-          </a:p>
-        </p:txBody>
-      </p:sp>
-      <p:sp>
-        <p:nvSpPr>
-          <p:cNvPr id="4" name="TextBox 3"/>
-          <p:cNvSpPr txBox="1"/>
-          <p:nvPr/>
-        </p:nvSpPr>
-        <p:spPr>
-          <a:xfrm>
-            <a:off x="731520" y="640080"/>
-            <a:ext cx="10515600" cy="640080"/>
-          </a:xfrm>
-          <a:prstGeom prst="rect">
-            <a:avLst/>
-          </a:prstGeom>
-          <a:noFill/>
-        </p:spPr>
-        <p:txBody>
-          <a:bodyPr wrap="square" tIns="0" bIns="0" lIns="0" rIns="0">
-            <a:spAutoFit/>
-          </a:bodyPr>
-          <a:lstStyle/>
-          <a:p>
-            <a:pPr>
+              <a:defRPr sz="1050" b="1">
+                <a:solidFill>
+                  <a:srgbClr val="FF8C00"/>
+                </a:solidFill>
+              </a:defRPr>
+            </a:pPr>
+            <a:r>
+              <a:t>GEOSENTRY • CAPSTONE DEFENSE 2026</a:t>
+            </a:r>
+          </a:p>
+          <a:p>
+            <a:pPr>
+              <a:spcBef>
+                <a:spcPts val="300"/>
+              </a:spcBef>
               <a:defRPr sz="2200" b="1">
                 <a:solidFill>
                   <a:srgbClr val="FFFFFF"/>
@@ -4794,14 +4949,14 @@
               </a:defRPr>
             </a:pPr>
             <a:r>
-              <a:t>GIẢI PHÁP GEOSENTRY: HỆ SINH THÁI CẢNH BÁO &amp; CỨU HỘ ĐỒNG BỘ</a:t>
-            </a:r>
-          </a:p>
-        </p:txBody>
-      </p:sp>
-      <p:sp>
-        <p:nvSpPr>
-          <p:cNvPr id="5" name="Rounded Rectangle 4"/>
+              <a:t>GIẢI PHÁP GEOSENTRY: HỆ SINH THÁI CẢNH BÁO SỚM SẠT LỞ ĐỒNG BỘ</a:t>
+            </a:r>
+          </a:p>
+        </p:txBody>
+      </p:sp>
+      <p:sp>
+        <p:nvSpPr>
+          <p:cNvPr id="4" name="Rounded Rectangle 3"/>
           <p:cNvSpPr/>
           <p:nvPr/>
         </p:nvSpPr>
@@ -4814,11 +4969,11 @@
             <a:avLst/>
           </a:prstGeom>
           <a:solidFill>
-            <a:srgbClr val="151E32"/>
+            <a:srgbClr val="131E31"/>
           </a:solidFill>
-          <a:ln w="15240">
+          <a:ln w="12700">
             <a:solidFill>
-              <a:srgbClr val="2A3B5C"/>
+              <a:srgbClr val="1F3A52"/>
             </a:solidFill>
           </a:ln>
         </p:spPr>
@@ -4846,105 +5001,23 @@
       </p:sp>
       <p:sp>
         <p:nvSpPr>
-          <p:cNvPr id="6" name="TextBox 5"/>
-          <p:cNvSpPr txBox="1"/>
-          <p:nvPr/>
-        </p:nvSpPr>
-        <p:spPr>
-          <a:xfrm>
-            <a:off x="914400" y="1828800"/>
-            <a:ext cx="4754880" cy="1737360"/>
-          </a:xfrm>
-          <a:prstGeom prst="rect">
-            <a:avLst/>
-          </a:prstGeom>
-          <a:noFill/>
-        </p:spPr>
-        <p:txBody>
-          <a:bodyPr wrap="square" tIns="0" bIns="0" lIns="0" rIns="0">
-            <a:spAutoFit/>
-          </a:bodyPr>
-          <a:lstStyle/>
-          <a:p>
-            <a:pPr>
-              <a:defRPr sz="1400" b="1">
-                <a:solidFill>
-                  <a:srgbClr val="0EA5E9"/>
-                </a:solidFill>
-              </a:defRPr>
-            </a:pPr>
-            <a:r>
-              <a:t>🛰️ Tầng Viễn Thám Vĩ Mô (Sentinel-2 + DEM)</a:t>
-            </a:r>
-          </a:p>
-          <a:p>
-            <a:pPr>
-              <a:spcAft>
-                <a:spcPts val="400"/>
-              </a:spcAft>
-              <a:defRPr sz="1050">
-                <a:solidFill>
-                  <a:srgbClr val="FFFFFF"/>
-                </a:solidFill>
-              </a:defRPr>
-            </a:pPr>
-            <a:r>
-              <a:t>•  Vệ tinh quét diện rộng không cần thiết bị hiện trường.</a:t>
-            </a:r>
-          </a:p>
-          <a:p>
-            <a:pPr>
-              <a:spcAft>
-                <a:spcPts val="400"/>
-              </a:spcAft>
-              <a:defRPr sz="1050">
-                <a:solidFill>
-                  <a:srgbClr val="FFFFFF"/>
-                </a:solidFill>
-              </a:defRPr>
-            </a:pPr>
-            <a:r>
-              <a:t>•  Lọc mây thông minh và tính chỉ số suy giảm thảm phủ Delta-NDVI.</a:t>
-            </a:r>
-          </a:p>
-          <a:p>
-            <a:pPr>
-              <a:spcAft>
-                <a:spcPts val="400"/>
-              </a:spcAft>
-              <a:defRPr sz="1050">
-                <a:solidFill>
-                  <a:srgbClr val="FFFFFF"/>
-                </a:solidFill>
-              </a:defRPr>
-            </a:pPr>
-            <a:r>
-              <a:t>•  Trích xuất độ dốc sườn đồi từ ảnh số độ cao SRTM 30m DEM.</a:t>
-            </a:r>
-          </a:p>
-        </p:txBody>
-      </p:sp>
-      <p:sp>
-        <p:nvSpPr>
-          <p:cNvPr id="7" name="Rounded Rectangle 6"/>
+          <p:cNvPr id="5" name="Rounded Rectangle 4"/>
           <p:cNvSpPr/>
           <p:nvPr/>
         </p:nvSpPr>
         <p:spPr>
           <a:xfrm>
-            <a:off x="6309360" y="1645920"/>
-            <a:ext cx="5120640" cy="2103120"/>
+            <a:off x="731520" y="1645920"/>
+            <a:ext cx="5120640" cy="73152"/>
           </a:xfrm>
           <a:prstGeom prst="roundRect">
             <a:avLst/>
           </a:prstGeom>
           <a:solidFill>
-            <a:srgbClr val="151E32"/>
+            <a:srgbClr val="00D4FF"/>
           </a:solidFill>
-          <a:ln w="15240">
-            <a:solidFill>
-              <a:srgbClr val="2A3B5C"/>
-            </a:solidFill>
+          <a:ln>
+            <a:noFill/>
           </a:ln>
         </p:spPr>
         <p:style>
@@ -4971,14 +5044,14 @@
       </p:sp>
       <p:sp>
         <p:nvSpPr>
-          <p:cNvPr id="8" name="TextBox 7"/>
+          <p:cNvPr id="6" name="TextBox 5"/>
           <p:cNvSpPr txBox="1"/>
           <p:nvPr/>
         </p:nvSpPr>
         <p:spPr>
           <a:xfrm>
-            <a:off x="6492240" y="1828800"/>
-            <a:ext cx="4754880" cy="1737360"/>
+            <a:off x="914400" y="1810512"/>
+            <a:ext cx="4754880" cy="1874520"/>
           </a:xfrm>
           <a:prstGeom prst="rect">
             <a:avLst/>
@@ -4986,89 +5059,89 @@
           <a:noFill/>
         </p:spPr>
         <p:txBody>
-          <a:bodyPr wrap="square" tIns="0" bIns="0" lIns="0" rIns="0">
+          <a:bodyPr wrap="square" lIns="0" tIns="0" rIns="0" bIns="0">
             <a:spAutoFit/>
           </a:bodyPr>
           <a:lstStyle/>
           <a:p>
             <a:pPr>
-              <a:defRPr sz="1400" b="1">
-                <a:solidFill>
-                  <a:srgbClr val="10B981"/>
-                </a:solidFill>
-              </a:defRPr>
-            </a:pPr>
-            <a:r>
-              <a:t>🧠 Tầng Phân Tích AI &amp; Đề Xuất Cứu Hộ</a:t>
-            </a:r>
-          </a:p>
-          <a:p>
-            <a:pPr>
-              <a:spcAft>
-                <a:spcPts val="400"/>
-              </a:spcAft>
-              <a:defRPr sz="1050">
-                <a:solidFill>
-                  <a:srgbClr val="FFFFFF"/>
-                </a:solidFill>
-              </a:defRPr>
-            </a:pPr>
-            <a:r>
-              <a:t>•  DeepLabV3+ ONNX nhận diện đa giác vết trượt sạt lở (F1 = 0.768).</a:t>
-            </a:r>
-          </a:p>
-          <a:p>
-            <a:pPr>
-              <a:spcAft>
-                <a:spcPts val="400"/>
-              </a:spcAft>
-              <a:defRPr sz="1050">
-                <a:solidFill>
-                  <a:srgbClr val="FFFFFF"/>
-                </a:solidFill>
-              </a:defRPr>
-            </a:pPr>
-            <a:r>
-              <a:t>•  Tự động vector hóa ra chuẩn PostGIS MultiPolygon GeoJSON.</a:t>
-            </a:r>
-          </a:p>
-          <a:p>
-            <a:pPr>
-              <a:spcAft>
-                <a:spcPts val="400"/>
-              </a:spcAft>
-              <a:defRPr sz="1050">
-                <a:solidFill>
-                  <a:srgbClr val="FFFFFF"/>
-                </a:solidFill>
-              </a:defRPr>
-            </a:pPr>
-            <a:r>
-              <a:t>•  Thuật toán AI A* tính tuyến đường xe cứu hộ né tránh vùng nguy hiểm.</a:t>
-            </a:r>
-          </a:p>
-        </p:txBody>
-      </p:sp>
-      <p:sp>
-        <p:nvSpPr>
-          <p:cNvPr id="9" name="Rounded Rectangle 8"/>
+              <a:defRPr sz="1300" b="1">
+                <a:solidFill>
+                  <a:srgbClr val="00D4FF"/>
+                </a:solidFill>
+              </a:defRPr>
+            </a:pPr>
+            <a:r>
+              <a:t>🛰️ Tầng Viễn Thám Vĩ Mô (Sentinel-2 + DEM)</a:t>
+            </a:r>
+          </a:p>
+          <a:p>
+            <a:pPr>
+              <a:spcBef>
+                <a:spcPts val="300"/>
+              </a:spcBef>
+              <a:defRPr sz="1000">
+                <a:solidFill>
+                  <a:srgbClr val="FFFFFF"/>
+                </a:solidFill>
+              </a:defRPr>
+            </a:pPr>
+            <a:r>
+              <a:t>• Vệ tinh quét diện rộng không cần thiết bị hiện trường.</a:t>
+            </a:r>
+          </a:p>
+          <a:p>
+            <a:pPr>
+              <a:spcBef>
+                <a:spcPts val="300"/>
+              </a:spcBef>
+              <a:defRPr sz="1000">
+                <a:solidFill>
+                  <a:srgbClr val="FFFFFF"/>
+                </a:solidFill>
+              </a:defRPr>
+            </a:pPr>
+            <a:r>
+              <a:t>• Lọc mây thông minh và tính chỉ số suy giảm thảm phủ Delta-NDVI.</a:t>
+            </a:r>
+          </a:p>
+          <a:p>
+            <a:pPr>
+              <a:spcBef>
+                <a:spcPts val="300"/>
+              </a:spcBef>
+              <a:defRPr sz="1000">
+                <a:solidFill>
+                  <a:srgbClr val="FFFFFF"/>
+                </a:solidFill>
+              </a:defRPr>
+            </a:pPr>
+            <a:r>
+              <a:t>• Trích xuất độ dốc sườn đồi từ ảnh số độ cao SRTM 30m DEM.</a:t>
+            </a:r>
+          </a:p>
+        </p:txBody>
+      </p:sp>
+      <p:sp>
+        <p:nvSpPr>
+          <p:cNvPr id="7" name="Rounded Rectangle 6"/>
           <p:cNvSpPr/>
           <p:nvPr/>
         </p:nvSpPr>
         <p:spPr>
           <a:xfrm>
-            <a:off x="731520" y="4114800"/>
+            <a:off x="6309360" y="1645920"/>
             <a:ext cx="5120640" cy="2103120"/>
           </a:xfrm>
           <a:prstGeom prst="roundRect">
             <a:avLst/>
           </a:prstGeom>
           <a:solidFill>
-            <a:srgbClr val="151E32"/>
+            <a:srgbClr val="131E31"/>
           </a:solidFill>
-          <a:ln w="15240">
+          <a:ln w="12700">
             <a:solidFill>
-              <a:srgbClr val="2A3B5C"/>
+              <a:srgbClr val="1F3A52"/>
             </a:solidFill>
           </a:ln>
         </p:spPr>
@@ -5096,105 +5169,23 @@
       </p:sp>
       <p:sp>
         <p:nvSpPr>
-          <p:cNvPr id="10" name="TextBox 9"/>
-          <p:cNvSpPr txBox="1"/>
-          <p:nvPr/>
-        </p:nvSpPr>
-        <p:spPr>
-          <a:xfrm>
-            <a:off x="914400" y="4297680"/>
-            <a:ext cx="4754880" cy="1737360"/>
-          </a:xfrm>
-          <a:prstGeom prst="rect">
-            <a:avLst/>
-          </a:prstGeom>
-          <a:noFill/>
-        </p:spPr>
-        <p:txBody>
-          <a:bodyPr wrap="square" tIns="0" bIns="0" lIns="0" rIns="0">
-            <a:spAutoFit/>
-          </a:bodyPr>
-          <a:lstStyle/>
-          <a:p>
-            <a:pPr>
-              <a:defRPr sz="1400" b="1">
-                <a:solidFill>
-                  <a:srgbClr val="F97316"/>
-                </a:solidFill>
-              </a:defRPr>
-            </a:pPr>
-            <a:r>
-              <a:t>🖥️ Tầng Chỉ Huy 3D (WebGIS Command Center)</a:t>
-            </a:r>
-          </a:p>
-          <a:p>
-            <a:pPr>
-              <a:spcAft>
-                <a:spcPts val="400"/>
-              </a:spcAft>
-              <a:defRPr sz="1050">
-                <a:solidFill>
-                  <a:srgbClr val="FFFFFF"/>
-                </a:solidFill>
-              </a:defRPr>
-            </a:pPr>
-            <a:r>
-              <a:t>•  Bản đồ địa hình Mapbox 3D Terrain sườn núi sống động.</a:t>
-            </a:r>
-          </a:p>
-          <a:p>
-            <a:pPr>
-              <a:spcAft>
-                <a:spcPts val="400"/>
-              </a:spcAft>
-              <a:defRPr sz="1050">
-                <a:solidFill>
-                  <a:srgbClr val="FFFFFF"/>
-                </a:solidFill>
-              </a:defRPr>
-            </a:pPr>
-            <a:r>
-              <a:t>•  Mô hình 3D Hiện trường: Danger Zone, Victim, Hazard, Rescue Route.</a:t>
-            </a:r>
-          </a:p>
-          <a:p>
-            <a:pPr>
-              <a:spcAft>
-                <a:spcPts val="400"/>
-              </a:spcAft>
-              <a:defRPr sz="1050">
-                <a:solidFill>
-                  <a:srgbClr val="FFFFFF"/>
-                </a:solidFill>
-              </a:defRPr>
-            </a:pPr>
-            <a:r>
-              <a:t>•  Thanh trượt đối soát ảnh trước/sau và hàng đợi duyệt sạt lở 1-click.</a:t>
-            </a:r>
-          </a:p>
-        </p:txBody>
-      </p:sp>
-      <p:sp>
-        <p:nvSpPr>
-          <p:cNvPr id="11" name="Rounded Rectangle 10"/>
+          <p:cNvPr id="8" name="Rounded Rectangle 7"/>
           <p:cNvSpPr/>
           <p:nvPr/>
         </p:nvSpPr>
         <p:spPr>
           <a:xfrm>
-            <a:off x="6309360" y="4114800"/>
-            <a:ext cx="5120640" cy="2103120"/>
+            <a:off x="6309360" y="1645920"/>
+            <a:ext cx="5120640" cy="73152"/>
           </a:xfrm>
           <a:prstGeom prst="roundRect">
             <a:avLst/>
           </a:prstGeom>
           <a:solidFill>
-            <a:srgbClr val="151E32"/>
+            <a:srgbClr val="10B981"/>
           </a:solidFill>
-          <a:ln w="15240">
-            <a:solidFill>
-              <a:srgbClr val="2A3B5C"/>
-            </a:solidFill>
+          <a:ln>
+            <a:noFill/>
           </a:ln>
         </p:spPr>
         <p:style>
@@ -5221,14 +5212,182 @@
       </p:sp>
       <p:sp>
         <p:nvSpPr>
+          <p:cNvPr id="9" name="TextBox 8"/>
+          <p:cNvSpPr txBox="1"/>
+          <p:nvPr/>
+        </p:nvSpPr>
+        <p:spPr>
+          <a:xfrm>
+            <a:off x="6492240" y="1810512"/>
+            <a:ext cx="4754880" cy="1874520"/>
+          </a:xfrm>
+          <a:prstGeom prst="rect">
+            <a:avLst/>
+          </a:prstGeom>
+          <a:noFill/>
+        </p:spPr>
+        <p:txBody>
+          <a:bodyPr wrap="square" lIns="0" tIns="0" rIns="0" bIns="0">
+            <a:spAutoFit/>
+          </a:bodyPr>
+          <a:lstStyle/>
+          <a:p>
+            <a:pPr>
+              <a:defRPr sz="1300" b="1">
+                <a:solidFill>
+                  <a:srgbClr val="10B981"/>
+                </a:solidFill>
+              </a:defRPr>
+            </a:pPr>
+            <a:r>
+              <a:t>🧠 Tầng Phân Tích AI &amp; Xếp Hạng Nguy Cơ</a:t>
+            </a:r>
+          </a:p>
+          <a:p>
+            <a:pPr>
+              <a:spcBef>
+                <a:spcPts val="300"/>
+              </a:spcBef>
+              <a:defRPr sz="1000">
+                <a:solidFill>
+                  <a:srgbClr val="FFFFFF"/>
+                </a:solidFill>
+              </a:defRPr>
+            </a:pPr>
+            <a:r>
+              <a:t>• DeepLabV3+ ONNX nhận diện đa giác vết trượt sạt lở (F1 = 0.768).</a:t>
+            </a:r>
+          </a:p>
+          <a:p>
+            <a:pPr>
+              <a:spcBef>
+                <a:spcPts val="300"/>
+              </a:spcBef>
+              <a:defRPr sz="1000">
+                <a:solidFill>
+                  <a:srgbClr val="FFFFFF"/>
+                </a:solidFill>
+              </a:defRPr>
+            </a:pPr>
+            <a:r>
+              <a:t>• Tự động vector hóa ra chuẩn PostGIS MultiPolygon GeoJSON.</a:t>
+            </a:r>
+          </a:p>
+          <a:p>
+            <a:pPr>
+              <a:spcBef>
+                <a:spcPts val="300"/>
+              </a:spcBef>
+              <a:defRPr sz="1000">
+                <a:solidFill>
+                  <a:srgbClr val="FFFFFF"/>
+                </a:solidFill>
+              </a:defRPr>
+            </a:pPr>
+            <a:r>
+              <a:t>• Tự động xếp hạng nguy cơ theo độ dốc và khoảng cách khu dân cư.</a:t>
+            </a:r>
+          </a:p>
+        </p:txBody>
+      </p:sp>
+      <p:sp>
+        <p:nvSpPr>
+          <p:cNvPr id="10" name="Rounded Rectangle 9"/>
+          <p:cNvSpPr/>
+          <p:nvPr/>
+        </p:nvSpPr>
+        <p:spPr>
+          <a:xfrm>
+            <a:off x="731520" y="4114800"/>
+            <a:ext cx="5120640" cy="2103120"/>
+          </a:xfrm>
+          <a:prstGeom prst="roundRect">
+            <a:avLst/>
+          </a:prstGeom>
+          <a:solidFill>
+            <a:srgbClr val="131E31"/>
+          </a:solidFill>
+          <a:ln w="12700">
+            <a:solidFill>
+              <a:srgbClr val="1F3A52"/>
+            </a:solidFill>
+          </a:ln>
+        </p:spPr>
+        <p:style>
+          <a:lnRef idx="1">
+            <a:schemeClr val="accent1"/>
+          </a:lnRef>
+          <a:fillRef idx="3">
+            <a:schemeClr val="accent1"/>
+          </a:fillRef>
+          <a:effectRef idx="2">
+            <a:schemeClr val="accent1"/>
+          </a:effectRef>
+          <a:fontRef idx="minor">
+            <a:schemeClr val="lt1"/>
+          </a:fontRef>
+        </p:style>
+        <p:txBody>
+          <a:bodyPr rtlCol="0" anchor="ctr"/>
+          <a:lstStyle/>
+          <a:p>
+            <a:pPr algn="ctr"/>
+          </a:p>
+        </p:txBody>
+      </p:sp>
+      <p:sp>
+        <p:nvSpPr>
+          <p:cNvPr id="11" name="Rounded Rectangle 10"/>
+          <p:cNvSpPr/>
+          <p:nvPr/>
+        </p:nvSpPr>
+        <p:spPr>
+          <a:xfrm>
+            <a:off x="731520" y="4114800"/>
+            <a:ext cx="5120640" cy="73152"/>
+          </a:xfrm>
+          <a:prstGeom prst="roundRect">
+            <a:avLst/>
+          </a:prstGeom>
+          <a:solidFill>
+            <a:srgbClr val="FF8C00"/>
+          </a:solidFill>
+          <a:ln>
+            <a:noFill/>
+          </a:ln>
+        </p:spPr>
+        <p:style>
+          <a:lnRef idx="1">
+            <a:schemeClr val="accent1"/>
+          </a:lnRef>
+          <a:fillRef idx="3">
+            <a:schemeClr val="accent1"/>
+          </a:fillRef>
+          <a:effectRef idx="2">
+            <a:schemeClr val="accent1"/>
+          </a:effectRef>
+          <a:fontRef idx="minor">
+            <a:schemeClr val="lt1"/>
+          </a:fontRef>
+        </p:style>
+        <p:txBody>
+          <a:bodyPr rtlCol="0" anchor="ctr"/>
+          <a:lstStyle/>
+          <a:p>
+            <a:pPr algn="ctr"/>
+          </a:p>
+        </p:txBody>
+      </p:sp>
+      <p:sp>
+        <p:nvSpPr>
           <p:cNvPr id="12" name="TextBox 11"/>
           <p:cNvSpPr txBox="1"/>
           <p:nvPr/>
         </p:nvSpPr>
         <p:spPr>
           <a:xfrm>
-            <a:off x="6492240" y="4297680"/>
-            <a:ext cx="4754880" cy="1737360"/>
+            <a:off x="914400" y="4279392"/>
+            <a:ext cx="4754880" cy="1874520"/>
           </a:xfrm>
           <a:prstGeom prst="rect">
             <a:avLst/>
@@ -5236,13 +5395,181 @@
           <a:noFill/>
         </p:spPr>
         <p:txBody>
-          <a:bodyPr wrap="square" tIns="0" bIns="0" lIns="0" rIns="0">
+          <a:bodyPr wrap="square" lIns="0" tIns="0" rIns="0" bIns="0">
             <a:spAutoFit/>
           </a:bodyPr>
           <a:lstStyle/>
           <a:p>
             <a:pPr>
-              <a:defRPr sz="1400" b="1">
+              <a:defRPr sz="1300" b="1">
+                <a:solidFill>
+                  <a:srgbClr val="FF8C00"/>
+                </a:solidFill>
+              </a:defRPr>
+            </a:pPr>
+            <a:r>
+              <a:t>🖥️ Tầng Chỉ Huy &amp; Cảnh Báo (WebGIS Command Center)</a:t>
+            </a:r>
+          </a:p>
+          <a:p>
+            <a:pPr>
+              <a:spcBef>
+                <a:spcPts val="300"/>
+              </a:spcBef>
+              <a:defRPr sz="1000">
+                <a:solidFill>
+                  <a:srgbClr val="FFFFFF"/>
+                </a:solidFill>
+              </a:defRPr>
+            </a:pPr>
+            <a:r>
+              <a:t>• Bản đồ địa hình Mapbox 3D Terrain sườn núi sống động.</a:t>
+            </a:r>
+          </a:p>
+          <a:p>
+            <a:pPr>
+              <a:spcBef>
+                <a:spcPts val="300"/>
+              </a:spcBef>
+              <a:defRPr sz="1000">
+                <a:solidFill>
+                  <a:srgbClr val="FFFFFF"/>
+                </a:solidFill>
+              </a:defRPr>
+            </a:pPr>
+            <a:r>
+              <a:t>• Thanh trượt đối soát ảnh trước/sau và hàng đợi duyệt sạt lở 1-click.</a:t>
+            </a:r>
+          </a:p>
+          <a:p>
+            <a:pPr>
+              <a:spcBef>
+                <a:spcPts val="300"/>
+              </a:spcBef>
+              <a:defRPr sz="1000">
+                <a:solidFill>
+                  <a:srgbClr val="FFFFFF"/>
+                </a:solidFill>
+              </a:defRPr>
+            </a:pPr>
+            <a:r>
+              <a:t>• Nút '🚨 Phát Cảnh Báo Khẩn Cấp' cho Admin gửi SMS + App Push.</a:t>
+            </a:r>
+          </a:p>
+        </p:txBody>
+      </p:sp>
+      <p:sp>
+        <p:nvSpPr>
+          <p:cNvPr id="13" name="Rounded Rectangle 12"/>
+          <p:cNvSpPr/>
+          <p:nvPr/>
+        </p:nvSpPr>
+        <p:spPr>
+          <a:xfrm>
+            <a:off x="6309360" y="4114800"/>
+            <a:ext cx="5120640" cy="2103120"/>
+          </a:xfrm>
+          <a:prstGeom prst="roundRect">
+            <a:avLst/>
+          </a:prstGeom>
+          <a:solidFill>
+            <a:srgbClr val="131E31"/>
+          </a:solidFill>
+          <a:ln w="12700">
+            <a:solidFill>
+              <a:srgbClr val="1F3A52"/>
+            </a:solidFill>
+          </a:ln>
+        </p:spPr>
+        <p:style>
+          <a:lnRef idx="1">
+            <a:schemeClr val="accent1"/>
+          </a:lnRef>
+          <a:fillRef idx="3">
+            <a:schemeClr val="accent1"/>
+          </a:fillRef>
+          <a:effectRef idx="2">
+            <a:schemeClr val="accent1"/>
+          </a:effectRef>
+          <a:fontRef idx="minor">
+            <a:schemeClr val="lt1"/>
+          </a:fontRef>
+        </p:style>
+        <p:txBody>
+          <a:bodyPr rtlCol="0" anchor="ctr"/>
+          <a:lstStyle/>
+          <a:p>
+            <a:pPr algn="ctr"/>
+          </a:p>
+        </p:txBody>
+      </p:sp>
+      <p:sp>
+        <p:nvSpPr>
+          <p:cNvPr id="14" name="Rounded Rectangle 13"/>
+          <p:cNvSpPr/>
+          <p:nvPr/>
+        </p:nvSpPr>
+        <p:spPr>
+          <a:xfrm>
+            <a:off x="6309360" y="4114800"/>
+            <a:ext cx="5120640" cy="73152"/>
+          </a:xfrm>
+          <a:prstGeom prst="roundRect">
+            <a:avLst/>
+          </a:prstGeom>
+          <a:solidFill>
+            <a:srgbClr val="EF4444"/>
+          </a:solidFill>
+          <a:ln>
+            <a:noFill/>
+          </a:ln>
+        </p:spPr>
+        <p:style>
+          <a:lnRef idx="1">
+            <a:schemeClr val="accent1"/>
+          </a:lnRef>
+          <a:fillRef idx="3">
+            <a:schemeClr val="accent1"/>
+          </a:fillRef>
+          <a:effectRef idx="2">
+            <a:schemeClr val="accent1"/>
+          </a:effectRef>
+          <a:fontRef idx="minor">
+            <a:schemeClr val="lt1"/>
+          </a:fontRef>
+        </p:style>
+        <p:txBody>
+          <a:bodyPr rtlCol="0" anchor="ctr"/>
+          <a:lstStyle/>
+          <a:p>
+            <a:pPr algn="ctr"/>
+          </a:p>
+        </p:txBody>
+      </p:sp>
+      <p:sp>
+        <p:nvSpPr>
+          <p:cNvPr id="15" name="TextBox 14"/>
+          <p:cNvSpPr txBox="1"/>
+          <p:nvPr/>
+        </p:nvSpPr>
+        <p:spPr>
+          <a:xfrm>
+            <a:off x="6492240" y="4279392"/>
+            <a:ext cx="4754880" cy="1874520"/>
+          </a:xfrm>
+          <a:prstGeom prst="rect">
+            <a:avLst/>
+          </a:prstGeom>
+          <a:noFill/>
+        </p:spPr>
+        <p:txBody>
+          <a:bodyPr wrap="square" lIns="0" tIns="0" rIns="0" bIns="0">
+            <a:spAutoFit/>
+          </a:bodyPr>
+          <a:lstStyle/>
+          <a:p>
+            <a:pPr>
+              <a:defRPr sz="1300" b="1">
                 <a:solidFill>
                   <a:srgbClr val="EF4444"/>
                 </a:solidFill>
@@ -5254,47 +5581,47 @@
           </a:p>
           <a:p>
             <a:pPr>
-              <a:spcAft>
-                <a:spcPts val="400"/>
-              </a:spcAft>
-              <a:defRPr sz="1050">
-                <a:solidFill>
-                  <a:srgbClr val="FFFFFF"/>
-                </a:solidFill>
-              </a:defRPr>
-            </a:pPr>
-            <a:r>
-              <a:t>•  Cơ chế Geofencing Ngoại tuyến: SQLite lưu 10,000 đa giác sạt lở.</a:t>
-            </a:r>
-          </a:p>
-          <a:p>
-            <a:pPr>
-              <a:spcAft>
-                <a:spcPts val="400"/>
-              </a:spcAft>
-              <a:defRPr sz="1050">
-                <a:solidFill>
-                  <a:srgbClr val="FFFFFF"/>
-                </a:solidFill>
-              </a:defRPr>
-            </a:pPr>
-            <a:r>
-              <a:t>•  Rung chuông còi hú báo động âm lượng tối đa ngay khi mất sóng 4G.</a:t>
-            </a:r>
-          </a:p>
-          <a:p>
-            <a:pPr>
-              <a:spcAft>
-                <a:spcPts val="400"/>
-              </a:spcAft>
-              <a:defRPr sz="1050">
-                <a:solidFill>
-                  <a:srgbClr val="FFFFFF"/>
-                </a:solidFill>
-              </a:defRPr>
-            </a:pPr>
-            <a:r>
-              <a:t>•  Nút SOS khẩn cấp 1-chạm gửi GPS và Live Rescue Tracking.</a:t>
+              <a:spcBef>
+                <a:spcPts val="300"/>
+              </a:spcBef>
+              <a:defRPr sz="1000">
+                <a:solidFill>
+                  <a:srgbClr val="FFFFFF"/>
+                </a:solidFill>
+              </a:defRPr>
+            </a:pPr>
+            <a:r>
+              <a:t>• Cơ chế Geofencing Ngoại tuyến: SQLite lưu 10,000 đa giác sạt lở.</a:t>
+            </a:r>
+          </a:p>
+          <a:p>
+            <a:pPr>
+              <a:spcBef>
+                <a:spcPts val="300"/>
+              </a:spcBef>
+              <a:defRPr sz="1000">
+                <a:solidFill>
+                  <a:srgbClr val="FFFFFF"/>
+                </a:solidFill>
+              </a:defRPr>
+            </a:pPr>
+            <a:r>
+              <a:t>• Rung chuông còi hú báo động âm lượng tối đa ngay khi mất sóng 4G.</a:t>
+            </a:r>
+          </a:p>
+          <a:p>
+            <a:pPr>
+              <a:spcBef>
+                <a:spcPts val="300"/>
+              </a:spcBef>
+              <a:defRPr sz="1000">
+                <a:solidFill>
+                  <a:srgbClr val="FFFFFF"/>
+                </a:solidFill>
+              </a:defRPr>
+            </a:pPr>
+            <a:r>
+              <a:t>• Đăng ký nhận cảnh báo khẩn cấp và gửi báo cáo hiện trường.</a:t>
             </a:r>
           </a:p>
         </p:txBody>
@@ -5332,7 +5659,7 @@
             <a:avLst/>
           </a:prstGeom>
           <a:solidFill>
-            <a:srgbClr val="0B0F19"/>
+            <a:srgbClr val="0B1320"/>
           </a:solidFill>
           <a:ln>
             <a:noFill/>
@@ -5368,8 +5695,8 @@
         </p:nvSpPr>
         <p:spPr>
           <a:xfrm>
-            <a:off x="731520" y="365760"/>
-            <a:ext cx="10515600" cy="365760"/>
+            <a:off x="731520" y="457200"/>
+            <a:ext cx="10698480" cy="1005840"/>
           </a:xfrm>
           <a:prstGeom prst="rect">
             <a:avLst/>
@@ -5377,47 +5704,27 @@
           <a:noFill/>
         </p:spPr>
         <p:txBody>
-          <a:bodyPr wrap="square" tIns="0" bIns="0" lIns="0" rIns="0">
+          <a:bodyPr wrap="square" lIns="0" tIns="0" rIns="0" bIns="0">
             <a:spAutoFit/>
           </a:bodyPr>
           <a:lstStyle/>
           <a:p>
             <a:pPr>
-              <a:defRPr sz="1000" b="1">
-                <a:solidFill>
-                  <a:srgbClr val="0EA5E9"/>
-                </a:solidFill>
-              </a:defRPr>
-            </a:pPr>
-            <a:r>
-              <a:t>GEOSENTRY (TERRAWATCH) • SOFTWARE ENGINEERING CAPSTONE</a:t>
-            </a:r>
-          </a:p>
-        </p:txBody>
-      </p:sp>
-      <p:sp>
-        <p:nvSpPr>
-          <p:cNvPr id="4" name="TextBox 3"/>
-          <p:cNvSpPr txBox="1"/>
-          <p:nvPr/>
-        </p:nvSpPr>
-        <p:spPr>
-          <a:xfrm>
-            <a:off x="731520" y="640080"/>
-            <a:ext cx="10515600" cy="640080"/>
-          </a:xfrm>
-          <a:prstGeom prst="rect">
-            <a:avLst/>
-          </a:prstGeom>
-          <a:noFill/>
-        </p:spPr>
-        <p:txBody>
-          <a:bodyPr wrap="square" tIns="0" bIns="0" lIns="0" rIns="0">
-            <a:spAutoFit/>
-          </a:bodyPr>
-          <a:lstStyle/>
-          <a:p>
-            <a:pPr>
+              <a:defRPr sz="1050" b="1">
+                <a:solidFill>
+                  <a:srgbClr val="FF8C00"/>
+                </a:solidFill>
+              </a:defRPr>
+            </a:pPr>
+            <a:r>
+              <a:t>GEOSENTRY • CAPSTONE DEFENSE 2026</a:t>
+            </a:r>
+          </a:p>
+          <a:p>
+            <a:pPr>
+              <a:spcBef>
+                <a:spcPts val="300"/>
+              </a:spcBef>
               <a:defRPr sz="2200" b="1">
                 <a:solidFill>
                   <a:srgbClr val="FFFFFF"/>
@@ -5432,7 +5739,7 @@
       </p:sp>
       <p:sp>
         <p:nvSpPr>
-          <p:cNvPr id="5" name="Rounded Rectangle 4"/>
+          <p:cNvPr id="4" name="Rounded Rectangle 3"/>
           <p:cNvSpPr/>
           <p:nvPr/>
         </p:nvSpPr>
@@ -5445,11 +5752,11 @@
             <a:avLst/>
           </a:prstGeom>
           <a:solidFill>
-            <a:srgbClr val="151E32"/>
+            <a:srgbClr val="131E31"/>
           </a:solidFill>
-          <a:ln w="15240">
+          <a:ln w="12700">
             <a:solidFill>
-              <a:srgbClr val="2A3B5C"/>
+              <a:srgbClr val="1F3A52"/>
             </a:solidFill>
           </a:ln>
         </p:spPr>
@@ -5477,105 +5784,23 @@
       </p:sp>
       <p:sp>
         <p:nvSpPr>
-          <p:cNvPr id="6" name="TextBox 5"/>
-          <p:cNvSpPr txBox="1"/>
-          <p:nvPr/>
-        </p:nvSpPr>
-        <p:spPr>
-          <a:xfrm>
-            <a:off x="914400" y="1828800"/>
-            <a:ext cx="2103120" cy="1737360"/>
-          </a:xfrm>
-          <a:prstGeom prst="rect">
-            <a:avLst/>
-          </a:prstGeom>
-          <a:noFill/>
-        </p:spPr>
-        <p:txBody>
-          <a:bodyPr wrap="square" tIns="0" bIns="0" lIns="0" rIns="0">
-            <a:spAutoFit/>
-          </a:bodyPr>
-          <a:lstStyle/>
-          <a:p>
-            <a:pPr>
-              <a:defRPr sz="1400" b="1">
-                <a:solidFill>
-                  <a:srgbClr val="0EA5E9"/>
-                </a:solidFill>
-              </a:defRPr>
-            </a:pPr>
-            <a:r>
-              <a:t>1. Clients</a:t>
-            </a:r>
-          </a:p>
-          <a:p>
-            <a:pPr>
-              <a:spcAft>
-                <a:spcPts val="400"/>
-              </a:spcAft>
-              <a:defRPr sz="1050">
-                <a:solidFill>
-                  <a:srgbClr val="FFFFFF"/>
-                </a:solidFill>
-              </a:defRPr>
-            </a:pPr>
-            <a:r>
-              <a:t>•  WebGIS React 18 + Mapbox GL</a:t>
-            </a:r>
-          </a:p>
-          <a:p>
-            <a:pPr>
-              <a:spcAft>
-                <a:spcPts val="400"/>
-              </a:spcAft>
-              <a:defRPr sz="1050">
-                <a:solidFill>
-                  <a:srgbClr val="FFFFFF"/>
-                </a:solidFill>
-              </a:defRPr>
-            </a:pPr>
-            <a:r>
-              <a:t>•  Mobile App Flutter 3.x + SQLite</a:t>
-            </a:r>
-          </a:p>
-          <a:p>
-            <a:pPr>
-              <a:spcAft>
-                <a:spcPts val="400"/>
-              </a:spcAft>
-              <a:defRPr sz="1050">
-                <a:solidFill>
-                  <a:srgbClr val="FFFFFF"/>
-                </a:solidFill>
-              </a:defRPr>
-            </a:pPr>
-            <a:r>
-              <a:t>•  Thiết kế Responsive &amp; Dark Theme</a:t>
-            </a:r>
-          </a:p>
-        </p:txBody>
-      </p:sp>
-      <p:sp>
-        <p:nvSpPr>
-          <p:cNvPr id="7" name="Rounded Rectangle 6"/>
+          <p:cNvPr id="5" name="Rounded Rectangle 4"/>
           <p:cNvSpPr/>
           <p:nvPr/>
         </p:nvSpPr>
         <p:spPr>
           <a:xfrm>
-            <a:off x="3474720" y="1645920"/>
-            <a:ext cx="2468880" cy="2103120"/>
+            <a:off x="731520" y="1645920"/>
+            <a:ext cx="2468880" cy="73152"/>
           </a:xfrm>
           <a:prstGeom prst="roundRect">
             <a:avLst/>
           </a:prstGeom>
           <a:solidFill>
-            <a:srgbClr val="151E32"/>
+            <a:srgbClr val="00D4FF"/>
           </a:solidFill>
-          <a:ln w="15240">
-            <a:solidFill>
-              <a:srgbClr val="2A3B5C"/>
-            </a:solidFill>
+          <a:ln>
+            <a:noFill/>
           </a:ln>
         </p:spPr>
         <p:style>
@@ -5602,14 +5827,14 @@
       </p:sp>
       <p:sp>
         <p:nvSpPr>
-          <p:cNvPr id="8" name="TextBox 7"/>
+          <p:cNvPr id="6" name="TextBox 5"/>
           <p:cNvSpPr txBox="1"/>
           <p:nvPr/>
         </p:nvSpPr>
         <p:spPr>
           <a:xfrm>
-            <a:off x="3657600" y="1828800"/>
-            <a:ext cx="2103120" cy="1737360"/>
+            <a:off x="914400" y="1810512"/>
+            <a:ext cx="2103120" cy="1874520"/>
           </a:xfrm>
           <a:prstGeom prst="rect">
             <a:avLst/>
@@ -5617,89 +5842,89 @@
           <a:noFill/>
         </p:spPr>
         <p:txBody>
-          <a:bodyPr wrap="square" tIns="0" bIns="0" lIns="0" rIns="0">
+          <a:bodyPr wrap="square" lIns="0" tIns="0" rIns="0" bIns="0">
             <a:spAutoFit/>
           </a:bodyPr>
           <a:lstStyle/>
           <a:p>
             <a:pPr>
-              <a:defRPr sz="1400" b="1">
-                <a:solidFill>
-                  <a:srgbClr val="0EA5E9"/>
-                </a:solidFill>
-              </a:defRPr>
-            </a:pPr>
-            <a:r>
-              <a:t>2. API Gateway</a:t>
-            </a:r>
-          </a:p>
-          <a:p>
-            <a:pPr>
-              <a:spcAft>
-                <a:spcPts val="400"/>
-              </a:spcAft>
-              <a:defRPr sz="1050">
-                <a:solidFill>
-                  <a:srgbClr val="FFFFFF"/>
-                </a:solidFill>
-              </a:defRPr>
-            </a:pPr>
-            <a:r>
-              <a:t>•  Nginx Reverse Proxy (Port 8080)</a:t>
-            </a:r>
-          </a:p>
-          <a:p>
-            <a:pPr>
-              <a:spcAft>
-                <a:spcPts val="400"/>
-              </a:spcAft>
-              <a:defRPr sz="1050">
-                <a:solidFill>
-                  <a:srgbClr val="FFFFFF"/>
-                </a:solidFill>
-              </a:defRPr>
-            </a:pPr>
-            <a:r>
-              <a:t>•  Rate Limiting 50 req/s</a:t>
-            </a:r>
-          </a:p>
-          <a:p>
-            <a:pPr>
-              <a:spcAft>
-                <a:spcPts val="400"/>
-              </a:spcAft>
-              <a:defRPr sz="1050">
-                <a:solidFill>
-                  <a:srgbClr val="FFFFFF"/>
-                </a:solidFill>
-              </a:defRPr>
-            </a:pPr>
-            <a:r>
-              <a:t>•  Global CORS &amp; Gzip Compression</a:t>
-            </a:r>
-          </a:p>
-        </p:txBody>
-      </p:sp>
-      <p:sp>
-        <p:nvSpPr>
-          <p:cNvPr id="9" name="Rounded Rectangle 8"/>
+              <a:defRPr sz="1300" b="1">
+                <a:solidFill>
+                  <a:srgbClr val="00D4FF"/>
+                </a:solidFill>
+              </a:defRPr>
+            </a:pPr>
+            <a:r>
+              <a:t>1. Clients</a:t>
+            </a:r>
+          </a:p>
+          <a:p>
+            <a:pPr>
+              <a:spcBef>
+                <a:spcPts val="300"/>
+              </a:spcBef>
+              <a:defRPr sz="1000">
+                <a:solidFill>
+                  <a:srgbClr val="FFFFFF"/>
+                </a:solidFill>
+              </a:defRPr>
+            </a:pPr>
+            <a:r>
+              <a:t>• WebGIS React 18 + Mapbox GL</a:t>
+            </a:r>
+          </a:p>
+          <a:p>
+            <a:pPr>
+              <a:spcBef>
+                <a:spcPts val="300"/>
+              </a:spcBef>
+              <a:defRPr sz="1000">
+                <a:solidFill>
+                  <a:srgbClr val="FFFFFF"/>
+                </a:solidFill>
+              </a:defRPr>
+            </a:pPr>
+            <a:r>
+              <a:t>• Mobile App Flutter 3.x + SQLite</a:t>
+            </a:r>
+          </a:p>
+          <a:p>
+            <a:pPr>
+              <a:spcBef>
+                <a:spcPts val="300"/>
+              </a:spcBef>
+              <a:defRPr sz="1000">
+                <a:solidFill>
+                  <a:srgbClr val="FFFFFF"/>
+                </a:solidFill>
+              </a:defRPr>
+            </a:pPr>
+            <a:r>
+              <a:t>• Thiết kế Responsive &amp; Dark Theme</a:t>
+            </a:r>
+          </a:p>
+        </p:txBody>
+      </p:sp>
+      <p:sp>
+        <p:nvSpPr>
+          <p:cNvPr id="7" name="Rounded Rectangle 6"/>
           <p:cNvSpPr/>
           <p:nvPr/>
         </p:nvSpPr>
         <p:spPr>
           <a:xfrm>
-            <a:off x="6217920" y="1645920"/>
+            <a:off x="3474720" y="1645920"/>
             <a:ext cx="2468880" cy="2103120"/>
           </a:xfrm>
           <a:prstGeom prst="roundRect">
             <a:avLst/>
           </a:prstGeom>
           <a:solidFill>
-            <a:srgbClr val="151E32"/>
+            <a:srgbClr val="131E31"/>
           </a:solidFill>
-          <a:ln w="15240">
+          <a:ln w="12700">
             <a:solidFill>
-              <a:srgbClr val="2A3B5C"/>
+              <a:srgbClr val="1F3A52"/>
             </a:solidFill>
           </a:ln>
         </p:spPr>
@@ -5727,105 +5952,23 @@
       </p:sp>
       <p:sp>
         <p:nvSpPr>
-          <p:cNvPr id="10" name="TextBox 9"/>
-          <p:cNvSpPr txBox="1"/>
-          <p:nvPr/>
-        </p:nvSpPr>
-        <p:spPr>
-          <a:xfrm>
-            <a:off x="6400800" y="1828800"/>
-            <a:ext cx="2103120" cy="1737360"/>
-          </a:xfrm>
-          <a:prstGeom prst="rect">
-            <a:avLst/>
-          </a:prstGeom>
-          <a:noFill/>
-        </p:spPr>
-        <p:txBody>
-          <a:bodyPr wrap="square" tIns="0" bIns="0" lIns="0" rIns="0">
-            <a:spAutoFit/>
-          </a:bodyPr>
-          <a:lstStyle/>
-          <a:p>
-            <a:pPr>
-              <a:defRPr sz="1400" b="1">
-                <a:solidFill>
-                  <a:srgbClr val="10B981"/>
-                </a:solidFill>
-              </a:defRPr>
-            </a:pPr>
-            <a:r>
-              <a:t>3. Core API Service</a:t>
-            </a:r>
-          </a:p>
-          <a:p>
-            <a:pPr>
-              <a:spcAft>
-                <a:spcPts val="400"/>
-              </a:spcAft>
-              <a:defRPr sz="1050">
-                <a:solidFill>
-                  <a:srgbClr val="FFFFFF"/>
-                </a:solidFill>
-              </a:defRPr>
-            </a:pPr>
-            <a:r>
-              <a:t>•  Java 17 + Spring Boot 3</a:t>
-            </a:r>
-          </a:p>
-          <a:p>
-            <a:pPr>
-              <a:spcAft>
-                <a:spcPts val="400"/>
-              </a:spcAft>
-              <a:defRPr sz="1050">
-                <a:solidFill>
-                  <a:srgbClr val="FFFFFF"/>
-                </a:solidFill>
-              </a:defRPr>
-            </a:pPr>
-            <a:r>
-              <a:t>•  Spring Security 6 + JWT RBAC</a:t>
-            </a:r>
-          </a:p>
-          <a:p>
-            <a:pPr>
-              <a:spcAft>
-                <a:spcPts val="400"/>
-              </a:spcAft>
-              <a:defRPr sz="1050">
-                <a:solidFill>
-                  <a:srgbClr val="FFFFFF"/>
-                </a:solidFill>
-              </a:defRPr>
-            </a:pPr>
-            <a:r>
-              <a:t>•  Quản lý sự cố &amp; Audit Trail</a:t>
-            </a:r>
-          </a:p>
-        </p:txBody>
-      </p:sp>
-      <p:sp>
-        <p:nvSpPr>
-          <p:cNvPr id="11" name="Rounded Rectangle 10"/>
+          <p:cNvPr id="8" name="Rounded Rectangle 7"/>
           <p:cNvSpPr/>
           <p:nvPr/>
         </p:nvSpPr>
         <p:spPr>
           <a:xfrm>
-            <a:off x="8961120" y="1645920"/>
-            <a:ext cx="2468880" cy="2103120"/>
+            <a:off x="3474720" y="1645920"/>
+            <a:ext cx="2468880" cy="73152"/>
           </a:xfrm>
           <a:prstGeom prst="roundRect">
             <a:avLst/>
           </a:prstGeom>
           <a:solidFill>
-            <a:srgbClr val="151E32"/>
+            <a:srgbClr val="00D4FF"/>
           </a:solidFill>
-          <a:ln w="15240">
-            <a:solidFill>
-              <a:srgbClr val="2A3B5C"/>
-            </a:solidFill>
+          <a:ln>
+            <a:noFill/>
           </a:ln>
         </p:spPr>
         <p:style>
@@ -5852,14 +5995,14 @@
       </p:sp>
       <p:sp>
         <p:nvSpPr>
-          <p:cNvPr id="12" name="TextBox 11"/>
+          <p:cNvPr id="9" name="TextBox 8"/>
           <p:cNvSpPr txBox="1"/>
           <p:nvPr/>
         </p:nvSpPr>
         <p:spPr>
           <a:xfrm>
-            <a:off x="9144000" y="1828800"/>
-            <a:ext cx="2103120" cy="1737360"/>
+            <a:off x="3657600" y="1810512"/>
+            <a:ext cx="2103120" cy="1874520"/>
           </a:xfrm>
           <a:prstGeom prst="rect">
             <a:avLst/>
@@ -5867,89 +6010,89 @@
           <a:noFill/>
         </p:spPr>
         <p:txBody>
-          <a:bodyPr wrap="square" tIns="0" bIns="0" lIns="0" rIns="0">
+          <a:bodyPr wrap="square" lIns="0" tIns="0" rIns="0" bIns="0">
             <a:spAutoFit/>
           </a:bodyPr>
           <a:lstStyle/>
           <a:p>
             <a:pPr>
-              <a:defRPr sz="1400" b="1">
-                <a:solidFill>
-                  <a:srgbClr val="10B981"/>
-                </a:solidFill>
-              </a:defRPr>
-            </a:pPr>
-            <a:r>
-              <a:t>4. AI &amp; GIS Services</a:t>
-            </a:r>
-          </a:p>
-          <a:p>
-            <a:pPr>
-              <a:spcAft>
-                <a:spcPts val="400"/>
-              </a:spcAft>
-              <a:defRPr sz="1050">
-                <a:solidFill>
-                  <a:srgbClr val="FFFFFF"/>
-                </a:solidFill>
-              </a:defRPr>
-            </a:pPr>
-            <a:r>
-              <a:t>•  AI: FastAPI + ONNX Runtime</a:t>
-            </a:r>
-          </a:p>
-          <a:p>
-            <a:pPr>
-              <a:spcAft>
-                <a:spcPts val="400"/>
-              </a:spcAft>
-              <a:defRPr sz="1050">
-                <a:solidFill>
-                  <a:srgbClr val="FFFFFF"/>
-                </a:solidFill>
-              </a:defRPr>
-            </a:pPr>
-            <a:r>
-              <a:t>•  GIS: FastAPI + GDAL/Rasterio</a:t>
-            </a:r>
-          </a:p>
-          <a:p>
-            <a:pPr>
-              <a:spcAft>
-                <a:spcPts val="400"/>
-              </a:spcAft>
-              <a:defRPr sz="1050">
-                <a:solidFill>
-                  <a:srgbClr val="FFFFFF"/>
-                </a:solidFill>
-              </a:defRPr>
-            </a:pPr>
-            <a:r>
-              <a:t>•  Tách biệt Bounded Context</a:t>
-            </a:r>
-          </a:p>
-        </p:txBody>
-      </p:sp>
-      <p:sp>
-        <p:nvSpPr>
-          <p:cNvPr id="13" name="Rounded Rectangle 12"/>
+              <a:defRPr sz="1300" b="1">
+                <a:solidFill>
+                  <a:srgbClr val="00D4FF"/>
+                </a:solidFill>
+              </a:defRPr>
+            </a:pPr>
+            <a:r>
+              <a:t>2. API Gateway</a:t>
+            </a:r>
+          </a:p>
+          <a:p>
+            <a:pPr>
+              <a:spcBef>
+                <a:spcPts val="300"/>
+              </a:spcBef>
+              <a:defRPr sz="1000">
+                <a:solidFill>
+                  <a:srgbClr val="FFFFFF"/>
+                </a:solidFill>
+              </a:defRPr>
+            </a:pPr>
+            <a:r>
+              <a:t>• Nginx Reverse Proxy (Port 8080)</a:t>
+            </a:r>
+          </a:p>
+          <a:p>
+            <a:pPr>
+              <a:spcBef>
+                <a:spcPts val="300"/>
+              </a:spcBef>
+              <a:defRPr sz="1000">
+                <a:solidFill>
+                  <a:srgbClr val="FFFFFF"/>
+                </a:solidFill>
+              </a:defRPr>
+            </a:pPr>
+            <a:r>
+              <a:t>• Rate Limiting 50 req/s</a:t>
+            </a:r>
+          </a:p>
+          <a:p>
+            <a:pPr>
+              <a:spcBef>
+                <a:spcPts val="300"/>
+              </a:spcBef>
+              <a:defRPr sz="1000">
+                <a:solidFill>
+                  <a:srgbClr val="FFFFFF"/>
+                </a:solidFill>
+              </a:defRPr>
+            </a:pPr>
+            <a:r>
+              <a:t>• Global CORS &amp; Gzip Compression</a:t>
+            </a:r>
+          </a:p>
+        </p:txBody>
+      </p:sp>
+      <p:sp>
+        <p:nvSpPr>
+          <p:cNvPr id="10" name="Rounded Rectangle 9"/>
           <p:cNvSpPr/>
           <p:nvPr/>
         </p:nvSpPr>
         <p:spPr>
           <a:xfrm>
-            <a:off x="731520" y="4114800"/>
+            <a:off x="6217920" y="1645920"/>
             <a:ext cx="2468880" cy="2103120"/>
           </a:xfrm>
           <a:prstGeom prst="roundRect">
             <a:avLst/>
           </a:prstGeom>
           <a:solidFill>
-            <a:srgbClr val="151E32"/>
+            <a:srgbClr val="131E31"/>
           </a:solidFill>
-          <a:ln w="15240">
+          <a:ln w="12700">
             <a:solidFill>
-              <a:srgbClr val="2A3B5C"/>
+              <a:srgbClr val="1F3A52"/>
             </a:solidFill>
           </a:ln>
         </p:spPr>
@@ -5977,105 +6120,23 @@
       </p:sp>
       <p:sp>
         <p:nvSpPr>
-          <p:cNvPr id="14" name="TextBox 13"/>
-          <p:cNvSpPr txBox="1"/>
-          <p:nvPr/>
-        </p:nvSpPr>
-        <p:spPr>
-          <a:xfrm>
-            <a:off x="914400" y="4297680"/>
-            <a:ext cx="2103120" cy="1737360"/>
-          </a:xfrm>
-          <a:prstGeom prst="rect">
-            <a:avLst/>
-          </a:prstGeom>
-          <a:noFill/>
-        </p:spPr>
-        <p:txBody>
-          <a:bodyPr wrap="square" tIns="0" bIns="0" lIns="0" rIns="0">
-            <a:spAutoFit/>
-          </a:bodyPr>
-          <a:lstStyle/>
-          <a:p>
-            <a:pPr>
-              <a:defRPr sz="1400" b="1">
-                <a:solidFill>
-                  <a:srgbClr val="F97316"/>
-                </a:solidFill>
-              </a:defRPr>
-            </a:pPr>
-            <a:r>
-              <a:t>5. PostGIS Database</a:t>
-            </a:r>
-          </a:p>
-          <a:p>
-            <a:pPr>
-              <a:spcAft>
-                <a:spcPts val="400"/>
-              </a:spcAft>
-              <a:defRPr sz="1050">
-                <a:solidFill>
-                  <a:srgbClr val="FFFFFF"/>
-                </a:solidFill>
-              </a:defRPr>
-            </a:pPr>
-            <a:r>
-              <a:t>•  PostgreSQL 15 + PostGIS 3.3</a:t>
-            </a:r>
-          </a:p>
-          <a:p>
-            <a:pPr>
-              <a:spcAft>
-                <a:spcPts val="400"/>
-              </a:spcAft>
-              <a:defRPr sz="1050">
-                <a:solidFill>
-                  <a:srgbClr val="FFFFFF"/>
-                </a:solidFill>
-              </a:defRPr>
-            </a:pPr>
-            <a:r>
-              <a:t>•  Logical Schema-per-Service</a:t>
-            </a:r>
-          </a:p>
-          <a:p>
-            <a:pPr>
-              <a:spcAft>
-                <a:spcPts val="400"/>
-              </a:spcAft>
-              <a:defRPr sz="1050">
-                <a:solidFill>
-                  <a:srgbClr val="FFFFFF"/>
-                </a:solidFill>
-              </a:defRPr>
-            </a:pPr>
-            <a:r>
-              <a:t>•  core_schema &amp; gis_schema GiST</a:t>
-            </a:r>
-          </a:p>
-        </p:txBody>
-      </p:sp>
-      <p:sp>
-        <p:nvSpPr>
-          <p:cNvPr id="15" name="Rounded Rectangle 14"/>
+          <p:cNvPr id="11" name="Rounded Rectangle 10"/>
           <p:cNvSpPr/>
           <p:nvPr/>
         </p:nvSpPr>
         <p:spPr>
           <a:xfrm>
-            <a:off x="3474720" y="4114800"/>
-            <a:ext cx="2468880" cy="2103120"/>
+            <a:off x="6217920" y="1645920"/>
+            <a:ext cx="2468880" cy="73152"/>
           </a:xfrm>
           <a:prstGeom prst="roundRect">
             <a:avLst/>
           </a:prstGeom>
           <a:solidFill>
-            <a:srgbClr val="151E32"/>
+            <a:srgbClr val="10B981"/>
           </a:solidFill>
-          <a:ln w="15240">
-            <a:solidFill>
-              <a:srgbClr val="2A3B5C"/>
-            </a:solidFill>
+          <a:ln>
+            <a:noFill/>
           </a:ln>
         </p:spPr>
         <p:style>
@@ -6102,14 +6163,14 @@
       </p:sp>
       <p:sp>
         <p:nvSpPr>
-          <p:cNvPr id="16" name="TextBox 15"/>
+          <p:cNvPr id="12" name="TextBox 11"/>
           <p:cNvSpPr txBox="1"/>
           <p:nvPr/>
         </p:nvSpPr>
         <p:spPr>
           <a:xfrm>
-            <a:off x="3657600" y="4297680"/>
-            <a:ext cx="2103120" cy="1737360"/>
+            <a:off x="6400800" y="1810512"/>
+            <a:ext cx="2103120" cy="1874520"/>
           </a:xfrm>
           <a:prstGeom prst="rect">
             <a:avLst/>
@@ -6117,89 +6178,89 @@
           <a:noFill/>
         </p:spPr>
         <p:txBody>
-          <a:bodyPr wrap="square" tIns="0" bIns="0" lIns="0" rIns="0">
+          <a:bodyPr wrap="square" lIns="0" tIns="0" rIns="0" bIns="0">
             <a:spAutoFit/>
           </a:bodyPr>
           <a:lstStyle/>
           <a:p>
             <a:pPr>
-              <a:defRPr sz="1400" b="1">
-                <a:solidFill>
-                  <a:srgbClr val="F97316"/>
-                </a:solidFill>
-              </a:defRPr>
-            </a:pPr>
-            <a:r>
-              <a:t>6. Message Broker</a:t>
-            </a:r>
-          </a:p>
-          <a:p>
-            <a:pPr>
-              <a:spcAft>
-                <a:spcPts val="400"/>
-              </a:spcAft>
-              <a:defRPr sz="1050">
-                <a:solidFill>
-                  <a:srgbClr val="FFFFFF"/>
-                </a:solidFill>
-              </a:defRPr>
-            </a:pPr>
-            <a:r>
-              <a:t>•  Redis 7 Alpine Pub/Sub</a:t>
-            </a:r>
-          </a:p>
-          <a:p>
-            <a:pPr>
-              <a:spcAft>
-                <a:spcPts val="400"/>
-              </a:spcAft>
-              <a:defRPr sz="1050">
-                <a:solidFill>
-                  <a:srgbClr val="FFFFFF"/>
-                </a:solidFill>
-              </a:defRPr>
-            </a:pPr>
-            <a:r>
-              <a:t>•  Channel: terrawatch:events</a:t>
-            </a:r>
-          </a:p>
-          <a:p>
-            <a:pPr>
-              <a:spcAft>
-                <a:spcPts val="400"/>
-              </a:spcAft>
-              <a:defRPr sz="1050">
-                <a:solidFill>
-                  <a:srgbClr val="FFFFFF"/>
-                </a:solidFill>
-              </a:defRPr>
-            </a:pPr>
-            <a:r>
-              <a:t>•  Xử lý bất đồng bộ đa service</a:t>
-            </a:r>
-          </a:p>
-        </p:txBody>
-      </p:sp>
-      <p:sp>
-        <p:nvSpPr>
-          <p:cNvPr id="17" name="Rounded Rectangle 16"/>
+              <a:defRPr sz="1300" b="1">
+                <a:solidFill>
+                  <a:srgbClr val="10B981"/>
+                </a:solidFill>
+              </a:defRPr>
+            </a:pPr>
+            <a:r>
+              <a:t>3. Core API Service</a:t>
+            </a:r>
+          </a:p>
+          <a:p>
+            <a:pPr>
+              <a:spcBef>
+                <a:spcPts val="300"/>
+              </a:spcBef>
+              <a:defRPr sz="1000">
+                <a:solidFill>
+                  <a:srgbClr val="FFFFFF"/>
+                </a:solidFill>
+              </a:defRPr>
+            </a:pPr>
+            <a:r>
+              <a:t>• Java 17 + Spring Boot 3</a:t>
+            </a:r>
+          </a:p>
+          <a:p>
+            <a:pPr>
+              <a:spcBef>
+                <a:spcPts val="300"/>
+              </a:spcBef>
+              <a:defRPr sz="1000">
+                <a:solidFill>
+                  <a:srgbClr val="FFFFFF"/>
+                </a:solidFill>
+              </a:defRPr>
+            </a:pPr>
+            <a:r>
+              <a:t>• Spring Security 6 + JWT 3 Roles</a:t>
+            </a:r>
+          </a:p>
+          <a:p>
+            <a:pPr>
+              <a:spcBef>
+                <a:spcPts val="300"/>
+              </a:spcBef>
+              <a:defRPr sz="1000">
+                <a:solidFill>
+                  <a:srgbClr val="FFFFFF"/>
+                </a:solidFill>
+              </a:defRPr>
+            </a:pPr>
+            <a:r>
+              <a:t>• Duyệt sạt lở &amp; Phát cảnh báo khẩn cấp</a:t>
+            </a:r>
+          </a:p>
+        </p:txBody>
+      </p:sp>
+      <p:sp>
+        <p:nvSpPr>
+          <p:cNvPr id="13" name="Rounded Rectangle 12"/>
           <p:cNvSpPr/>
           <p:nvPr/>
         </p:nvSpPr>
         <p:spPr>
           <a:xfrm>
-            <a:off x="6217920" y="4114800"/>
+            <a:off x="8961120" y="1645920"/>
             <a:ext cx="2468880" cy="2103120"/>
           </a:xfrm>
           <a:prstGeom prst="roundRect">
             <a:avLst/>
           </a:prstGeom>
           <a:solidFill>
-            <a:srgbClr val="151E32"/>
+            <a:srgbClr val="131E31"/>
           </a:solidFill>
-          <a:ln w="15240">
+          <a:ln w="12700">
             <a:solidFill>
-              <a:srgbClr val="2A3B5C"/>
+              <a:srgbClr val="1F3A52"/>
             </a:solidFill>
           </a:ln>
         </p:spPr>
@@ -6227,105 +6288,23 @@
       </p:sp>
       <p:sp>
         <p:nvSpPr>
-          <p:cNvPr id="18" name="TextBox 17"/>
-          <p:cNvSpPr txBox="1"/>
-          <p:nvPr/>
-        </p:nvSpPr>
-        <p:spPr>
-          <a:xfrm>
-            <a:off x="6400800" y="4297680"/>
-            <a:ext cx="2103120" cy="1737360"/>
-          </a:xfrm>
-          <a:prstGeom prst="rect">
-            <a:avLst/>
-          </a:prstGeom>
-          <a:noFill/>
-        </p:spPr>
-        <p:txBody>
-          <a:bodyPr wrap="square" tIns="0" bIns="0" lIns="0" rIns="0">
-            <a:spAutoFit/>
-          </a:bodyPr>
-          <a:lstStyle/>
-          <a:p>
-            <a:pPr>
-              <a:defRPr sz="1400" b="1">
-                <a:solidFill>
-                  <a:srgbClr val="EF4444"/>
-                </a:solidFill>
-              </a:defRPr>
-            </a:pPr>
-            <a:r>
-              <a:t>7. Fault Tolerance</a:t>
-            </a:r>
-          </a:p>
-          <a:p>
-            <a:pPr>
-              <a:spcAft>
-                <a:spcPts val="400"/>
-              </a:spcAft>
-              <a:defRPr sz="1050">
-                <a:solidFill>
-                  <a:srgbClr val="FFFFFF"/>
-                </a:solidFill>
-              </a:defRPr>
-            </a:pPr>
-            <a:r>
-              <a:t>•  Resilience4j Circuit Breaker</a:t>
-            </a:r>
-          </a:p>
-          <a:p>
-            <a:pPr>
-              <a:spcAft>
-                <a:spcPts val="400"/>
-              </a:spcAft>
-              <a:defRPr sz="1050">
-                <a:solidFill>
-                  <a:srgbClr val="FFFFFF"/>
-                </a:solidFill>
-              </a:defRPr>
-            </a:pPr>
-            <a:r>
-              <a:t>•  Ngắt mạch khi AI/GIS lỗi &gt;= 50%</a:t>
-            </a:r>
-          </a:p>
-          <a:p>
-            <a:pPr>
-              <a:spcAft>
-                <a:spcPts val="400"/>
-              </a:spcAft>
-              <a:defRPr sz="1050">
-                <a:solidFill>
-                  <a:srgbClr val="FFFFFF"/>
-                </a:solidFill>
-              </a:defRPr>
-            </a:pPr>
-            <a:r>
-              <a:t>•  Fallback queue, Core API không sập</a:t>
-            </a:r>
-          </a:p>
-        </p:txBody>
-      </p:sp>
-      <p:sp>
-        <p:nvSpPr>
-          <p:cNvPr id="19" name="Rounded Rectangle 18"/>
+          <p:cNvPr id="14" name="Rounded Rectangle 13"/>
           <p:cNvSpPr/>
           <p:nvPr/>
         </p:nvSpPr>
         <p:spPr>
           <a:xfrm>
-            <a:off x="8961120" y="4114800"/>
-            <a:ext cx="2468880" cy="2103120"/>
+            <a:off x="8961120" y="1645920"/>
+            <a:ext cx="2468880" cy="73152"/>
           </a:xfrm>
           <a:prstGeom prst="roundRect">
             <a:avLst/>
           </a:prstGeom>
           <a:solidFill>
-            <a:srgbClr val="151E32"/>
+            <a:srgbClr val="10B981"/>
           </a:solidFill>
-          <a:ln w="15240">
-            <a:solidFill>
-              <a:srgbClr val="2A3B5C"/>
-            </a:solidFill>
+          <a:ln>
+            <a:noFill/>
           </a:ln>
         </p:spPr>
         <p:style>
@@ -6352,14 +6331,14 @@
       </p:sp>
       <p:sp>
         <p:nvSpPr>
-          <p:cNvPr id="20" name="TextBox 19"/>
+          <p:cNvPr id="15" name="TextBox 14"/>
           <p:cNvSpPr txBox="1"/>
           <p:nvPr/>
         </p:nvSpPr>
         <p:spPr>
           <a:xfrm>
-            <a:off x="9144000" y="4297680"/>
-            <a:ext cx="2103120" cy="1737360"/>
+            <a:off x="9144000" y="1810512"/>
+            <a:ext cx="2103120" cy="1874520"/>
           </a:xfrm>
           <a:prstGeom prst="rect">
             <a:avLst/>
@@ -6367,65 +6346,737 @@
           <a:noFill/>
         </p:spPr>
         <p:txBody>
-          <a:bodyPr wrap="square" tIns="0" bIns="0" lIns="0" rIns="0">
+          <a:bodyPr wrap="square" lIns="0" tIns="0" rIns="0" bIns="0">
             <a:spAutoFit/>
           </a:bodyPr>
           <a:lstStyle/>
           <a:p>
             <a:pPr>
-              <a:defRPr sz="1400" b="1">
+              <a:defRPr sz="1300" b="1">
+                <a:solidFill>
+                  <a:srgbClr val="10B981"/>
+                </a:solidFill>
+              </a:defRPr>
+            </a:pPr>
+            <a:r>
+              <a:t>4. AI &amp; GIS Services</a:t>
+            </a:r>
+          </a:p>
+          <a:p>
+            <a:pPr>
+              <a:spcBef>
+                <a:spcPts val="300"/>
+              </a:spcBef>
+              <a:defRPr sz="1000">
+                <a:solidFill>
+                  <a:srgbClr val="FFFFFF"/>
+                </a:solidFill>
+              </a:defRPr>
+            </a:pPr>
+            <a:r>
+              <a:t>• AI: FastAPI + ONNX Runtime</a:t>
+            </a:r>
+          </a:p>
+          <a:p>
+            <a:pPr>
+              <a:spcBef>
+                <a:spcPts val="300"/>
+              </a:spcBef>
+              <a:defRPr sz="1000">
+                <a:solidFill>
+                  <a:srgbClr val="FFFFFF"/>
+                </a:solidFill>
+              </a:defRPr>
+            </a:pPr>
+            <a:r>
+              <a:t>• GIS: FastAPI + GDAL/Rasterio</a:t>
+            </a:r>
+          </a:p>
+          <a:p>
+            <a:pPr>
+              <a:spcBef>
+                <a:spcPts val="300"/>
+              </a:spcBef>
+              <a:defRPr sz="1000">
+                <a:solidFill>
+                  <a:srgbClr val="FFFFFF"/>
+                </a:solidFill>
+              </a:defRPr>
+            </a:pPr>
+            <a:r>
+              <a:t>• Tách biệt Bounded Context</a:t>
+            </a:r>
+          </a:p>
+        </p:txBody>
+      </p:sp>
+      <p:sp>
+        <p:nvSpPr>
+          <p:cNvPr id="16" name="Rounded Rectangle 15"/>
+          <p:cNvSpPr/>
+          <p:nvPr/>
+        </p:nvSpPr>
+        <p:spPr>
+          <a:xfrm>
+            <a:off x="731520" y="4114800"/>
+            <a:ext cx="2468880" cy="2103120"/>
+          </a:xfrm>
+          <a:prstGeom prst="roundRect">
+            <a:avLst/>
+          </a:prstGeom>
+          <a:solidFill>
+            <a:srgbClr val="131E31"/>
+          </a:solidFill>
+          <a:ln w="12700">
+            <a:solidFill>
+              <a:srgbClr val="1F3A52"/>
+            </a:solidFill>
+          </a:ln>
+        </p:spPr>
+        <p:style>
+          <a:lnRef idx="1">
+            <a:schemeClr val="accent1"/>
+          </a:lnRef>
+          <a:fillRef idx="3">
+            <a:schemeClr val="accent1"/>
+          </a:fillRef>
+          <a:effectRef idx="2">
+            <a:schemeClr val="accent1"/>
+          </a:effectRef>
+          <a:fontRef idx="minor">
+            <a:schemeClr val="lt1"/>
+          </a:fontRef>
+        </p:style>
+        <p:txBody>
+          <a:bodyPr rtlCol="0" anchor="ctr"/>
+          <a:lstStyle/>
+          <a:p>
+            <a:pPr algn="ctr"/>
+          </a:p>
+        </p:txBody>
+      </p:sp>
+      <p:sp>
+        <p:nvSpPr>
+          <p:cNvPr id="17" name="Rounded Rectangle 16"/>
+          <p:cNvSpPr/>
+          <p:nvPr/>
+        </p:nvSpPr>
+        <p:spPr>
+          <a:xfrm>
+            <a:off x="731520" y="4114800"/>
+            <a:ext cx="2468880" cy="73152"/>
+          </a:xfrm>
+          <a:prstGeom prst="roundRect">
+            <a:avLst/>
+          </a:prstGeom>
+          <a:solidFill>
+            <a:srgbClr val="FF8C00"/>
+          </a:solidFill>
+          <a:ln>
+            <a:noFill/>
+          </a:ln>
+        </p:spPr>
+        <p:style>
+          <a:lnRef idx="1">
+            <a:schemeClr val="accent1"/>
+          </a:lnRef>
+          <a:fillRef idx="3">
+            <a:schemeClr val="accent1"/>
+          </a:fillRef>
+          <a:effectRef idx="2">
+            <a:schemeClr val="accent1"/>
+          </a:effectRef>
+          <a:fontRef idx="minor">
+            <a:schemeClr val="lt1"/>
+          </a:fontRef>
+        </p:style>
+        <p:txBody>
+          <a:bodyPr rtlCol="0" anchor="ctr"/>
+          <a:lstStyle/>
+          <a:p>
+            <a:pPr algn="ctr"/>
+          </a:p>
+        </p:txBody>
+      </p:sp>
+      <p:sp>
+        <p:nvSpPr>
+          <p:cNvPr id="18" name="TextBox 17"/>
+          <p:cNvSpPr txBox="1"/>
+          <p:nvPr/>
+        </p:nvSpPr>
+        <p:spPr>
+          <a:xfrm>
+            <a:off x="914400" y="4279392"/>
+            <a:ext cx="2103120" cy="1874520"/>
+          </a:xfrm>
+          <a:prstGeom prst="rect">
+            <a:avLst/>
+          </a:prstGeom>
+          <a:noFill/>
+        </p:spPr>
+        <p:txBody>
+          <a:bodyPr wrap="square" lIns="0" tIns="0" rIns="0" bIns="0">
+            <a:spAutoFit/>
+          </a:bodyPr>
+          <a:lstStyle/>
+          <a:p>
+            <a:pPr>
+              <a:defRPr sz="1300" b="1">
+                <a:solidFill>
+                  <a:srgbClr val="FF8C00"/>
+                </a:solidFill>
+              </a:defRPr>
+            </a:pPr>
+            <a:r>
+              <a:t>5. PostGIS Database</a:t>
+            </a:r>
+          </a:p>
+          <a:p>
+            <a:pPr>
+              <a:spcBef>
+                <a:spcPts val="300"/>
+              </a:spcBef>
+              <a:defRPr sz="1000">
+                <a:solidFill>
+                  <a:srgbClr val="FFFFFF"/>
+                </a:solidFill>
+              </a:defRPr>
+            </a:pPr>
+            <a:r>
+              <a:t>• PostgreSQL 15 + PostGIS 3.3</a:t>
+            </a:r>
+          </a:p>
+          <a:p>
+            <a:pPr>
+              <a:spcBef>
+                <a:spcPts val="300"/>
+              </a:spcBef>
+              <a:defRPr sz="1000">
+                <a:solidFill>
+                  <a:srgbClr val="FFFFFF"/>
+                </a:solidFill>
+              </a:defRPr>
+            </a:pPr>
+            <a:r>
+              <a:t>• Logical Schema-per-Service</a:t>
+            </a:r>
+          </a:p>
+          <a:p>
+            <a:pPr>
+              <a:spcBef>
+                <a:spcPts val="300"/>
+              </a:spcBef>
+              <a:defRPr sz="1000">
+                <a:solidFill>
+                  <a:srgbClr val="FFFFFF"/>
+                </a:solidFill>
+              </a:defRPr>
+            </a:pPr>
+            <a:r>
+              <a:t>• core_schema &amp; gis_schema GiST</a:t>
+            </a:r>
+          </a:p>
+        </p:txBody>
+      </p:sp>
+      <p:sp>
+        <p:nvSpPr>
+          <p:cNvPr id="19" name="Rounded Rectangle 18"/>
+          <p:cNvSpPr/>
+          <p:nvPr/>
+        </p:nvSpPr>
+        <p:spPr>
+          <a:xfrm>
+            <a:off x="3474720" y="4114800"/>
+            <a:ext cx="2468880" cy="2103120"/>
+          </a:xfrm>
+          <a:prstGeom prst="roundRect">
+            <a:avLst/>
+          </a:prstGeom>
+          <a:solidFill>
+            <a:srgbClr val="131E31"/>
+          </a:solidFill>
+          <a:ln w="12700">
+            <a:solidFill>
+              <a:srgbClr val="1F3A52"/>
+            </a:solidFill>
+          </a:ln>
+        </p:spPr>
+        <p:style>
+          <a:lnRef idx="1">
+            <a:schemeClr val="accent1"/>
+          </a:lnRef>
+          <a:fillRef idx="3">
+            <a:schemeClr val="accent1"/>
+          </a:fillRef>
+          <a:effectRef idx="2">
+            <a:schemeClr val="accent1"/>
+          </a:effectRef>
+          <a:fontRef idx="minor">
+            <a:schemeClr val="lt1"/>
+          </a:fontRef>
+        </p:style>
+        <p:txBody>
+          <a:bodyPr rtlCol="0" anchor="ctr"/>
+          <a:lstStyle/>
+          <a:p>
+            <a:pPr algn="ctr"/>
+          </a:p>
+        </p:txBody>
+      </p:sp>
+      <p:sp>
+        <p:nvSpPr>
+          <p:cNvPr id="20" name="Rounded Rectangle 19"/>
+          <p:cNvSpPr/>
+          <p:nvPr/>
+        </p:nvSpPr>
+        <p:spPr>
+          <a:xfrm>
+            <a:off x="3474720" y="4114800"/>
+            <a:ext cx="2468880" cy="73152"/>
+          </a:xfrm>
+          <a:prstGeom prst="roundRect">
+            <a:avLst/>
+          </a:prstGeom>
+          <a:solidFill>
+            <a:srgbClr val="FF8C00"/>
+          </a:solidFill>
+          <a:ln>
+            <a:noFill/>
+          </a:ln>
+        </p:spPr>
+        <p:style>
+          <a:lnRef idx="1">
+            <a:schemeClr val="accent1"/>
+          </a:lnRef>
+          <a:fillRef idx="3">
+            <a:schemeClr val="accent1"/>
+          </a:fillRef>
+          <a:effectRef idx="2">
+            <a:schemeClr val="accent1"/>
+          </a:effectRef>
+          <a:fontRef idx="minor">
+            <a:schemeClr val="lt1"/>
+          </a:fontRef>
+        </p:style>
+        <p:txBody>
+          <a:bodyPr rtlCol="0" anchor="ctr"/>
+          <a:lstStyle/>
+          <a:p>
+            <a:pPr algn="ctr"/>
+          </a:p>
+        </p:txBody>
+      </p:sp>
+      <p:sp>
+        <p:nvSpPr>
+          <p:cNvPr id="21" name="TextBox 20"/>
+          <p:cNvSpPr txBox="1"/>
+          <p:nvPr/>
+        </p:nvSpPr>
+        <p:spPr>
+          <a:xfrm>
+            <a:off x="3657600" y="4279392"/>
+            <a:ext cx="2103120" cy="1874520"/>
+          </a:xfrm>
+          <a:prstGeom prst="rect">
+            <a:avLst/>
+          </a:prstGeom>
+          <a:noFill/>
+        </p:spPr>
+        <p:txBody>
+          <a:bodyPr wrap="square" lIns="0" tIns="0" rIns="0" bIns="0">
+            <a:spAutoFit/>
+          </a:bodyPr>
+          <a:lstStyle/>
+          <a:p>
+            <a:pPr>
+              <a:defRPr sz="1300" b="1">
+                <a:solidFill>
+                  <a:srgbClr val="FF8C00"/>
+                </a:solidFill>
+              </a:defRPr>
+            </a:pPr>
+            <a:r>
+              <a:t>6. Message Broker</a:t>
+            </a:r>
+          </a:p>
+          <a:p>
+            <a:pPr>
+              <a:spcBef>
+                <a:spcPts val="300"/>
+              </a:spcBef>
+              <a:defRPr sz="1000">
+                <a:solidFill>
+                  <a:srgbClr val="FFFFFF"/>
+                </a:solidFill>
+              </a:defRPr>
+            </a:pPr>
+            <a:r>
+              <a:t>• Redis 7 Alpine Pub/Sub</a:t>
+            </a:r>
+          </a:p>
+          <a:p>
+            <a:pPr>
+              <a:spcBef>
+                <a:spcPts val="300"/>
+              </a:spcBef>
+              <a:defRPr sz="1000">
+                <a:solidFill>
+                  <a:srgbClr val="FFFFFF"/>
+                </a:solidFill>
+              </a:defRPr>
+            </a:pPr>
+            <a:r>
+              <a:t>• Channel: terrawatch:events</a:t>
+            </a:r>
+          </a:p>
+          <a:p>
+            <a:pPr>
+              <a:spcBef>
+                <a:spcPts val="300"/>
+              </a:spcBef>
+              <a:defRPr sz="1000">
+                <a:solidFill>
+                  <a:srgbClr val="FFFFFF"/>
+                </a:solidFill>
+              </a:defRPr>
+            </a:pPr>
+            <a:r>
+              <a:t>• Xử lý bất đồng bộ đa service</a:t>
+            </a:r>
+          </a:p>
+        </p:txBody>
+      </p:sp>
+      <p:sp>
+        <p:nvSpPr>
+          <p:cNvPr id="22" name="Rounded Rectangle 21"/>
+          <p:cNvSpPr/>
+          <p:nvPr/>
+        </p:nvSpPr>
+        <p:spPr>
+          <a:xfrm>
+            <a:off x="6217920" y="4114800"/>
+            <a:ext cx="2468880" cy="2103120"/>
+          </a:xfrm>
+          <a:prstGeom prst="roundRect">
+            <a:avLst/>
+          </a:prstGeom>
+          <a:solidFill>
+            <a:srgbClr val="131E31"/>
+          </a:solidFill>
+          <a:ln w="12700">
+            <a:solidFill>
+              <a:srgbClr val="1F3A52"/>
+            </a:solidFill>
+          </a:ln>
+        </p:spPr>
+        <p:style>
+          <a:lnRef idx="1">
+            <a:schemeClr val="accent1"/>
+          </a:lnRef>
+          <a:fillRef idx="3">
+            <a:schemeClr val="accent1"/>
+          </a:fillRef>
+          <a:effectRef idx="2">
+            <a:schemeClr val="accent1"/>
+          </a:effectRef>
+          <a:fontRef idx="minor">
+            <a:schemeClr val="lt1"/>
+          </a:fontRef>
+        </p:style>
+        <p:txBody>
+          <a:bodyPr rtlCol="0" anchor="ctr"/>
+          <a:lstStyle/>
+          <a:p>
+            <a:pPr algn="ctr"/>
+          </a:p>
+        </p:txBody>
+      </p:sp>
+      <p:sp>
+        <p:nvSpPr>
+          <p:cNvPr id="23" name="Rounded Rectangle 22"/>
+          <p:cNvSpPr/>
+          <p:nvPr/>
+        </p:nvSpPr>
+        <p:spPr>
+          <a:xfrm>
+            <a:off x="6217920" y="4114800"/>
+            <a:ext cx="2468880" cy="73152"/>
+          </a:xfrm>
+          <a:prstGeom prst="roundRect">
+            <a:avLst/>
+          </a:prstGeom>
+          <a:solidFill>
+            <a:srgbClr val="EF4444"/>
+          </a:solidFill>
+          <a:ln>
+            <a:noFill/>
+          </a:ln>
+        </p:spPr>
+        <p:style>
+          <a:lnRef idx="1">
+            <a:schemeClr val="accent1"/>
+          </a:lnRef>
+          <a:fillRef idx="3">
+            <a:schemeClr val="accent1"/>
+          </a:fillRef>
+          <a:effectRef idx="2">
+            <a:schemeClr val="accent1"/>
+          </a:effectRef>
+          <a:fontRef idx="minor">
+            <a:schemeClr val="lt1"/>
+          </a:fontRef>
+        </p:style>
+        <p:txBody>
+          <a:bodyPr rtlCol="0" anchor="ctr"/>
+          <a:lstStyle/>
+          <a:p>
+            <a:pPr algn="ctr"/>
+          </a:p>
+        </p:txBody>
+      </p:sp>
+      <p:sp>
+        <p:nvSpPr>
+          <p:cNvPr id="24" name="TextBox 23"/>
+          <p:cNvSpPr txBox="1"/>
+          <p:nvPr/>
+        </p:nvSpPr>
+        <p:spPr>
+          <a:xfrm>
+            <a:off x="6400800" y="4279392"/>
+            <a:ext cx="2103120" cy="1874520"/>
+          </a:xfrm>
+          <a:prstGeom prst="rect">
+            <a:avLst/>
+          </a:prstGeom>
+          <a:noFill/>
+        </p:spPr>
+        <p:txBody>
+          <a:bodyPr wrap="square" lIns="0" tIns="0" rIns="0" bIns="0">
+            <a:spAutoFit/>
+          </a:bodyPr>
+          <a:lstStyle/>
+          <a:p>
+            <a:pPr>
+              <a:defRPr sz="1300" b="1">
                 <a:solidFill>
                   <a:srgbClr val="EF4444"/>
                 </a:solidFill>
               </a:defRPr>
             </a:pPr>
             <a:r>
-              <a:t>8. Orchestration</a:t>
-            </a:r>
-          </a:p>
-          <a:p>
-            <a:pPr>
-              <a:spcAft>
-                <a:spcPts val="400"/>
-              </a:spcAft>
-              <a:defRPr sz="1050">
-                <a:solidFill>
-                  <a:srgbClr val="FFFFFF"/>
-                </a:solidFill>
-              </a:defRPr>
-            </a:pPr>
-            <a:r>
-              <a:t>•  Docker Compose 7 Services</a:t>
-            </a:r>
-          </a:p>
-          <a:p>
-            <a:pPr>
-              <a:spcAft>
-                <a:spcPts val="400"/>
-              </a:spcAft>
-              <a:defRPr sz="1050">
-                <a:solidFill>
-                  <a:srgbClr val="FFFFFF"/>
-                </a:solidFill>
-              </a:defRPr>
-            </a:pPr>
-            <a:r>
-              <a:t>•  Internal DNS: terrawatch-net</a:t>
-            </a:r>
-          </a:p>
-          <a:p>
-            <a:pPr>
-              <a:spcAft>
-                <a:spcPts val="400"/>
-              </a:spcAft>
-              <a:defRPr sz="1050">
-                <a:solidFill>
-                  <a:srgbClr val="FFFFFF"/>
-                </a:solidFill>
-              </a:defRPr>
-            </a:pPr>
-            <a:r>
-              <a:t>•  CI/CD GitHub Actions theo path</a:t>
+              <a:t>7. Fault Tolerance</a:t>
+            </a:r>
+          </a:p>
+          <a:p>
+            <a:pPr>
+              <a:spcBef>
+                <a:spcPts val="300"/>
+              </a:spcBef>
+              <a:defRPr sz="1000">
+                <a:solidFill>
+                  <a:srgbClr val="FFFFFF"/>
+                </a:solidFill>
+              </a:defRPr>
+            </a:pPr>
+            <a:r>
+              <a:t>• Resilience4j Circuit Breaker</a:t>
+            </a:r>
+          </a:p>
+          <a:p>
+            <a:pPr>
+              <a:spcBef>
+                <a:spcPts val="300"/>
+              </a:spcBef>
+              <a:defRPr sz="1000">
+                <a:solidFill>
+                  <a:srgbClr val="FFFFFF"/>
+                </a:solidFill>
+              </a:defRPr>
+            </a:pPr>
+            <a:r>
+              <a:t>• Ngắt mạch khi AI/GIS lỗi &gt;= 50%</a:t>
+            </a:r>
+          </a:p>
+          <a:p>
+            <a:pPr>
+              <a:spcBef>
+                <a:spcPts val="300"/>
+              </a:spcBef>
+              <a:defRPr sz="1000">
+                <a:solidFill>
+                  <a:srgbClr val="FFFFFF"/>
+                </a:solidFill>
+              </a:defRPr>
+            </a:pPr>
+            <a:r>
+              <a:t>• Fallback queue, Core API không sập</a:t>
+            </a:r>
+          </a:p>
+        </p:txBody>
+      </p:sp>
+      <p:sp>
+        <p:nvSpPr>
+          <p:cNvPr id="25" name="Rounded Rectangle 24"/>
+          <p:cNvSpPr/>
+          <p:nvPr/>
+        </p:nvSpPr>
+        <p:spPr>
+          <a:xfrm>
+            <a:off x="8961120" y="4114800"/>
+            <a:ext cx="2468880" cy="2103120"/>
+          </a:xfrm>
+          <a:prstGeom prst="roundRect">
+            <a:avLst/>
+          </a:prstGeom>
+          <a:solidFill>
+            <a:srgbClr val="131E31"/>
+          </a:solidFill>
+          <a:ln w="12700">
+            <a:solidFill>
+              <a:srgbClr val="1F3A52"/>
+            </a:solidFill>
+          </a:ln>
+        </p:spPr>
+        <p:style>
+          <a:lnRef idx="1">
+            <a:schemeClr val="accent1"/>
+          </a:lnRef>
+          <a:fillRef idx="3">
+            <a:schemeClr val="accent1"/>
+          </a:fillRef>
+          <a:effectRef idx="2">
+            <a:schemeClr val="accent1"/>
+          </a:effectRef>
+          <a:fontRef idx="minor">
+            <a:schemeClr val="lt1"/>
+          </a:fontRef>
+        </p:style>
+        <p:txBody>
+          <a:bodyPr rtlCol="0" anchor="ctr"/>
+          <a:lstStyle/>
+          <a:p>
+            <a:pPr algn="ctr"/>
+          </a:p>
+        </p:txBody>
+      </p:sp>
+      <p:sp>
+        <p:nvSpPr>
+          <p:cNvPr id="26" name="Rounded Rectangle 25"/>
+          <p:cNvSpPr/>
+          <p:nvPr/>
+        </p:nvSpPr>
+        <p:spPr>
+          <a:xfrm>
+            <a:off x="8961120" y="4114800"/>
+            <a:ext cx="2468880" cy="73152"/>
+          </a:xfrm>
+          <a:prstGeom prst="roundRect">
+            <a:avLst/>
+          </a:prstGeom>
+          <a:solidFill>
+            <a:srgbClr val="EF4444"/>
+          </a:solidFill>
+          <a:ln>
+            <a:noFill/>
+          </a:ln>
+        </p:spPr>
+        <p:style>
+          <a:lnRef idx="1">
+            <a:schemeClr val="accent1"/>
+          </a:lnRef>
+          <a:fillRef idx="3">
+            <a:schemeClr val="accent1"/>
+          </a:fillRef>
+          <a:effectRef idx="2">
+            <a:schemeClr val="accent1"/>
+          </a:effectRef>
+          <a:fontRef idx="minor">
+            <a:schemeClr val="lt1"/>
+          </a:fontRef>
+        </p:style>
+        <p:txBody>
+          <a:bodyPr rtlCol="0" anchor="ctr"/>
+          <a:lstStyle/>
+          <a:p>
+            <a:pPr algn="ctr"/>
+          </a:p>
+        </p:txBody>
+      </p:sp>
+      <p:sp>
+        <p:nvSpPr>
+          <p:cNvPr id="27" name="TextBox 26"/>
+          <p:cNvSpPr txBox="1"/>
+          <p:nvPr/>
+        </p:nvSpPr>
+        <p:spPr>
+          <a:xfrm>
+            <a:off x="9144000" y="4279392"/>
+            <a:ext cx="2103120" cy="1874520"/>
+          </a:xfrm>
+          <a:prstGeom prst="rect">
+            <a:avLst/>
+          </a:prstGeom>
+          <a:noFill/>
+        </p:spPr>
+        <p:txBody>
+          <a:bodyPr wrap="square" lIns="0" tIns="0" rIns="0" bIns="0">
+            <a:spAutoFit/>
+          </a:bodyPr>
+          <a:lstStyle/>
+          <a:p>
+            <a:pPr>
+              <a:defRPr sz="1300" b="1">
+                <a:solidFill>
+                  <a:srgbClr val="EF4444"/>
+                </a:solidFill>
+              </a:defRPr>
+            </a:pPr>
+            <a:r>
+              <a:t>8. Kênh Phát Cảnh Báo</a:t>
+            </a:r>
+          </a:p>
+          <a:p>
+            <a:pPr>
+              <a:spcBef>
+                <a:spcPts val="300"/>
+              </a:spcBef>
+              <a:defRPr sz="1000">
+                <a:solidFill>
+                  <a:srgbClr val="FFFFFF"/>
+                </a:solidFill>
+              </a:defRPr>
+            </a:pPr>
+            <a:r>
+              <a:t>• Firebase Cloud Messaging (FCM Push)</a:t>
+            </a:r>
+          </a:p>
+          <a:p>
+            <a:pPr>
+              <a:spcBef>
+                <a:spcPts val="300"/>
+              </a:spcBef>
+              <a:defRPr sz="1000">
+                <a:solidFill>
+                  <a:srgbClr val="FFFFFF"/>
+                </a:solidFill>
+              </a:defRPr>
+            </a:pPr>
+            <a:r>
+              <a:t>• SMS Gateway (eSMS / SpeedSMS / Twilio)</a:t>
+            </a:r>
+          </a:p>
+          <a:p>
+            <a:pPr>
+              <a:spcBef>
+                <a:spcPts val="300"/>
+              </a:spcBef>
+              <a:defRPr sz="1000">
+                <a:solidFill>
+                  <a:srgbClr val="FFFFFF"/>
+                </a:solidFill>
+              </a:defRPr>
+            </a:pPr>
+            <a:r>
+              <a:t>• Gửi đồng thời về App và số điện thoại</a:t>
             </a:r>
           </a:p>
         </p:txBody>
@@ -6463,7 +7114,7 @@
             <a:avLst/>
           </a:prstGeom>
           <a:solidFill>
-            <a:srgbClr val="0B0F19"/>
+            <a:srgbClr val="0B1320"/>
           </a:solidFill>
           <a:ln>
             <a:noFill/>
@@ -6499,8 +7150,8 @@
         </p:nvSpPr>
         <p:spPr>
           <a:xfrm>
-            <a:off x="731520" y="365760"/>
-            <a:ext cx="10515600" cy="365760"/>
+            <a:off x="731520" y="457200"/>
+            <a:ext cx="10698480" cy="1005840"/>
           </a:xfrm>
           <a:prstGeom prst="rect">
             <a:avLst/>
@@ -6508,15 +7159,15 @@
           <a:noFill/>
         </p:spPr>
         <p:txBody>
-          <a:bodyPr wrap="square" tIns="0" bIns="0" lIns="0" rIns="0">
+          <a:bodyPr wrap="square" lIns="0" tIns="0" rIns="0" bIns="0">
             <a:spAutoFit/>
           </a:bodyPr>
           <a:lstStyle/>
           <a:p>
             <a:pPr>
-              <a:defRPr sz="1000" b="1">
-                <a:solidFill>
-                  <a:srgbClr val="0EA5E9"/>
+              <a:defRPr sz="1050" b="1">
+                <a:solidFill>
+                  <a:srgbClr val="FF8C00"/>
                 </a:solidFill>
               </a:defRPr>
             </a:pPr>
@@ -6524,31 +7175,11 @@
               <a:t>THÀNH VIÊN 2 • GIS PIPELINE &amp; DATA ENGINEER</a:t>
             </a:r>
           </a:p>
-        </p:txBody>
-      </p:sp>
-      <p:sp>
-        <p:nvSpPr>
-          <p:cNvPr id="4" name="TextBox 3"/>
-          <p:cNvSpPr txBox="1"/>
-          <p:nvPr/>
-        </p:nvSpPr>
-        <p:spPr>
-          <a:xfrm>
-            <a:off x="731520" y="640080"/>
-            <a:ext cx="10515600" cy="640080"/>
-          </a:xfrm>
-          <a:prstGeom prst="rect">
-            <a:avLst/>
-          </a:prstGeom>
-          <a:noFill/>
-        </p:spPr>
-        <p:txBody>
-          <a:bodyPr wrap="square" tIns="0" bIns="0" lIns="0" rIns="0">
-            <a:spAutoFit/>
-          </a:bodyPr>
-          <a:lstStyle/>
-          <a:p>
-            <a:pPr>
+          <a:p>
+            <a:pPr>
+              <a:spcBef>
+                <a:spcPts val="300"/>
+              </a:spcBef>
               <a:defRPr sz="2200" b="1">
                 <a:solidFill>
                   <a:srgbClr val="FFFFFF"/>
@@ -6563,7 +7194,7 @@
       </p:sp>
       <p:sp>
         <p:nvSpPr>
-          <p:cNvPr id="5" name="Rounded Rectangle 4"/>
+          <p:cNvPr id="4" name="Rounded Rectangle 3"/>
           <p:cNvSpPr/>
           <p:nvPr/>
         </p:nvSpPr>
@@ -6576,11 +7207,11 @@
             <a:avLst/>
           </a:prstGeom>
           <a:solidFill>
-            <a:srgbClr val="151E32"/>
+            <a:srgbClr val="131E31"/>
           </a:solidFill>
-          <a:ln w="15240">
+          <a:ln w="12700">
             <a:solidFill>
-              <a:srgbClr val="2A3B5C"/>
+              <a:srgbClr val="1F3A52"/>
             </a:solidFill>
           </a:ln>
         </p:spPr>
@@ -6608,135 +7239,23 @@
       </p:sp>
       <p:sp>
         <p:nvSpPr>
-          <p:cNvPr id="6" name="TextBox 5"/>
-          <p:cNvSpPr txBox="1"/>
-          <p:nvPr/>
-        </p:nvSpPr>
-        <p:spPr>
-          <a:xfrm>
-            <a:off x="914400" y="1828800"/>
-            <a:ext cx="3017520" cy="4023360"/>
-          </a:xfrm>
-          <a:prstGeom prst="rect">
-            <a:avLst/>
-          </a:prstGeom>
-          <a:noFill/>
-        </p:spPr>
-        <p:txBody>
-          <a:bodyPr wrap="square" tIns="0" bIns="0" lIns="0" rIns="0">
-            <a:spAutoFit/>
-          </a:bodyPr>
-          <a:lstStyle/>
-          <a:p>
-            <a:pPr>
-              <a:defRPr sz="1400" b="1">
-                <a:solidFill>
-                  <a:srgbClr val="0EA5E9"/>
-                </a:solidFill>
-              </a:defRPr>
-            </a:pPr>
-            <a:r>
-              <a:t>Thu Thập &amp; Lọc Mây Vệ Tinh</a:t>
-            </a:r>
-          </a:p>
-          <a:p>
-            <a:pPr>
-              <a:spcAft>
-                <a:spcPts val="600"/>
-              </a:spcAft>
-              <a:defRPr sz="1000" i="1">
-                <a:solidFill>
-                  <a:srgbClr val="94A3B8"/>
-                </a:solidFill>
-              </a:defRPr>
-            </a:pPr>
-            <a:r>
-              <a:t>Copernicus API &amp; Cloud Masking</a:t>
-            </a:r>
-          </a:p>
-          <a:p>
-            <a:pPr>
-              <a:spcAft>
-                <a:spcPts val="400"/>
-              </a:spcAft>
-              <a:defRPr sz="1050">
-                <a:solidFill>
-                  <a:srgbClr val="FFFFFF"/>
-                </a:solidFill>
-              </a:defRPr>
-            </a:pPr>
-            <a:r>
-              <a:t>•  Tự động crawl ảnh Sentinel-2 L2A qua Copernicus CDSE / Sentinel Hub API.</a:t>
-            </a:r>
-          </a:p>
-          <a:p>
-            <a:pPr>
-              <a:spcAft>
-                <a:spcPts val="400"/>
-              </a:spcAft>
-              <a:defRPr sz="1050">
-                <a:solidFill>
-                  <a:srgbClr val="FFFFFF"/>
-                </a:solidFill>
-              </a:defRPr>
-            </a:pPr>
-            <a:r>
-              <a:t>•  Áp dụng thuật toán lọc mây thông minh dựa trên Scene Classification Layer (SCL / s2cloudless).</a:t>
-            </a:r>
-          </a:p>
-          <a:p>
-            <a:pPr>
-              <a:spcAft>
-                <a:spcPts val="400"/>
-              </a:spcAft>
-              <a:defRPr sz="1050">
-                <a:solidFill>
-                  <a:srgbClr val="FFFFFF"/>
-                </a:solidFill>
-              </a:defRPr>
-            </a:pPr>
-            <a:r>
-              <a:t>•  Tự động loại bỏ các khung cảnh bị mây che phủ &gt; 40%.</a:t>
-            </a:r>
-          </a:p>
-          <a:p>
-            <a:pPr>
-              <a:spcAft>
-                <a:spcPts val="400"/>
-              </a:spcAft>
-              <a:defRPr sz="1050">
-                <a:solidFill>
-                  <a:srgbClr val="FFFFFF"/>
-                </a:solidFill>
-              </a:defRPr>
-            </a:pPr>
-            <a:r>
-              <a:t>•  Lưu trữ siêu dữ liệu cảnh chụp vào gis_schema.satellite_scenes.</a:t>
-            </a:r>
-          </a:p>
-        </p:txBody>
-      </p:sp>
-      <p:sp>
-        <p:nvSpPr>
-          <p:cNvPr id="7" name="Rounded Rectangle 6"/>
+          <p:cNvPr id="5" name="Rounded Rectangle 4"/>
           <p:cNvSpPr/>
           <p:nvPr/>
         </p:nvSpPr>
         <p:spPr>
           <a:xfrm>
-            <a:off x="4389120" y="1645920"/>
-            <a:ext cx="3383280" cy="4389120"/>
+            <a:off x="731520" y="1645920"/>
+            <a:ext cx="3383280" cy="73152"/>
           </a:xfrm>
           <a:prstGeom prst="roundRect">
             <a:avLst/>
           </a:prstGeom>
           <a:solidFill>
-            <a:srgbClr val="151E32"/>
+            <a:srgbClr val="00D4FF"/>
           </a:solidFill>
-          <a:ln w="15240">
-            <a:solidFill>
-              <a:srgbClr val="2A3B5C"/>
-            </a:solidFill>
+          <a:ln>
+            <a:noFill/>
           </a:ln>
         </p:spPr>
         <p:style>
@@ -6763,14 +7282,14 @@
       </p:sp>
       <p:sp>
         <p:nvSpPr>
-          <p:cNvPr id="8" name="TextBox 7"/>
+          <p:cNvPr id="6" name="TextBox 5"/>
           <p:cNvSpPr txBox="1"/>
           <p:nvPr/>
         </p:nvSpPr>
         <p:spPr>
           <a:xfrm>
-            <a:off x="4572000" y="1828800"/>
-            <a:ext cx="3017520" cy="4023360"/>
+            <a:off x="914400" y="1810512"/>
+            <a:ext cx="3017520" cy="4160520"/>
           </a:xfrm>
           <a:prstGeom prst="rect">
             <a:avLst/>
@@ -6778,35 +7297,20 @@
           <a:noFill/>
         </p:spPr>
         <p:txBody>
-          <a:bodyPr wrap="square" tIns="0" bIns="0" lIns="0" rIns="0">
+          <a:bodyPr wrap="square" lIns="0" tIns="0" rIns="0" bIns="0">
             <a:spAutoFit/>
           </a:bodyPr>
           <a:lstStyle/>
           <a:p>
             <a:pPr>
-              <a:defRPr sz="1400" b="1">
-                <a:solidFill>
-                  <a:srgbClr val="10B981"/>
-                </a:solidFill>
-              </a:defRPr>
-            </a:pPr>
-            <a:r>
-              <a:t>Tính Toán Chỉ Số Địa Không Gian</a:t>
-            </a:r>
-          </a:p>
-          <a:p>
-            <a:pPr>
-              <a:spcAft>
-                <a:spcPts val="600"/>
-              </a:spcAft>
-              <a:defRPr sz="1000" i="1">
-                <a:solidFill>
-                  <a:srgbClr val="94A3B8"/>
-                </a:solidFill>
-              </a:defRPr>
-            </a:pPr>
-            <a:r>
-              <a:t>Delta-NDVI &amp; SRTM 30m DEM Slope</a:t>
+              <a:defRPr sz="1300" b="1">
+                <a:solidFill>
+                  <a:srgbClr val="00D4FF"/>
+                </a:solidFill>
+              </a:defRPr>
+            </a:pPr>
+            <a:r>
+              <a:t>Thu Thập &amp; Lọc Mây Vệ Tinh</a:t>
             </a:r>
           </a:p>
           <a:p>
@@ -6814,83 +7318,98 @@
               <a:spcAft>
                 <a:spcPts val="400"/>
               </a:spcAft>
-              <a:defRPr sz="1050">
-                <a:solidFill>
-                  <a:srgbClr val="FFFFFF"/>
-                </a:solidFill>
-              </a:defRPr>
-            </a:pPr>
-            <a:r>
-              <a:t>•  Tính toán biến động thực vật Delta-NDVI giữa cảnh trước và sau thiên tai bằng rasterio.</a:t>
-            </a:r>
-          </a:p>
-          <a:p>
-            <a:pPr>
-              <a:spcAft>
-                <a:spcPts val="400"/>
-              </a:spcAft>
-              <a:defRPr sz="1050">
-                <a:solidFill>
-                  <a:srgbClr val="FFFFFF"/>
-                </a:solidFill>
-              </a:defRPr>
-            </a:pPr>
-            <a:r>
-              <a:t>•  Trích xuất góc dốc địa hình sườn núi [0 - 90 độ] từ ảnh số độ cao SRTM 30m DEM.</a:t>
-            </a:r>
-          </a:p>
-          <a:p>
-            <a:pPr>
-              <a:spcAft>
-                <a:spcPts val="400"/>
-              </a:spcAft>
-              <a:defRPr sz="1050">
-                <a:solidFill>
-                  <a:srgbClr val="FFFFFF"/>
-                </a:solidFill>
-              </a:defRPr>
-            </a:pPr>
-            <a:r>
-              <a:t>•  Chuẩn hóa và đồng bộ hệ quy chiếu tọa độ địa lý WGS84 EPSG:4326.</a:t>
-            </a:r>
-          </a:p>
-          <a:p>
-            <a:pPr>
-              <a:spcAft>
-                <a:spcPts val="400"/>
-              </a:spcAft>
-              <a:defRPr sz="1050">
-                <a:solidFill>
-                  <a:srgbClr val="FFFFFF"/>
-                </a:solidFill>
-              </a:defRPr>
-            </a:pPr>
-            <a:r>
-              <a:t>•  Chuẩn bị ma trận 8 kênh hoàn chỉnh bàn giao cho phân hệ AI.</a:t>
-            </a:r>
-          </a:p>
-        </p:txBody>
-      </p:sp>
-      <p:sp>
-        <p:nvSpPr>
-          <p:cNvPr id="9" name="Rounded Rectangle 8"/>
+              <a:defRPr sz="950">
+                <a:solidFill>
+                  <a:srgbClr val="9CB2C9"/>
+                </a:solidFill>
+              </a:defRPr>
+            </a:pPr>
+            <a:r>
+              <a:t>Copernicus API &amp; Cloud Masking</a:t>
+            </a:r>
+          </a:p>
+          <a:p>
+            <a:pPr>
+              <a:spcBef>
+                <a:spcPts val="300"/>
+              </a:spcBef>
+              <a:defRPr sz="1000">
+                <a:solidFill>
+                  <a:srgbClr val="FFFFFF"/>
+                </a:solidFill>
+              </a:defRPr>
+            </a:pPr>
+            <a:r>
+              <a:t>• Tự động crawl ảnh Sentinel-2 L2A qua Copernicus CDSE / Sentinel Hub API.</a:t>
+            </a:r>
+          </a:p>
+          <a:p>
+            <a:pPr>
+              <a:spcBef>
+                <a:spcPts val="300"/>
+              </a:spcBef>
+              <a:defRPr sz="1000">
+                <a:solidFill>
+                  <a:srgbClr val="FFFFFF"/>
+                </a:solidFill>
+              </a:defRPr>
+            </a:pPr>
+            <a:r>
+              <a:t>• Áp dụng thuật toán lọc mây thông minh dựa trên Scene Classification Layer (SCL / s2cloudless).</a:t>
+            </a:r>
+          </a:p>
+          <a:p>
+            <a:pPr>
+              <a:spcBef>
+                <a:spcPts val="300"/>
+              </a:spcBef>
+              <a:defRPr sz="1000">
+                <a:solidFill>
+                  <a:srgbClr val="FFFFFF"/>
+                </a:solidFill>
+              </a:defRPr>
+            </a:pPr>
+            <a:r>
+              <a:t>• Tự động loại bỏ các khung cảnh bị mây che phủ &gt; 40%.</a:t>
+            </a:r>
+          </a:p>
+          <a:p>
+            <a:pPr>
+              <a:spcBef>
+                <a:spcPts val="300"/>
+              </a:spcBef>
+              <a:defRPr sz="1000">
+                <a:solidFill>
+                  <a:srgbClr val="FFFFFF"/>
+                </a:solidFill>
+              </a:defRPr>
+            </a:pPr>
+            <a:r>
+              <a:t>• Lưu trữ siêu dữ liệu cảnh chụp vào gis_schema.satellite_scenes.</a:t>
+            </a:r>
+          </a:p>
+        </p:txBody>
+      </p:sp>
+      <p:sp>
+        <p:nvSpPr>
+          <p:cNvPr id="7" name="Rounded Rectangle 6"/>
           <p:cNvSpPr/>
           <p:nvPr/>
         </p:nvSpPr>
         <p:spPr>
           <a:xfrm>
-            <a:off x="8046720" y="1645920"/>
+            <a:off x="4389120" y="1645920"/>
             <a:ext cx="3383280" cy="4389120"/>
           </a:xfrm>
           <a:prstGeom prst="roundRect">
             <a:avLst/>
           </a:prstGeom>
           <a:solidFill>
-            <a:srgbClr val="151E32"/>
+            <a:srgbClr val="131E31"/>
           </a:solidFill>
-          <a:ln w="15240">
+          <a:ln w="12700">
             <a:solidFill>
-              <a:srgbClr val="2A3B5C"/>
+              <a:srgbClr val="1F3A52"/>
             </a:solidFill>
           </a:ln>
         </p:spPr>
@@ -6918,14 +7437,57 @@
       </p:sp>
       <p:sp>
         <p:nvSpPr>
-          <p:cNvPr id="10" name="TextBox 9"/>
+          <p:cNvPr id="8" name="Rounded Rectangle 7"/>
+          <p:cNvSpPr/>
+          <p:nvPr/>
+        </p:nvSpPr>
+        <p:spPr>
+          <a:xfrm>
+            <a:off x="4389120" y="1645920"/>
+            <a:ext cx="3383280" cy="73152"/>
+          </a:xfrm>
+          <a:prstGeom prst="roundRect">
+            <a:avLst/>
+          </a:prstGeom>
+          <a:solidFill>
+            <a:srgbClr val="10B981"/>
+          </a:solidFill>
+          <a:ln>
+            <a:noFill/>
+          </a:ln>
+        </p:spPr>
+        <p:style>
+          <a:lnRef idx="1">
+            <a:schemeClr val="accent1"/>
+          </a:lnRef>
+          <a:fillRef idx="3">
+            <a:schemeClr val="accent1"/>
+          </a:fillRef>
+          <a:effectRef idx="2">
+            <a:schemeClr val="accent1"/>
+          </a:effectRef>
+          <a:fontRef idx="minor">
+            <a:schemeClr val="lt1"/>
+          </a:fontRef>
+        </p:style>
+        <p:txBody>
+          <a:bodyPr rtlCol="0" anchor="ctr"/>
+          <a:lstStyle/>
+          <a:p>
+            <a:pPr algn="ctr"/>
+          </a:p>
+        </p:txBody>
+      </p:sp>
+      <p:sp>
+        <p:nvSpPr>
+          <p:cNvPr id="9" name="TextBox 8"/>
           <p:cNvSpPr txBox="1"/>
           <p:nvPr/>
         </p:nvSpPr>
         <p:spPr>
           <a:xfrm>
-            <a:off x="8229600" y="1828800"/>
-            <a:ext cx="3017520" cy="4023360"/>
+            <a:off x="4572000" y="1810512"/>
+            <a:ext cx="3017520" cy="4160520"/>
           </a:xfrm>
           <a:prstGeom prst="rect">
             <a:avLst/>
@@ -6933,35 +7495,20 @@
           <a:noFill/>
         </p:spPr>
         <p:txBody>
-          <a:bodyPr wrap="square" tIns="0" bIns="0" lIns="0" rIns="0">
+          <a:bodyPr wrap="square" lIns="0" tIns="0" rIns="0" bIns="0">
             <a:spAutoFit/>
           </a:bodyPr>
           <a:lstStyle/>
           <a:p>
             <a:pPr>
-              <a:defRPr sz="1400" b="1">
-                <a:solidFill>
-                  <a:srgbClr val="F97316"/>
-                </a:solidFill>
-              </a:defRPr>
-            </a:pPr>
-            <a:r>
-              <a:t>Tiling &amp; Raster-to-Vector</a:t>
-            </a:r>
-          </a:p>
-          <a:p>
-            <a:pPr>
-              <a:spcAft>
-                <a:spcPts val="600"/>
-              </a:spcAft>
-              <a:defRPr sz="1000" i="1">
-                <a:solidFill>
-                  <a:srgbClr val="94A3B8"/>
-                </a:solidFill>
-              </a:defRPr>
-            </a:pPr>
-            <a:r>
-              <a:t>Tiling Engine &amp; Vector Tiles</a:t>
+              <a:defRPr sz="1300" b="1">
+                <a:solidFill>
+                  <a:srgbClr val="10B981"/>
+                </a:solidFill>
+              </a:defRPr>
+            </a:pPr>
+            <a:r>
+              <a:t>Tính Toán Chỉ Số Địa Không Gian</a:t>
             </a:r>
           </a:p>
           <a:p>
@@ -6969,14 +7516,197 @@
               <a:spcAft>
                 <a:spcPts val="400"/>
               </a:spcAft>
-              <a:defRPr sz="1050">
-                <a:solidFill>
-                  <a:srgbClr val="FFFFFF"/>
-                </a:solidFill>
-              </a:defRPr>
-            </a:pPr>
-            <a:r>
-              <a:t>•  Module Tiling băm lưới khu vực giám sát AOI thành các patch 128x128 pixel.</a:t>
+              <a:defRPr sz="950">
+                <a:solidFill>
+                  <a:srgbClr val="9CB2C9"/>
+                </a:solidFill>
+              </a:defRPr>
+            </a:pPr>
+            <a:r>
+              <a:t>Delta-NDVI &amp; SRTM 30m DEM Slope</a:t>
+            </a:r>
+          </a:p>
+          <a:p>
+            <a:pPr>
+              <a:spcBef>
+                <a:spcPts val="300"/>
+              </a:spcBef>
+              <a:defRPr sz="1000">
+                <a:solidFill>
+                  <a:srgbClr val="FFFFFF"/>
+                </a:solidFill>
+              </a:defRPr>
+            </a:pPr>
+            <a:r>
+              <a:t>• Tính toán biến động thực vật Delta-NDVI giữa cảnh trước và sau thiên tai bằng rasterio.</a:t>
+            </a:r>
+          </a:p>
+          <a:p>
+            <a:pPr>
+              <a:spcBef>
+                <a:spcPts val="300"/>
+              </a:spcBef>
+              <a:defRPr sz="1000">
+                <a:solidFill>
+                  <a:srgbClr val="FFFFFF"/>
+                </a:solidFill>
+              </a:defRPr>
+            </a:pPr>
+            <a:r>
+              <a:t>• Trích xuất góc dốc địa hình sườn núi [0 - 90 độ] từ ảnh số độ cao SRTM 30m DEM.</a:t>
+            </a:r>
+          </a:p>
+          <a:p>
+            <a:pPr>
+              <a:spcBef>
+                <a:spcPts val="300"/>
+              </a:spcBef>
+              <a:defRPr sz="1000">
+                <a:solidFill>
+                  <a:srgbClr val="FFFFFF"/>
+                </a:solidFill>
+              </a:defRPr>
+            </a:pPr>
+            <a:r>
+              <a:t>• Chuẩn hóa và đồng bộ hệ quy chiếu tọa độ địa lý WGS84 EPSG:4326.</a:t>
+            </a:r>
+          </a:p>
+          <a:p>
+            <a:pPr>
+              <a:spcBef>
+                <a:spcPts val="300"/>
+              </a:spcBef>
+              <a:defRPr sz="1000">
+                <a:solidFill>
+                  <a:srgbClr val="FFFFFF"/>
+                </a:solidFill>
+              </a:defRPr>
+            </a:pPr>
+            <a:r>
+              <a:t>• Chuẩn bị ma trận 8 kênh hoàn chỉnh bàn giao cho phân hệ AI.</a:t>
+            </a:r>
+          </a:p>
+        </p:txBody>
+      </p:sp>
+      <p:sp>
+        <p:nvSpPr>
+          <p:cNvPr id="10" name="Rounded Rectangle 9"/>
+          <p:cNvSpPr/>
+          <p:nvPr/>
+        </p:nvSpPr>
+        <p:spPr>
+          <a:xfrm>
+            <a:off x="8046720" y="1645920"/>
+            <a:ext cx="3383280" cy="4389120"/>
+          </a:xfrm>
+          <a:prstGeom prst="roundRect">
+            <a:avLst/>
+          </a:prstGeom>
+          <a:solidFill>
+            <a:srgbClr val="131E31"/>
+          </a:solidFill>
+          <a:ln w="12700">
+            <a:solidFill>
+              <a:srgbClr val="1F3A52"/>
+            </a:solidFill>
+          </a:ln>
+        </p:spPr>
+        <p:style>
+          <a:lnRef idx="1">
+            <a:schemeClr val="accent1"/>
+          </a:lnRef>
+          <a:fillRef idx="3">
+            <a:schemeClr val="accent1"/>
+          </a:fillRef>
+          <a:effectRef idx="2">
+            <a:schemeClr val="accent1"/>
+          </a:effectRef>
+          <a:fontRef idx="minor">
+            <a:schemeClr val="lt1"/>
+          </a:fontRef>
+        </p:style>
+        <p:txBody>
+          <a:bodyPr rtlCol="0" anchor="ctr"/>
+          <a:lstStyle/>
+          <a:p>
+            <a:pPr algn="ctr"/>
+          </a:p>
+        </p:txBody>
+      </p:sp>
+      <p:sp>
+        <p:nvSpPr>
+          <p:cNvPr id="11" name="Rounded Rectangle 10"/>
+          <p:cNvSpPr/>
+          <p:nvPr/>
+        </p:nvSpPr>
+        <p:spPr>
+          <a:xfrm>
+            <a:off x="8046720" y="1645920"/>
+            <a:ext cx="3383280" cy="73152"/>
+          </a:xfrm>
+          <a:prstGeom prst="roundRect">
+            <a:avLst/>
+          </a:prstGeom>
+          <a:solidFill>
+            <a:srgbClr val="FF8C00"/>
+          </a:solidFill>
+          <a:ln>
+            <a:noFill/>
+          </a:ln>
+        </p:spPr>
+        <p:style>
+          <a:lnRef idx="1">
+            <a:schemeClr val="accent1"/>
+          </a:lnRef>
+          <a:fillRef idx="3">
+            <a:schemeClr val="accent1"/>
+          </a:fillRef>
+          <a:effectRef idx="2">
+            <a:schemeClr val="accent1"/>
+          </a:effectRef>
+          <a:fontRef idx="minor">
+            <a:schemeClr val="lt1"/>
+          </a:fontRef>
+        </p:style>
+        <p:txBody>
+          <a:bodyPr rtlCol="0" anchor="ctr"/>
+          <a:lstStyle/>
+          <a:p>
+            <a:pPr algn="ctr"/>
+          </a:p>
+        </p:txBody>
+      </p:sp>
+      <p:sp>
+        <p:nvSpPr>
+          <p:cNvPr id="12" name="TextBox 11"/>
+          <p:cNvSpPr txBox="1"/>
+          <p:nvPr/>
+        </p:nvSpPr>
+        <p:spPr>
+          <a:xfrm>
+            <a:off x="8229600" y="1810512"/>
+            <a:ext cx="3017520" cy="4160520"/>
+          </a:xfrm>
+          <a:prstGeom prst="rect">
+            <a:avLst/>
+          </a:prstGeom>
+          <a:noFill/>
+        </p:spPr>
+        <p:txBody>
+          <a:bodyPr wrap="square" lIns="0" tIns="0" rIns="0" bIns="0">
+            <a:spAutoFit/>
+          </a:bodyPr>
+          <a:lstStyle/>
+          <a:p>
+            <a:pPr>
+              <a:defRPr sz="1300" b="1">
+                <a:solidFill>
+                  <a:srgbClr val="FF8C00"/>
+                </a:solidFill>
+              </a:defRPr>
+            </a:pPr>
+            <a:r>
+              <a:t>Tiling &amp; Raster-to-Vector</a:t>
             </a:r>
           </a:p>
           <a:p>
@@ -6984,44 +7714,74 @@
               <a:spcAft>
                 <a:spcPts val="400"/>
               </a:spcAft>
-              <a:defRPr sz="1050">
-                <a:solidFill>
-                  <a:srgbClr val="FFFFFF"/>
-                </a:solidFill>
-              </a:defRPr>
-            </a:pPr>
-            <a:r>
-              <a:t>•  Băm lưới thông minh tính toán độ nén kinh độ theo vĩ độ và độ gối mép (stride overlap).</a:t>
-            </a:r>
-          </a:p>
-          <a:p>
-            <a:pPr>
-              <a:spcAft>
-                <a:spcPts val="400"/>
-              </a:spcAft>
-              <a:defRPr sz="1050">
-                <a:solidFill>
-                  <a:srgbClr val="FFFFFF"/>
-                </a:solidFill>
-              </a:defRPr>
-            </a:pPr>
-            <a:r>
-              <a:t>•  Thuật toán Raster-to-Vector (Polygonization) chuyển mặt nạ AI thành đa giác PostGIS MultiPolygon.</a:t>
-            </a:r>
-          </a:p>
-          <a:p>
-            <a:pPr>
-              <a:spcAft>
-                <a:spcPts val="400"/>
-              </a:spcAft>
-              <a:defRPr sz="1050">
-                <a:solidFill>
-                  <a:srgbClr val="FFFFFF"/>
-                </a:solidFill>
-              </a:defRPr>
-            </a:pPr>
-            <a:r>
-              <a:t>•  Phục vụ Vector Tiles MVT qua /tiles/{z}/{x}/{y}.pbf cho WebGIS.</a:t>
+              <a:defRPr sz="950">
+                <a:solidFill>
+                  <a:srgbClr val="9CB2C9"/>
+                </a:solidFill>
+              </a:defRPr>
+            </a:pPr>
+            <a:r>
+              <a:t>Tiling Engine &amp; Vector Tiles</a:t>
+            </a:r>
+          </a:p>
+          <a:p>
+            <a:pPr>
+              <a:spcBef>
+                <a:spcPts val="300"/>
+              </a:spcBef>
+              <a:defRPr sz="1000">
+                <a:solidFill>
+                  <a:srgbClr val="FFFFFF"/>
+                </a:solidFill>
+              </a:defRPr>
+            </a:pPr>
+            <a:r>
+              <a:t>• Module Tiling băm lưới khu vực giám sát AOI thành các patch 128x128 pixel.</a:t>
+            </a:r>
+          </a:p>
+          <a:p>
+            <a:pPr>
+              <a:spcBef>
+                <a:spcPts val="300"/>
+              </a:spcBef>
+              <a:defRPr sz="1000">
+                <a:solidFill>
+                  <a:srgbClr val="FFFFFF"/>
+                </a:solidFill>
+              </a:defRPr>
+            </a:pPr>
+            <a:r>
+              <a:t>• Băm lưới thông minh tính toán độ nén kinh độ theo vĩ độ và độ gối mép (stride overlap).</a:t>
+            </a:r>
+          </a:p>
+          <a:p>
+            <a:pPr>
+              <a:spcBef>
+                <a:spcPts val="300"/>
+              </a:spcBef>
+              <a:defRPr sz="1000">
+                <a:solidFill>
+                  <a:srgbClr val="FFFFFF"/>
+                </a:solidFill>
+              </a:defRPr>
+            </a:pPr>
+            <a:r>
+              <a:t>• Thuật toán Raster-to-Vector (Polygonization) chuyển mặt nạ AI thành đa giác PostGIS MultiPolygon.</a:t>
+            </a:r>
+          </a:p>
+          <a:p>
+            <a:pPr>
+              <a:spcBef>
+                <a:spcPts val="300"/>
+              </a:spcBef>
+              <a:defRPr sz="1000">
+                <a:solidFill>
+                  <a:srgbClr val="FFFFFF"/>
+                </a:solidFill>
+              </a:defRPr>
+            </a:pPr>
+            <a:r>
+              <a:t>• Phục vụ Vector Tiles MVT qua /tiles/{z}/{x}/{y}.pbf cho WebGIS.</a:t>
             </a:r>
           </a:p>
         </p:txBody>
@@ -7059,7 +7819,7 @@
             <a:avLst/>
           </a:prstGeom>
           <a:solidFill>
-            <a:srgbClr val="0B0F19"/>
+            <a:srgbClr val="0B1320"/>
           </a:solidFill>
           <a:ln>
             <a:noFill/>
@@ -7095,8 +7855,8 @@
         </p:nvSpPr>
         <p:spPr>
           <a:xfrm>
-            <a:off x="731520" y="365760"/>
-            <a:ext cx="10515600" cy="365760"/>
+            <a:off x="731520" y="457200"/>
+            <a:ext cx="10698480" cy="1005840"/>
           </a:xfrm>
           <a:prstGeom prst="rect">
             <a:avLst/>
@@ -7104,15 +7864,15 @@
           <a:noFill/>
         </p:spPr>
         <p:txBody>
-          <a:bodyPr wrap="square" tIns="0" bIns="0" lIns="0" rIns="0">
+          <a:bodyPr wrap="square" lIns="0" tIns="0" rIns="0" bIns="0">
             <a:spAutoFit/>
           </a:bodyPr>
           <a:lstStyle/>
           <a:p>
             <a:pPr>
-              <a:defRPr sz="1000" b="1">
-                <a:solidFill>
-                  <a:srgbClr val="0EA5E9"/>
+              <a:defRPr sz="1050" b="1">
+                <a:solidFill>
+                  <a:srgbClr val="FF8C00"/>
                 </a:solidFill>
               </a:defRPr>
             </a:pPr>
@@ -7120,31 +7880,11 @@
               <a:t>THÀNH VIÊN 1 • AI / COMPUTER VISION ENGINEER</a:t>
             </a:r>
           </a:p>
-        </p:txBody>
-      </p:sp>
-      <p:sp>
-        <p:nvSpPr>
-          <p:cNvPr id="4" name="TextBox 3"/>
-          <p:cNvSpPr txBox="1"/>
-          <p:nvPr/>
-        </p:nvSpPr>
-        <p:spPr>
-          <a:xfrm>
-            <a:off x="731520" y="640080"/>
-            <a:ext cx="10515600" cy="640080"/>
-          </a:xfrm>
-          <a:prstGeom prst="rect">
-            <a:avLst/>
-          </a:prstGeom>
-          <a:noFill/>
-        </p:spPr>
-        <p:txBody>
-          <a:bodyPr wrap="square" tIns="0" bIns="0" lIns="0" rIns="0">
-            <a:spAutoFit/>
-          </a:bodyPr>
-          <a:lstStyle/>
-          <a:p>
-            <a:pPr>
+          <a:p>
+            <a:pPr>
+              <a:spcBef>
+                <a:spcPts val="300"/>
+              </a:spcBef>
               <a:defRPr sz="2200" b="1">
                 <a:solidFill>
                   <a:srgbClr val="FFFFFF"/>
@@ -7159,7 +7899,7 @@
       </p:sp>
       <p:sp>
         <p:nvSpPr>
-          <p:cNvPr id="5" name="Rounded Rectangle 4"/>
+          <p:cNvPr id="4" name="Rounded Rectangle 3"/>
           <p:cNvSpPr/>
           <p:nvPr/>
         </p:nvSpPr>
@@ -7172,11 +7912,11 @@
             <a:avLst/>
           </a:prstGeom>
           <a:solidFill>
-            <a:srgbClr val="151E32"/>
+            <a:srgbClr val="131E31"/>
           </a:solidFill>
           <a:ln>
             <a:solidFill>
-              <a:srgbClr val="0EA5E9"/>
+              <a:srgbClr val="00D4FF"/>
             </a:solidFill>
           </a:ln>
         </p:spPr>
@@ -7201,7 +7941,7 @@
             <a:pPr algn="ctr">
               <a:defRPr sz="1300" b="1">
                 <a:solidFill>
-                  <a:srgbClr val="0EA5E9"/>
+                  <a:srgbClr val="00D4FF"/>
                 </a:solidFill>
               </a:defRPr>
             </a:pPr>
@@ -7213,7 +7953,7 @@
       </p:sp>
       <p:sp>
         <p:nvSpPr>
-          <p:cNvPr id="6" name="Rounded Rectangle 5"/>
+          <p:cNvPr id="5" name="Rounded Rectangle 4"/>
           <p:cNvSpPr/>
           <p:nvPr/>
         </p:nvSpPr>
@@ -7226,11 +7966,11 @@
             <a:avLst/>
           </a:prstGeom>
           <a:solidFill>
-            <a:srgbClr val="151E32"/>
+            <a:srgbClr val="131E31"/>
           </a:solidFill>
-          <a:ln w="15240">
+          <a:ln w="12700">
             <a:solidFill>
-              <a:srgbClr val="2A3B5C"/>
+              <a:srgbClr val="1F3A52"/>
             </a:solidFill>
           </a:ln>
         </p:spPr>
@@ -7258,135 +7998,23 @@
       </p:sp>
       <p:sp>
         <p:nvSpPr>
-          <p:cNvPr id="7" name="TextBox 6"/>
-          <p:cNvSpPr txBox="1"/>
-          <p:nvPr/>
-        </p:nvSpPr>
-        <p:spPr>
-          <a:xfrm>
-            <a:off x="914400" y="2834640"/>
-            <a:ext cx="3017520" cy="3200400"/>
-          </a:xfrm>
-          <a:prstGeom prst="rect">
-            <a:avLst/>
-          </a:prstGeom>
-          <a:noFill/>
-        </p:spPr>
-        <p:txBody>
-          <a:bodyPr wrap="square" tIns="0" bIns="0" lIns="0" rIns="0">
-            <a:spAutoFit/>
-          </a:bodyPr>
-          <a:lstStyle/>
-          <a:p>
-            <a:pPr>
-              <a:defRPr sz="1400" b="1">
-                <a:solidFill>
-                  <a:srgbClr val="0EA5E9"/>
-                </a:solidFill>
-              </a:defRPr>
-            </a:pPr>
-            <a:r>
-              <a:t>Semantic Segmentation Sạt Lở</a:t>
-            </a:r>
-          </a:p>
-          <a:p>
-            <a:pPr>
-              <a:spcAft>
-                <a:spcPts val="600"/>
-              </a:spcAft>
-              <a:defRPr sz="1000" i="1">
-                <a:solidFill>
-                  <a:srgbClr val="94A3B8"/>
-                </a:solidFill>
-              </a:defRPr>
-            </a:pPr>
-            <a:r>
-              <a:t>DeepLabV3+ on Landslide4Sense</a:t>
-            </a:r>
-          </a:p>
-          <a:p>
-            <a:pPr>
-              <a:spcAft>
-                <a:spcPts val="400"/>
-              </a:spcAft>
-              <a:defRPr sz="1050">
-                <a:solidFill>
-                  <a:srgbClr val="FFFFFF"/>
-                </a:solidFill>
-              </a:defRPr>
-            </a:pPr>
-            <a:r>
-              <a:t>•  Kiến trúc DeepLabV3+ với Backbone ResNet-50 / EfficientNet kết hợp ASPP.</a:t>
-            </a:r>
-          </a:p>
-          <a:p>
-            <a:pPr>
-              <a:spcAft>
-                <a:spcPts val="400"/>
-              </a:spcAft>
-              <a:defRPr sz="1050">
-                <a:solidFill>
-                  <a:srgbClr val="FFFFFF"/>
-                </a:solidFill>
-              </a:defRPr>
-            </a:pPr>
-            <a:r>
-              <a:t>•  Huấn luyện trên tập dữ liệu chuẩn quốc tế Landslide4Sense (&gt; 3,799 mẫu).</a:t>
-            </a:r>
-          </a:p>
-          <a:p>
-            <a:pPr>
-              <a:spcAft>
-                <a:spcPts val="400"/>
-              </a:spcAft>
-              <a:defRPr sz="1050">
-                <a:solidFill>
-                  <a:srgbClr val="FFFFFF"/>
-                </a:solidFill>
-              </a:defRPr>
-            </a:pPr>
-            <a:r>
-              <a:t>•  Đầu vào 8 kênh: [B2, B3, B4, B8, B11, B12, NDVI, SLOPE].</a:t>
-            </a:r>
-          </a:p>
-          <a:p>
-            <a:pPr>
-              <a:spcAft>
-                <a:spcPts val="400"/>
-              </a:spcAft>
-              <a:defRPr sz="1050">
-                <a:solidFill>
-                  <a:srgbClr val="FFFFFF"/>
-                </a:solidFill>
-              </a:defRPr>
-            </a:pPr>
-            <a:r>
-              <a:t>•  Hàm mất mát Focal + Dice Loss giải quyết mất cân bằng mẫu nghiêm trọng (&lt; 2% diện tích sạt lở).</a:t>
-            </a:r>
-          </a:p>
-        </p:txBody>
-      </p:sp>
-      <p:sp>
-        <p:nvSpPr>
-          <p:cNvPr id="8" name="Rounded Rectangle 7"/>
+          <p:cNvPr id="6" name="Rounded Rectangle 5"/>
           <p:cNvSpPr/>
           <p:nvPr/>
         </p:nvSpPr>
         <p:spPr>
           <a:xfrm>
-            <a:off x="4389120" y="2651760"/>
-            <a:ext cx="3383280" cy="3566160"/>
+            <a:off x="731520" y="2651760"/>
+            <a:ext cx="3383280" cy="73152"/>
           </a:xfrm>
           <a:prstGeom prst="roundRect">
             <a:avLst/>
           </a:prstGeom>
           <a:solidFill>
-            <a:srgbClr val="151E32"/>
+            <a:srgbClr val="00D4FF"/>
           </a:solidFill>
-          <a:ln w="15240">
-            <a:solidFill>
-              <a:srgbClr val="2A3B5C"/>
-            </a:solidFill>
+          <a:ln>
+            <a:noFill/>
           </a:ln>
         </p:spPr>
         <p:style>
@@ -7413,14 +8041,14 @@
       </p:sp>
       <p:sp>
         <p:nvSpPr>
-          <p:cNvPr id="9" name="TextBox 8"/>
+          <p:cNvPr id="7" name="TextBox 6"/>
           <p:cNvSpPr txBox="1"/>
           <p:nvPr/>
         </p:nvSpPr>
         <p:spPr>
           <a:xfrm>
-            <a:off x="4572000" y="2834640"/>
-            <a:ext cx="3017520" cy="3200400"/>
+            <a:off x="914400" y="2816352"/>
+            <a:ext cx="3017520" cy="3337560"/>
           </a:xfrm>
           <a:prstGeom prst="rect">
             <a:avLst/>
@@ -7428,35 +8056,20 @@
           <a:noFill/>
         </p:spPr>
         <p:txBody>
-          <a:bodyPr wrap="square" tIns="0" bIns="0" lIns="0" rIns="0">
+          <a:bodyPr wrap="square" lIns="0" tIns="0" rIns="0" bIns="0">
             <a:spAutoFit/>
           </a:bodyPr>
           <a:lstStyle/>
           <a:p>
             <a:pPr>
-              <a:defRPr sz="1400" b="1">
-                <a:solidFill>
-                  <a:srgbClr val="10B981"/>
-                </a:solidFill>
-              </a:defRPr>
-            </a:pPr>
-            <a:r>
-              <a:t>Đóng Gói ONNX Runtime</a:t>
-            </a:r>
-          </a:p>
-          <a:p>
-            <a:pPr>
-              <a:spcAft>
-                <a:spcPts val="600"/>
-              </a:spcAft>
-              <a:defRPr sz="1000" i="1">
-                <a:solidFill>
-                  <a:srgbClr val="94A3B8"/>
-                </a:solidFill>
-              </a:defRPr>
-            </a:pPr>
-            <a:r>
-              <a:t>High Performance Inference</a:t>
+              <a:defRPr sz="1300" b="1">
+                <a:solidFill>
+                  <a:srgbClr val="00D4FF"/>
+                </a:solidFill>
+              </a:defRPr>
+            </a:pPr>
+            <a:r>
+              <a:t>Semantic Segmentation Sạt Lở</a:t>
             </a:r>
           </a:p>
           <a:p>
@@ -7464,83 +8077,98 @@
               <a:spcAft>
                 <a:spcPts val="400"/>
               </a:spcAft>
-              <a:defRPr sz="1050">
-                <a:solidFill>
-                  <a:srgbClr val="FFFFFF"/>
-                </a:solidFill>
-              </a:defRPr>
-            </a:pPr>
-            <a:r>
-              <a:t>•  Xuất mô hình PyTorch sang định dạng ONNX Runtime tối ưu.</a:t>
-            </a:r>
-          </a:p>
-          <a:p>
-            <a:pPr>
-              <a:spcAft>
-                <a:spcPts val="400"/>
-              </a:spcAft>
-              <a:defRPr sz="1050">
-                <a:solidFill>
-                  <a:srgbClr val="FFFFFF"/>
-                </a:solidFill>
-              </a:defRPr>
-            </a:pPr>
-            <a:r>
-              <a:t>•  Tốc độ suy luận CPU Intel chỉ 182ms, GPU RTX 3060 đạt 26ms/patch.</a:t>
-            </a:r>
-          </a:p>
-          <a:p>
-            <a:pPr>
-              <a:spcAft>
-                <a:spcPts val="400"/>
-              </a:spcAft>
-              <a:defRPr sz="1050">
-                <a:solidFill>
-                  <a:srgbClr val="FFFFFF"/>
-                </a:solidFill>
-              </a:defRPr>
-            </a:pPr>
-            <a:r>
-              <a:t>•  Triển khai qua FastAPI service độc lập tại port 8001.</a:t>
-            </a:r>
-          </a:p>
-          <a:p>
-            <a:pPr>
-              <a:spcAft>
-                <a:spcPts val="400"/>
-              </a:spcAft>
-              <a:defRPr sz="1050">
-                <a:solidFill>
-                  <a:srgbClr val="FFFFFF"/>
-                </a:solidFill>
-              </a:defRPr>
-            </a:pPr>
-            <a:r>
-              <a:t>•  Hỗ trợ chế độ chạy nền tự động xử lý hàng loạt khi có ảnh vệ tinh mới.</a:t>
-            </a:r>
-          </a:p>
-        </p:txBody>
-      </p:sp>
-      <p:sp>
-        <p:nvSpPr>
-          <p:cNvPr id="10" name="Rounded Rectangle 9"/>
+              <a:defRPr sz="950">
+                <a:solidFill>
+                  <a:srgbClr val="9CB2C9"/>
+                </a:solidFill>
+              </a:defRPr>
+            </a:pPr>
+            <a:r>
+              <a:t>DeepLabV3+ on Landslide4Sense</a:t>
+            </a:r>
+          </a:p>
+          <a:p>
+            <a:pPr>
+              <a:spcBef>
+                <a:spcPts val="300"/>
+              </a:spcBef>
+              <a:defRPr sz="1000">
+                <a:solidFill>
+                  <a:srgbClr val="FFFFFF"/>
+                </a:solidFill>
+              </a:defRPr>
+            </a:pPr>
+            <a:r>
+              <a:t>• Kiến trúc DeepLabV3+ với Backbone ResNet-50 / EfficientNet kết hợp ASPP.</a:t>
+            </a:r>
+          </a:p>
+          <a:p>
+            <a:pPr>
+              <a:spcBef>
+                <a:spcPts val="300"/>
+              </a:spcBef>
+              <a:defRPr sz="1000">
+                <a:solidFill>
+                  <a:srgbClr val="FFFFFF"/>
+                </a:solidFill>
+              </a:defRPr>
+            </a:pPr>
+            <a:r>
+              <a:t>• Huấn luyện trên tập dữ liệu chuẩn quốc tế Landslide4Sense (&gt; 3,799 mẫu).</a:t>
+            </a:r>
+          </a:p>
+          <a:p>
+            <a:pPr>
+              <a:spcBef>
+                <a:spcPts val="300"/>
+              </a:spcBef>
+              <a:defRPr sz="1000">
+                <a:solidFill>
+                  <a:srgbClr val="FFFFFF"/>
+                </a:solidFill>
+              </a:defRPr>
+            </a:pPr>
+            <a:r>
+              <a:t>• Đầu vào 8 kênh: [B2, B3, B4, B8, B11, B12, NDVI, SLOPE].</a:t>
+            </a:r>
+          </a:p>
+          <a:p>
+            <a:pPr>
+              <a:spcBef>
+                <a:spcPts val="300"/>
+              </a:spcBef>
+              <a:defRPr sz="1000">
+                <a:solidFill>
+                  <a:srgbClr val="FFFFFF"/>
+                </a:solidFill>
+              </a:defRPr>
+            </a:pPr>
+            <a:r>
+              <a:t>• Hàm mất mát Focal + Dice Loss giải quyết mất cân bằng mẫu nghiêm trọng (&lt; 2% diện tích sạt lở).</a:t>
+            </a:r>
+          </a:p>
+        </p:txBody>
+      </p:sp>
+      <p:sp>
+        <p:nvSpPr>
+          <p:cNvPr id="8" name="Rounded Rectangle 7"/>
           <p:cNvSpPr/>
           <p:nvPr/>
         </p:nvSpPr>
         <p:spPr>
           <a:xfrm>
-            <a:off x="8046720" y="2651760"/>
+            <a:off x="4389120" y="2651760"/>
             <a:ext cx="3383280" cy="3566160"/>
           </a:xfrm>
           <a:prstGeom prst="roundRect">
             <a:avLst/>
           </a:prstGeom>
           <a:solidFill>
-            <a:srgbClr val="151E32"/>
+            <a:srgbClr val="131E31"/>
           </a:solidFill>
-          <a:ln w="15240">
+          <a:ln w="12700">
             <a:solidFill>
-              <a:srgbClr val="2A3B5C"/>
+              <a:srgbClr val="1F3A52"/>
             </a:solidFill>
           </a:ln>
         </p:spPr>
@@ -7568,14 +8196,57 @@
       </p:sp>
       <p:sp>
         <p:nvSpPr>
-          <p:cNvPr id="11" name="TextBox 10"/>
+          <p:cNvPr id="9" name="Rounded Rectangle 8"/>
+          <p:cNvSpPr/>
+          <p:nvPr/>
+        </p:nvSpPr>
+        <p:spPr>
+          <a:xfrm>
+            <a:off x="4389120" y="2651760"/>
+            <a:ext cx="3383280" cy="73152"/>
+          </a:xfrm>
+          <a:prstGeom prst="roundRect">
+            <a:avLst/>
+          </a:prstGeom>
+          <a:solidFill>
+            <a:srgbClr val="10B981"/>
+          </a:solidFill>
+          <a:ln>
+            <a:noFill/>
+          </a:ln>
+        </p:spPr>
+        <p:style>
+          <a:lnRef idx="1">
+            <a:schemeClr val="accent1"/>
+          </a:lnRef>
+          <a:fillRef idx="3">
+            <a:schemeClr val="accent1"/>
+          </a:fillRef>
+          <a:effectRef idx="2">
+            <a:schemeClr val="accent1"/>
+          </a:effectRef>
+          <a:fontRef idx="minor">
+            <a:schemeClr val="lt1"/>
+          </a:fontRef>
+        </p:style>
+        <p:txBody>
+          <a:bodyPr rtlCol="0" anchor="ctr"/>
+          <a:lstStyle/>
+          <a:p>
+            <a:pPr algn="ctr"/>
+          </a:p>
+        </p:txBody>
+      </p:sp>
+      <p:sp>
+        <p:nvSpPr>
+          <p:cNvPr id="10" name="TextBox 9"/>
           <p:cNvSpPr txBox="1"/>
           <p:nvPr/>
         </p:nvSpPr>
         <p:spPr>
           <a:xfrm>
-            <a:off x="8229600" y="2834640"/>
-            <a:ext cx="3017520" cy="3200400"/>
+            <a:off x="4572000" y="2816352"/>
+            <a:ext cx="3017520" cy="3337560"/>
           </a:xfrm>
           <a:prstGeom prst="rect">
             <a:avLst/>
@@ -7583,35 +8254,20 @@
           <a:noFill/>
         </p:spPr>
         <p:txBody>
-          <a:bodyPr wrap="square" tIns="0" bIns="0" lIns="0" rIns="0">
+          <a:bodyPr wrap="square" lIns="0" tIns="0" rIns="0" bIns="0">
             <a:spAutoFit/>
           </a:bodyPr>
           <a:lstStyle/>
           <a:p>
             <a:pPr>
-              <a:defRPr sz="1400" b="1">
-                <a:solidFill>
-                  <a:srgbClr val="F97316"/>
-                </a:solidFill>
-              </a:defRPr>
-            </a:pPr>
-            <a:r>
-              <a:t>Thuật Toán AI Rescue Route</a:t>
-            </a:r>
-          </a:p>
-          <a:p>
-            <a:pPr>
-              <a:spcAft>
-                <a:spcPts val="600"/>
-              </a:spcAft>
-              <a:defRPr sz="1000" i="1">
-                <a:solidFill>
-                  <a:srgbClr val="94A3B8"/>
-                </a:solidFill>
-              </a:defRPr>
-            </a:pPr>
-            <a:r>
-              <a:t>A* Obstacle Avoidance Routing</a:t>
+              <a:defRPr sz="1300" b="1">
+                <a:solidFill>
+                  <a:srgbClr val="10B981"/>
+                </a:solidFill>
+              </a:defRPr>
+            </a:pPr>
+            <a:r>
+              <a:t>Đóng Gói ONNX Runtime</a:t>
             </a:r>
           </a:p>
           <a:p>
@@ -7619,14 +8275,197 @@
               <a:spcAft>
                 <a:spcPts val="400"/>
               </a:spcAft>
-              <a:defRPr sz="1050">
-                <a:solidFill>
-                  <a:srgbClr val="FFFFFF"/>
-                </a:solidFill>
-              </a:defRPr>
-            </a:pPr>
-            <a:r>
-              <a:t>•  Thuật toán tìm đường tối ưu (A* / Dijkstra) trên đồ thị OpenStreetMap qua osmnx.</a:t>
+              <a:defRPr sz="950">
+                <a:solidFill>
+                  <a:srgbClr val="9CB2C9"/>
+                </a:solidFill>
+              </a:defRPr>
+            </a:pPr>
+            <a:r>
+              <a:t>High Performance Inference</a:t>
+            </a:r>
+          </a:p>
+          <a:p>
+            <a:pPr>
+              <a:spcBef>
+                <a:spcPts val="300"/>
+              </a:spcBef>
+              <a:defRPr sz="1000">
+                <a:solidFill>
+                  <a:srgbClr val="FFFFFF"/>
+                </a:solidFill>
+              </a:defRPr>
+            </a:pPr>
+            <a:r>
+              <a:t>• Xuất mô hình PyTorch sang định dạng ONNX Runtime tối ưu.</a:t>
+            </a:r>
+          </a:p>
+          <a:p>
+            <a:pPr>
+              <a:spcBef>
+                <a:spcPts val="300"/>
+              </a:spcBef>
+              <a:defRPr sz="1000">
+                <a:solidFill>
+                  <a:srgbClr val="FFFFFF"/>
+                </a:solidFill>
+              </a:defRPr>
+            </a:pPr>
+            <a:r>
+              <a:t>• Tốc độ suy luận CPU Intel chỉ 182ms, GPU RTX 3060 đạt 26ms/patch.</a:t>
+            </a:r>
+          </a:p>
+          <a:p>
+            <a:pPr>
+              <a:spcBef>
+                <a:spcPts val="300"/>
+              </a:spcBef>
+              <a:defRPr sz="1000">
+                <a:solidFill>
+                  <a:srgbClr val="FFFFFF"/>
+                </a:solidFill>
+              </a:defRPr>
+            </a:pPr>
+            <a:r>
+              <a:t>• Triển khai qua FastAPI service độc lập tại port 8001.</a:t>
+            </a:r>
+          </a:p>
+          <a:p>
+            <a:pPr>
+              <a:spcBef>
+                <a:spcPts val="300"/>
+              </a:spcBef>
+              <a:defRPr sz="1000">
+                <a:solidFill>
+                  <a:srgbClr val="FFFFFF"/>
+                </a:solidFill>
+              </a:defRPr>
+            </a:pPr>
+            <a:r>
+              <a:t>• Hỗ trợ chế độ chạy nền tự động xử lý hàng loạt khi có ảnh vệ tinh mới.</a:t>
+            </a:r>
+          </a:p>
+        </p:txBody>
+      </p:sp>
+      <p:sp>
+        <p:nvSpPr>
+          <p:cNvPr id="11" name="Rounded Rectangle 10"/>
+          <p:cNvSpPr/>
+          <p:nvPr/>
+        </p:nvSpPr>
+        <p:spPr>
+          <a:xfrm>
+            <a:off x="8046720" y="2651760"/>
+            <a:ext cx="3383280" cy="3566160"/>
+          </a:xfrm>
+          <a:prstGeom prst="roundRect">
+            <a:avLst/>
+          </a:prstGeom>
+          <a:solidFill>
+            <a:srgbClr val="131E31"/>
+          </a:solidFill>
+          <a:ln w="12700">
+            <a:solidFill>
+              <a:srgbClr val="1F3A52"/>
+            </a:solidFill>
+          </a:ln>
+        </p:spPr>
+        <p:style>
+          <a:lnRef idx="1">
+            <a:schemeClr val="accent1"/>
+          </a:lnRef>
+          <a:fillRef idx="3">
+            <a:schemeClr val="accent1"/>
+          </a:fillRef>
+          <a:effectRef idx="2">
+            <a:schemeClr val="accent1"/>
+          </a:effectRef>
+          <a:fontRef idx="minor">
+            <a:schemeClr val="lt1"/>
+          </a:fontRef>
+        </p:style>
+        <p:txBody>
+          <a:bodyPr rtlCol="0" anchor="ctr"/>
+          <a:lstStyle/>
+          <a:p>
+            <a:pPr algn="ctr"/>
+          </a:p>
+        </p:txBody>
+      </p:sp>
+      <p:sp>
+        <p:nvSpPr>
+          <p:cNvPr id="12" name="Rounded Rectangle 11"/>
+          <p:cNvSpPr/>
+          <p:nvPr/>
+        </p:nvSpPr>
+        <p:spPr>
+          <a:xfrm>
+            <a:off x="8046720" y="2651760"/>
+            <a:ext cx="3383280" cy="73152"/>
+          </a:xfrm>
+          <a:prstGeom prst="roundRect">
+            <a:avLst/>
+          </a:prstGeom>
+          <a:solidFill>
+            <a:srgbClr val="FF8C00"/>
+          </a:solidFill>
+          <a:ln>
+            <a:noFill/>
+          </a:ln>
+        </p:spPr>
+        <p:style>
+          <a:lnRef idx="1">
+            <a:schemeClr val="accent1"/>
+          </a:lnRef>
+          <a:fillRef idx="3">
+            <a:schemeClr val="accent1"/>
+          </a:fillRef>
+          <a:effectRef idx="2">
+            <a:schemeClr val="accent1"/>
+          </a:effectRef>
+          <a:fontRef idx="minor">
+            <a:schemeClr val="lt1"/>
+          </a:fontRef>
+        </p:style>
+        <p:txBody>
+          <a:bodyPr rtlCol="0" anchor="ctr"/>
+          <a:lstStyle/>
+          <a:p>
+            <a:pPr algn="ctr"/>
+          </a:p>
+        </p:txBody>
+      </p:sp>
+      <p:sp>
+        <p:nvSpPr>
+          <p:cNvPr id="13" name="TextBox 12"/>
+          <p:cNvSpPr txBox="1"/>
+          <p:nvPr/>
+        </p:nvSpPr>
+        <p:spPr>
+          <a:xfrm>
+            <a:off x="8229600" y="2816352"/>
+            <a:ext cx="3017520" cy="3337560"/>
+          </a:xfrm>
+          <a:prstGeom prst="rect">
+            <a:avLst/>
+          </a:prstGeom>
+          <a:noFill/>
+        </p:spPr>
+        <p:txBody>
+          <a:bodyPr wrap="square" lIns="0" tIns="0" rIns="0" bIns="0">
+            <a:spAutoFit/>
+          </a:bodyPr>
+          <a:lstStyle/>
+          <a:p>
+            <a:pPr>
+              <a:defRPr sz="1300" b="1">
+                <a:solidFill>
+                  <a:srgbClr val="FF8C00"/>
+                </a:solidFill>
+              </a:defRPr>
+            </a:pPr>
+            <a:r>
+              <a:t>Xếp Hạng Mức Nguy Cơ Sạt Lở</a:t>
             </a:r>
           </a:p>
           <a:p>
@@ -7634,44 +8473,74 @@
               <a:spcAft>
                 <a:spcPts val="400"/>
               </a:spcAft>
-              <a:defRPr sz="1050">
-                <a:solidFill>
-                  <a:srgbClr val="FFFFFF"/>
-                </a:solidFill>
-              </a:defRPr>
-            </a:pPr>
-            <a:r>
-              <a:t>•  Tự động áp trọng số phạt cực lớn cho các cung đường cắt qua đa giác Danger Zone.</a:t>
-            </a:r>
-          </a:p>
-          <a:p>
-            <a:pPr>
-              <a:spcAft>
-                <a:spcPts val="400"/>
-              </a:spcAft>
-              <a:defRPr sz="1050">
-                <a:solidFill>
-                  <a:srgbClr val="FFFFFF"/>
-                </a:solidFill>
-              </a:defRPr>
-            </a:pPr>
-            <a:r>
-              <a:t>•  Đề xuất tuyến đường an toàn nhất cho xe cứu hộ tiếp cận bản làng bị cô lập.</a:t>
-            </a:r>
-          </a:p>
-          <a:p>
-            <a:pPr>
-              <a:spcAft>
-                <a:spcPts val="400"/>
-              </a:spcAft>
-              <a:defRPr sz="1050">
-                <a:solidFill>
-                  <a:srgbClr val="FFFFFF"/>
-                </a:solidFill>
-              </a:defRPr>
-            </a:pPr>
-            <a:r>
-              <a:t>•  Xuất kết quả GeoJSON LineString hiển thị trực quan lên bản đồ 3D.</a:t>
+              <a:defRPr sz="950">
+                <a:solidFill>
+                  <a:srgbClr val="9CB2C9"/>
+                </a:solidFill>
+              </a:defRPr>
+            </a:pPr>
+            <a:r>
+              <a:t>Automated Risk Scoring (FR2.3)</a:t>
+            </a:r>
+          </a:p>
+          <a:p>
+            <a:pPr>
+              <a:spcBef>
+                <a:spcPts val="300"/>
+              </a:spcBef>
+              <a:defRPr sz="1000">
+                <a:solidFill>
+                  <a:srgbClr val="FFFFFF"/>
+                </a:solidFill>
+              </a:defRPr>
+            </a:pPr>
+            <a:r>
+              <a:t>• Tự động tính toán điểm nguy cơ dựa trên: độ dốc trung bình, diện tích khối trượt và độ tin cậy AI.</a:t>
+            </a:r>
+          </a:p>
+          <a:p>
+            <a:pPr>
+              <a:spcBef>
+                <a:spcPts val="300"/>
+              </a:spcBef>
+              <a:defRPr sz="1000">
+                <a:solidFill>
+                  <a:srgbClr val="FFFFFF"/>
+                </a:solidFill>
+              </a:defRPr>
+            </a:pPr>
+            <a:r>
+              <a:t>• Truy vấn không gian PostGIS ST_Distance tính khoảng cách tới khu dân cư gần nhất.</a:t>
+            </a:r>
+          </a:p>
+          <a:p>
+            <a:pPr>
+              <a:spcBef>
+                <a:spcPts val="300"/>
+              </a:spcBef>
+              <a:defRPr sz="1000">
+                <a:solidFill>
+                  <a:srgbClr val="FFFFFF"/>
+                </a:solidFill>
+              </a:defRPr>
+            </a:pPr>
+            <a:r>
+              <a:t>• Tự động gán nhãn risk_level: low, medium, high, extreme.</a:t>
+            </a:r>
+          </a:p>
+          <a:p>
+            <a:pPr>
+              <a:spcBef>
+                <a:spcPts val="300"/>
+              </a:spcBef>
+              <a:defRPr sz="1000">
+                <a:solidFill>
+                  <a:srgbClr val="FFFFFF"/>
+                </a:solidFill>
+              </a:defRPr>
+            </a:pPr>
+            <a:r>
+              <a:t>• Ưu tiên đẩy các điểm sạt lở có nguy cơ đe dọa khu dân cư lên đầu hàng đợi thẩm định.</a:t>
             </a:r>
           </a:p>
         </p:txBody>
@@ -7709,7 +8578,7 @@
             <a:avLst/>
           </a:prstGeom>
           <a:solidFill>
-            <a:srgbClr val="0B0F19"/>
+            <a:srgbClr val="0B1320"/>
           </a:solidFill>
           <a:ln>
             <a:noFill/>
@@ -7745,8 +8614,8 @@
         </p:nvSpPr>
         <p:spPr>
           <a:xfrm>
-            <a:off x="731520" y="365760"/>
-            <a:ext cx="10515600" cy="365760"/>
+            <a:off x="731520" y="457200"/>
+            <a:ext cx="10698480" cy="1005840"/>
           </a:xfrm>
           <a:prstGeom prst="rect">
             <a:avLst/>
@@ -7754,15 +8623,15 @@
           <a:noFill/>
         </p:spPr>
         <p:txBody>
-          <a:bodyPr wrap="square" tIns="0" bIns="0" lIns="0" rIns="0">
+          <a:bodyPr wrap="square" lIns="0" tIns="0" rIns="0" bIns="0">
             <a:spAutoFit/>
           </a:bodyPr>
           <a:lstStyle/>
           <a:p>
             <a:pPr>
-              <a:defRPr sz="1000" b="1">
-                <a:solidFill>
-                  <a:srgbClr val="0EA5E9"/>
+              <a:defRPr sz="1050" b="1">
+                <a:solidFill>
+                  <a:srgbClr val="FF8C00"/>
                 </a:solidFill>
               </a:defRPr>
             </a:pPr>
@@ -7770,31 +8639,11 @@
               <a:t>THÀNH VIÊN 3 • BACKEND ENGINEER &amp; ARCHITECT</a:t>
             </a:r>
           </a:p>
-        </p:txBody>
-      </p:sp>
-      <p:sp>
-        <p:nvSpPr>
-          <p:cNvPr id="4" name="TextBox 3"/>
-          <p:cNvSpPr txBox="1"/>
-          <p:nvPr/>
-        </p:nvSpPr>
-        <p:spPr>
-          <a:xfrm>
-            <a:off x="731520" y="640080"/>
-            <a:ext cx="10515600" cy="640080"/>
-          </a:xfrm>
-          <a:prstGeom prst="rect">
-            <a:avLst/>
-          </a:prstGeom>
-          <a:noFill/>
-        </p:spPr>
-        <p:txBody>
-          <a:bodyPr wrap="square" tIns="0" bIns="0" lIns="0" rIns="0">
-            <a:spAutoFit/>
-          </a:bodyPr>
-          <a:lstStyle/>
-          <a:p>
-            <a:pPr>
+          <a:p>
+            <a:pPr>
+              <a:spcBef>
+                <a:spcPts val="300"/>
+              </a:spcBef>
               <a:defRPr sz="2200" b="1">
                 <a:solidFill>
                   <a:srgbClr val="FFFFFF"/>
@@ -7802,14 +8651,14 @@
               </a:defRPr>
             </a:pPr>
             <a:r>
-              <a:t>PHÂN HỆ BACKEND, SECURITY &amp; EVENT BUS (THUẬN PHỤ TRÁCH)</a:t>
-            </a:r>
-          </a:p>
-        </p:txBody>
-      </p:sp>
-      <p:sp>
-        <p:nvSpPr>
-          <p:cNvPr id="5" name="Rounded Rectangle 4"/>
+              <a:t>PHÂN HỆ BACKEND, SECURITY &amp; PHÁT CẢNH BÁO (THUẬN PHỤ TRÁCH)</a:t>
+            </a:r>
+          </a:p>
+        </p:txBody>
+      </p:sp>
+      <p:sp>
+        <p:nvSpPr>
+          <p:cNvPr id="4" name="Rounded Rectangle 3"/>
           <p:cNvSpPr/>
           <p:nvPr/>
         </p:nvSpPr>
@@ -7822,11 +8671,11 @@
             <a:avLst/>
           </a:prstGeom>
           <a:solidFill>
-            <a:srgbClr val="151E32"/>
+            <a:srgbClr val="131E31"/>
           </a:solidFill>
-          <a:ln w="15240">
+          <a:ln w="12700">
             <a:solidFill>
-              <a:srgbClr val="2A3B5C"/>
+              <a:srgbClr val="1F3A52"/>
             </a:solidFill>
           </a:ln>
         </p:spPr>
@@ -7854,135 +8703,23 @@
       </p:sp>
       <p:sp>
         <p:nvSpPr>
-          <p:cNvPr id="6" name="TextBox 5"/>
-          <p:cNvSpPr txBox="1"/>
-          <p:nvPr/>
-        </p:nvSpPr>
-        <p:spPr>
-          <a:xfrm>
-            <a:off x="914400" y="1828800"/>
-            <a:ext cx="3017520" cy="4023360"/>
-          </a:xfrm>
-          <a:prstGeom prst="rect">
-            <a:avLst/>
-          </a:prstGeom>
-          <a:noFill/>
-        </p:spPr>
-        <p:txBody>
-          <a:bodyPr wrap="square" tIns="0" bIns="0" lIns="0" rIns="0">
-            <a:spAutoFit/>
-          </a:bodyPr>
-          <a:lstStyle/>
-          <a:p>
-            <a:pPr>
-              <a:defRPr sz="1400" b="1">
-                <a:solidFill>
-                  <a:srgbClr val="0EA5E9"/>
-                </a:solidFill>
-              </a:defRPr>
-            </a:pPr>
-            <a:r>
-              <a:t>Core API &amp; Bảo Mật RBAC JWT</a:t>
-            </a:r>
-          </a:p>
-          <a:p>
-            <a:pPr>
-              <a:spcAft>
-                <a:spcPts val="600"/>
-              </a:spcAft>
-              <a:defRPr sz="1000" i="1">
-                <a:solidFill>
-                  <a:srgbClr val="94A3B8"/>
-                </a:solidFill>
-              </a:defRPr>
-            </a:pPr>
-            <a:r>
-              <a:t>Spring Boot 3 &amp; Security 6</a:t>
-            </a:r>
-          </a:p>
-          <a:p>
-            <a:pPr>
-              <a:spcAft>
-                <a:spcPts val="400"/>
-              </a:spcAft>
-              <a:defRPr sz="1050">
-                <a:solidFill>
-                  <a:srgbClr val="FFFFFF"/>
-                </a:solidFill>
-              </a:defRPr>
-            </a:pPr>
-            <a:r>
-              <a:t>•  Phát triển trên nền tảng Java 17 + Spring Boot 3 công nghiệp.</a:t>
-            </a:r>
-          </a:p>
-          <a:p>
-            <a:pPr>
-              <a:spcAft>
-                <a:spcPts val="400"/>
-              </a:spcAft>
-              <a:defRPr sz="1050">
-                <a:solidFill>
-                  <a:srgbClr val="FFFFFF"/>
-                </a:solidFill>
-              </a:defRPr>
-            </a:pPr>
-            <a:r>
-              <a:t>•  Bảo mật Spring Security 6 với JWT Token phi trạng thái (Stateless).</a:t>
-            </a:r>
-          </a:p>
-          <a:p>
-            <a:pPr>
-              <a:spcAft>
-                <a:spcPts val="400"/>
-              </a:spcAft>
-              <a:defRPr sz="1050">
-                <a:solidFill>
-                  <a:srgbClr val="FFFFFF"/>
-                </a:solidFill>
-              </a:defRPr>
-            </a:pPr>
-            <a:r>
-              <a:t>•  Phân quyền RBAC 4 nhóm đối tượng: citizen, rescue_team, officer, admin.</a:t>
-            </a:r>
-          </a:p>
-          <a:p>
-            <a:pPr>
-              <a:spcAft>
-                <a:spcPts val="400"/>
-              </a:spcAft>
-              <a:defRPr sz="1050">
-                <a:solidFill>
-                  <a:srgbClr val="FFFFFF"/>
-                </a:solidFill>
-              </a:defRPr>
-            </a:pPr>
-            <a:r>
-              <a:t>•  Băm mật khẩu bằng BCrypt; endpoint /api/v1/auth/** phục vụ đăng ký, đăng nhập an toàn.</a:t>
-            </a:r>
-          </a:p>
-        </p:txBody>
-      </p:sp>
-      <p:sp>
-        <p:nvSpPr>
-          <p:cNvPr id="7" name="Rounded Rectangle 6"/>
+          <p:cNvPr id="5" name="Rounded Rectangle 4"/>
           <p:cNvSpPr/>
           <p:nvPr/>
         </p:nvSpPr>
         <p:spPr>
           <a:xfrm>
-            <a:off x="4389120" y="1645920"/>
-            <a:ext cx="3383280" cy="4389120"/>
+            <a:off x="731520" y="1645920"/>
+            <a:ext cx="3383280" cy="73152"/>
           </a:xfrm>
           <a:prstGeom prst="roundRect">
             <a:avLst/>
           </a:prstGeom>
           <a:solidFill>
-            <a:srgbClr val="151E32"/>
+            <a:srgbClr val="00D4FF"/>
           </a:solidFill>
-          <a:ln w="15240">
-            <a:solidFill>
-              <a:srgbClr val="2A3B5C"/>
-            </a:solidFill>
+          <a:ln>
+            <a:noFill/>
           </a:ln>
         </p:spPr>
         <p:style>
@@ -8009,14 +8746,14 @@
       </p:sp>
       <p:sp>
         <p:nvSpPr>
-          <p:cNvPr id="8" name="TextBox 7"/>
+          <p:cNvPr id="6" name="TextBox 5"/>
           <p:cNvSpPr txBox="1"/>
           <p:nvPr/>
         </p:nvSpPr>
         <p:spPr>
           <a:xfrm>
-            <a:off x="4572000" y="1828800"/>
-            <a:ext cx="3017520" cy="4023360"/>
+            <a:off x="914400" y="1810512"/>
+            <a:ext cx="3017520" cy="4160520"/>
           </a:xfrm>
           <a:prstGeom prst="rect">
             <a:avLst/>
@@ -8024,35 +8761,20 @@
           <a:noFill/>
         </p:spPr>
         <p:txBody>
-          <a:bodyPr wrap="square" tIns="0" bIns="0" lIns="0" rIns="0">
+          <a:bodyPr wrap="square" lIns="0" tIns="0" rIns="0" bIns="0">
             <a:spAutoFit/>
           </a:bodyPr>
           <a:lstStyle/>
           <a:p>
             <a:pPr>
-              <a:defRPr sz="1400" b="1">
-                <a:solidFill>
-                  <a:srgbClr val="EF4444"/>
-                </a:solidFill>
-              </a:defRPr>
-            </a:pPr>
-            <a:r>
-              <a:t>Resilience4j Circuit Breaker</a:t>
-            </a:r>
-          </a:p>
-          <a:p>
-            <a:pPr>
-              <a:spcAft>
-                <a:spcPts val="600"/>
-              </a:spcAft>
-              <a:defRPr sz="1000" i="1">
-                <a:solidFill>
-                  <a:srgbClr val="94A3B8"/>
-                </a:solidFill>
-              </a:defRPr>
-            </a:pPr>
-            <a:r>
-              <a:t>Chống sập lan truyền</a:t>
+              <a:defRPr sz="1300" b="1">
+                <a:solidFill>
+                  <a:srgbClr val="00D4FF"/>
+                </a:solidFill>
+              </a:defRPr>
+            </a:pPr>
+            <a:r>
+              <a:t>Core API &amp; Bảo Mật RBAC JWT</a:t>
             </a:r>
           </a:p>
           <a:p>
@@ -8060,83 +8782,98 @@
               <a:spcAft>
                 <a:spcPts val="400"/>
               </a:spcAft>
-              <a:defRPr sz="1050">
-                <a:solidFill>
-                  <a:srgbClr val="FFFFFF"/>
-                </a:solidFill>
-              </a:defRPr>
-            </a:pPr>
-            <a:r>
-              <a:t>•  Bọc các kết nối gọi liên service sang AI và GIS bằng Circuit Breaker.</a:t>
-            </a:r>
-          </a:p>
-          <a:p>
-            <a:pPr>
-              <a:spcAft>
-                <a:spcPts val="400"/>
-              </a:spcAft>
-              <a:defRPr sz="1050">
-                <a:solidFill>
-                  <a:srgbClr val="FFFFFF"/>
-                </a:solidFill>
-              </a:defRPr>
-            </a:pPr>
-            <a:r>
-              <a:t>•  Cấu hình tự động chuyển sang OPEN khi tỷ lệ lỗi vượt quá 50% trong 10 calls.</a:t>
-            </a:r>
-          </a:p>
-          <a:p>
-            <a:pPr>
-              <a:spcAft>
-                <a:spcPts val="400"/>
-              </a:spcAft>
-              <a:defRPr sz="1050">
-                <a:solidFill>
-                  <a:srgbClr val="FFFFFF"/>
-                </a:solidFill>
-              </a:defRPr>
-            </a:pPr>
-            <a:r>
-              <a:t>•  Kích hoạt phương thức Fallback lưu request vào hàng đợi xử lý ngầm.</a:t>
-            </a:r>
-          </a:p>
-          <a:p>
-            <a:pPr>
-              <a:spcAft>
-                <a:spcPts val="400"/>
-              </a:spcAft>
-              <a:defRPr sz="1050">
-                <a:solidFill>
-                  <a:srgbClr val="FFFFFF"/>
-                </a:solidFill>
-              </a:defRPr>
-            </a:pPr>
-            <a:r>
-              <a:t>•  Core API được bảo vệ tuyệt đối, không bao giờ bị sập lan truyền (Cascading Failures).</a:t>
-            </a:r>
-          </a:p>
-        </p:txBody>
-      </p:sp>
-      <p:sp>
-        <p:nvSpPr>
-          <p:cNvPr id="9" name="Rounded Rectangle 8"/>
+              <a:defRPr sz="950">
+                <a:solidFill>
+                  <a:srgbClr val="9CB2C9"/>
+                </a:solidFill>
+              </a:defRPr>
+            </a:pPr>
+            <a:r>
+              <a:t>Spring Boot 3 &amp; Security 6</a:t>
+            </a:r>
+          </a:p>
+          <a:p>
+            <a:pPr>
+              <a:spcBef>
+                <a:spcPts val="300"/>
+              </a:spcBef>
+              <a:defRPr sz="1000">
+                <a:solidFill>
+                  <a:srgbClr val="FFFFFF"/>
+                </a:solidFill>
+              </a:defRPr>
+            </a:pPr>
+            <a:r>
+              <a:t>• Phát triển trên nền tảng Java 17 + Spring Boot 3 công nghiệp.</a:t>
+            </a:r>
+          </a:p>
+          <a:p>
+            <a:pPr>
+              <a:spcBef>
+                <a:spcPts val="300"/>
+              </a:spcBef>
+              <a:defRPr sz="1000">
+                <a:solidFill>
+                  <a:srgbClr val="FFFFFF"/>
+                </a:solidFill>
+              </a:defRPr>
+            </a:pPr>
+            <a:r>
+              <a:t>• Bảo mật Spring Security 6 với JWT Token phi trạng thái (Stateless).</a:t>
+            </a:r>
+          </a:p>
+          <a:p>
+            <a:pPr>
+              <a:spcBef>
+                <a:spcPts val="300"/>
+              </a:spcBef>
+              <a:defRPr sz="1000">
+                <a:solidFill>
+                  <a:srgbClr val="FFFFFF"/>
+                </a:solidFill>
+              </a:defRPr>
+            </a:pPr>
+            <a:r>
+              <a:t>• Phân quyền RBAC 3 vai trò: citizen, officer, admin.</a:t>
+            </a:r>
+          </a:p>
+          <a:p>
+            <a:pPr>
+              <a:spcBef>
+                <a:spcPts val="300"/>
+              </a:spcBef>
+              <a:defRPr sz="1000">
+                <a:solidFill>
+                  <a:srgbClr val="FFFFFF"/>
+                </a:solidFill>
+              </a:defRPr>
+            </a:pPr>
+            <a:r>
+              <a:t>• Băm mật khẩu bằng BCrypt; endpoint /api/v1/auth/** phục vụ đăng ký, đăng nhập an toàn.</a:t>
+            </a:r>
+          </a:p>
+        </p:txBody>
+      </p:sp>
+      <p:sp>
+        <p:nvSpPr>
+          <p:cNvPr id="7" name="Rounded Rectangle 6"/>
           <p:cNvSpPr/>
           <p:nvPr/>
         </p:nvSpPr>
         <p:spPr>
           <a:xfrm>
-            <a:off x="8046720" y="1645920"/>
+            <a:off x="4389120" y="1645920"/>
             <a:ext cx="3383280" cy="4389120"/>
           </a:xfrm>
           <a:prstGeom prst="roundRect">
             <a:avLst/>
           </a:prstGeom>
           <a:solidFill>
-            <a:srgbClr val="151E32"/>
+            <a:srgbClr val="131E31"/>
           </a:solidFill>
-          <a:ln w="15240">
+          <a:ln w="12700">
             <a:solidFill>
-              <a:srgbClr val="2A3B5C"/>
+              <a:srgbClr val="1F3A52"/>
             </a:solidFill>
           </a:ln>
         </p:spPr>
@@ -8164,14 +8901,57 @@
       </p:sp>
       <p:sp>
         <p:nvSpPr>
-          <p:cNvPr id="10" name="TextBox 9"/>
+          <p:cNvPr id="8" name="Rounded Rectangle 7"/>
+          <p:cNvSpPr/>
+          <p:nvPr/>
+        </p:nvSpPr>
+        <p:spPr>
+          <a:xfrm>
+            <a:off x="4389120" y="1645920"/>
+            <a:ext cx="3383280" cy="73152"/>
+          </a:xfrm>
+          <a:prstGeom prst="roundRect">
+            <a:avLst/>
+          </a:prstGeom>
+          <a:solidFill>
+            <a:srgbClr val="EF4444"/>
+          </a:solidFill>
+          <a:ln>
+            <a:noFill/>
+          </a:ln>
+        </p:spPr>
+        <p:style>
+          <a:lnRef idx="1">
+            <a:schemeClr val="accent1"/>
+          </a:lnRef>
+          <a:fillRef idx="3">
+            <a:schemeClr val="accent1"/>
+          </a:fillRef>
+          <a:effectRef idx="2">
+            <a:schemeClr val="accent1"/>
+          </a:effectRef>
+          <a:fontRef idx="minor">
+            <a:schemeClr val="lt1"/>
+          </a:fontRef>
+        </p:style>
+        <p:txBody>
+          <a:bodyPr rtlCol="0" anchor="ctr"/>
+          <a:lstStyle/>
+          <a:p>
+            <a:pPr algn="ctr"/>
+          </a:p>
+        </p:txBody>
+      </p:sp>
+      <p:sp>
+        <p:nvSpPr>
+          <p:cNvPr id="9" name="TextBox 8"/>
           <p:cNvSpPr txBox="1"/>
           <p:nvPr/>
         </p:nvSpPr>
         <p:spPr>
           <a:xfrm>
-            <a:off x="8229600" y="1828800"/>
-            <a:ext cx="3017520" cy="4023360"/>
+            <a:off x="4572000" y="1810512"/>
+            <a:ext cx="3017520" cy="4160520"/>
           </a:xfrm>
           <a:prstGeom prst="rect">
             <a:avLst/>
@@ -8179,35 +8959,20 @@
           <a:noFill/>
         </p:spPr>
         <p:txBody>
-          <a:bodyPr wrap="square" tIns="0" bIns="0" lIns="0" rIns="0">
+          <a:bodyPr wrap="square" lIns="0" tIns="0" rIns="0" bIns="0">
             <a:spAutoFit/>
           </a:bodyPr>
           <a:lstStyle/>
           <a:p>
             <a:pPr>
-              <a:defRPr sz="1400" b="1">
-                <a:solidFill>
-                  <a:srgbClr val="10B981"/>
-                </a:solidFill>
-              </a:defRPr>
-            </a:pPr>
-            <a:r>
-              <a:t>Event Bus &amp; Audit Trail</a:t>
-            </a:r>
-          </a:p>
-          <a:p>
-            <a:pPr>
-              <a:spcAft>
-                <a:spcPts val="600"/>
-              </a:spcAft>
-              <a:defRPr sz="1000" i="1">
-                <a:solidFill>
-                  <a:srgbClr val="94A3B8"/>
-                </a:solidFill>
-              </a:defRPr>
-            </a:pPr>
-            <a:r>
-              <a:t>Redis Pub/Sub &amp; FCM Push</a:t>
+              <a:defRPr sz="1300" b="1">
+                <a:solidFill>
+                  <a:srgbClr val="EF4444"/>
+                </a:solidFill>
+              </a:defRPr>
+            </a:pPr>
+            <a:r>
+              <a:t>Resilience4j Circuit Breaker</a:t>
             </a:r>
           </a:p>
           <a:p>
@@ -8215,14 +8980,197 @@
               <a:spcAft>
                 <a:spcPts val="400"/>
               </a:spcAft>
-              <a:defRPr sz="1050">
-                <a:solidFill>
-                  <a:srgbClr val="FFFFFF"/>
-                </a:solidFill>
-              </a:defRPr>
-            </a:pPr>
-            <a:r>
-              <a:t>•  Message Broker Redis 7 Pub/Sub đồng bộ bất đồng bộ qua channel terrawatch:events.</a:t>
+              <a:defRPr sz="950">
+                <a:solidFill>
+                  <a:srgbClr val="9CB2C9"/>
+                </a:solidFill>
+              </a:defRPr>
+            </a:pPr>
+            <a:r>
+              <a:t>Chống sập lan truyền</a:t>
+            </a:r>
+          </a:p>
+          <a:p>
+            <a:pPr>
+              <a:spcBef>
+                <a:spcPts val="300"/>
+              </a:spcBef>
+              <a:defRPr sz="1000">
+                <a:solidFill>
+                  <a:srgbClr val="FFFFFF"/>
+                </a:solidFill>
+              </a:defRPr>
+            </a:pPr>
+            <a:r>
+              <a:t>• Bọc các kết nối gọi liên service sang AI và GIS bằng Circuit Breaker.</a:t>
+            </a:r>
+          </a:p>
+          <a:p>
+            <a:pPr>
+              <a:spcBef>
+                <a:spcPts val="300"/>
+              </a:spcBef>
+              <a:defRPr sz="1000">
+                <a:solidFill>
+                  <a:srgbClr val="FFFFFF"/>
+                </a:solidFill>
+              </a:defRPr>
+            </a:pPr>
+            <a:r>
+              <a:t>• Cấu hình tự động chuyển sang OPEN khi tỷ lệ lỗi vượt quá 50% trong 10 calls.</a:t>
+            </a:r>
+          </a:p>
+          <a:p>
+            <a:pPr>
+              <a:spcBef>
+                <a:spcPts val="300"/>
+              </a:spcBef>
+              <a:defRPr sz="1000">
+                <a:solidFill>
+                  <a:srgbClr val="FFFFFF"/>
+                </a:solidFill>
+              </a:defRPr>
+            </a:pPr>
+            <a:r>
+              <a:t>• Kích hoạt phương thức Fallback lưu request vào hàng đợi xử lý ngầm.</a:t>
+            </a:r>
+          </a:p>
+          <a:p>
+            <a:pPr>
+              <a:spcBef>
+                <a:spcPts val="300"/>
+              </a:spcBef>
+              <a:defRPr sz="1000">
+                <a:solidFill>
+                  <a:srgbClr val="FFFFFF"/>
+                </a:solidFill>
+              </a:defRPr>
+            </a:pPr>
+            <a:r>
+              <a:t>• Core API được bảo vệ tuyệt đối, không bao giờ bị sập lan truyền (Cascading Failures).</a:t>
+            </a:r>
+          </a:p>
+        </p:txBody>
+      </p:sp>
+      <p:sp>
+        <p:nvSpPr>
+          <p:cNvPr id="10" name="Rounded Rectangle 9"/>
+          <p:cNvSpPr/>
+          <p:nvPr/>
+        </p:nvSpPr>
+        <p:spPr>
+          <a:xfrm>
+            <a:off x="8046720" y="1645920"/>
+            <a:ext cx="3383280" cy="4389120"/>
+          </a:xfrm>
+          <a:prstGeom prst="roundRect">
+            <a:avLst/>
+          </a:prstGeom>
+          <a:solidFill>
+            <a:srgbClr val="131E31"/>
+          </a:solidFill>
+          <a:ln w="12700">
+            <a:solidFill>
+              <a:srgbClr val="1F3A52"/>
+            </a:solidFill>
+          </a:ln>
+        </p:spPr>
+        <p:style>
+          <a:lnRef idx="1">
+            <a:schemeClr val="accent1"/>
+          </a:lnRef>
+          <a:fillRef idx="3">
+            <a:schemeClr val="accent1"/>
+          </a:fillRef>
+          <a:effectRef idx="2">
+            <a:schemeClr val="accent1"/>
+          </a:effectRef>
+          <a:fontRef idx="minor">
+            <a:schemeClr val="lt1"/>
+          </a:fontRef>
+        </p:style>
+        <p:txBody>
+          <a:bodyPr rtlCol="0" anchor="ctr"/>
+          <a:lstStyle/>
+          <a:p>
+            <a:pPr algn="ctr"/>
+          </a:p>
+        </p:txBody>
+      </p:sp>
+      <p:sp>
+        <p:nvSpPr>
+          <p:cNvPr id="11" name="Rounded Rectangle 10"/>
+          <p:cNvSpPr/>
+          <p:nvPr/>
+        </p:nvSpPr>
+        <p:spPr>
+          <a:xfrm>
+            <a:off x="8046720" y="1645920"/>
+            <a:ext cx="3383280" cy="73152"/>
+          </a:xfrm>
+          <a:prstGeom prst="roundRect">
+            <a:avLst/>
+          </a:prstGeom>
+          <a:solidFill>
+            <a:srgbClr val="10B981"/>
+          </a:solidFill>
+          <a:ln>
+            <a:noFill/>
+          </a:ln>
+        </p:spPr>
+        <p:style>
+          <a:lnRef idx="1">
+            <a:schemeClr val="accent1"/>
+          </a:lnRef>
+          <a:fillRef idx="3">
+            <a:schemeClr val="accent1"/>
+          </a:fillRef>
+          <a:effectRef idx="2">
+            <a:schemeClr val="accent1"/>
+          </a:effectRef>
+          <a:fontRef idx="minor">
+            <a:schemeClr val="lt1"/>
+          </a:fontRef>
+        </p:style>
+        <p:txBody>
+          <a:bodyPr rtlCol="0" anchor="ctr"/>
+          <a:lstStyle/>
+          <a:p>
+            <a:pPr algn="ctr"/>
+          </a:p>
+        </p:txBody>
+      </p:sp>
+      <p:sp>
+        <p:nvSpPr>
+          <p:cNvPr id="12" name="TextBox 11"/>
+          <p:cNvSpPr txBox="1"/>
+          <p:nvPr/>
+        </p:nvSpPr>
+        <p:spPr>
+          <a:xfrm>
+            <a:off x="8229600" y="1810512"/>
+            <a:ext cx="3017520" cy="4160520"/>
+          </a:xfrm>
+          <a:prstGeom prst="rect">
+            <a:avLst/>
+          </a:prstGeom>
+          <a:noFill/>
+        </p:spPr>
+        <p:txBody>
+          <a:bodyPr wrap="square" lIns="0" tIns="0" rIns="0" bIns="0">
+            <a:spAutoFit/>
+          </a:bodyPr>
+          <a:lstStyle/>
+          <a:p>
+            <a:pPr>
+              <a:defRPr sz="1300" b="1">
+                <a:solidFill>
+                  <a:srgbClr val="10B981"/>
+                </a:solidFill>
+              </a:defRPr>
+            </a:pPr>
+            <a:r>
+              <a:t>Phát Cảnh Báo Khẩn Cấp &amp; Audit</a:t>
             </a:r>
           </a:p>
           <a:p>
@@ -8230,44 +9178,74 @@
               <a:spcAft>
                 <a:spcPts val="400"/>
               </a:spcAft>
-              <a:defRPr sz="1050">
-                <a:solidFill>
-                  <a:srgbClr val="FFFFFF"/>
-                </a:solidFill>
-              </a:defRPr>
-            </a:pPr>
-            <a:r>
-              <a:t>•  Tích hợp Firebase Cloud Messaging (FCM) phát thông báo đẩy khẩn cấp.</a:t>
-            </a:r>
-          </a:p>
-          <a:p>
-            <a:pPr>
-              <a:spcAft>
-                <a:spcPts val="400"/>
-              </a:spcAft>
-              <a:defRPr sz="1050">
-                <a:solidFill>
-                  <a:srgbClr val="FFFFFF"/>
-                </a:solidFill>
-              </a:defRPr>
-            </a:pPr>
-            <a:r>
-              <a:t>•  Lưu vết kiểm toán bất biến (Audit Trail) trong bảng landslide_event_history.</a:t>
-            </a:r>
-          </a:p>
-          <a:p>
-            <a:pPr>
-              <a:spcAft>
-                <a:spcPts val="400"/>
-              </a:spcAft>
-              <a:defRPr sz="1050">
-                <a:solidFill>
-                  <a:srgbClr val="FFFFFF"/>
-                </a:solidFill>
-              </a:defRPr>
-            </a:pPr>
-            <a:r>
-              <a:t>•  Quản trị hạ tầng Docker Compose 7 container và Gateway Nginx.</a:t>
+              <a:defRPr sz="950">
+                <a:solidFill>
+                  <a:srgbClr val="9CB2C9"/>
+                </a:solidFill>
+              </a:defRPr>
+            </a:pPr>
+            <a:r>
+              <a:t>SMS &amp; FCM Alert Broadcast</a:t>
+            </a:r>
+          </a:p>
+          <a:p>
+            <a:pPr>
+              <a:spcBef>
+                <a:spcPts val="300"/>
+              </a:spcBef>
+              <a:defRPr sz="1000">
+                <a:solidFill>
+                  <a:srgbClr val="FFFFFF"/>
+                </a:solidFill>
+              </a:defRPr>
+            </a:pPr>
+            <a:r>
+              <a:t>• API phát cảnh báo khẩn cấp: Gửi đồng thời qua SMS Gateway và Firebase Cloud Messaging.</a:t>
+            </a:r>
+          </a:p>
+          <a:p>
+            <a:pPr>
+              <a:spcBef>
+                <a:spcPts val="300"/>
+              </a:spcBef>
+              <a:defRPr sz="1000">
+                <a:solidFill>
+                  <a:srgbClr val="FFFFFF"/>
+                </a:solidFill>
+              </a:defRPr>
+            </a:pPr>
+            <a:r>
+              <a:t>• Lọc người nhận theo vùng quan tâm đăng ký (alert_subscriptions) qua truy vấn PostGIS ST_DWithin.</a:t>
+            </a:r>
+          </a:p>
+          <a:p>
+            <a:pPr>
+              <a:spcBef>
+                <a:spcPts val="300"/>
+              </a:spcBef>
+              <a:defRPr sz="1000">
+                <a:solidFill>
+                  <a:srgbClr val="FFFFFF"/>
+                </a:solidFill>
+              </a:defRPr>
+            </a:pPr>
+            <a:r>
+              <a:t>• Lưu vết kiểm toán bất biến (Audit Trail) trong bảng landslide_event_history và alert_broadcasts.</a:t>
+            </a:r>
+          </a:p>
+          <a:p>
+            <a:pPr>
+              <a:spcBef>
+                <a:spcPts val="300"/>
+              </a:spcBef>
+              <a:defRPr sz="1000">
+                <a:solidFill>
+                  <a:srgbClr val="FFFFFF"/>
+                </a:solidFill>
+              </a:defRPr>
+            </a:pPr>
+            <a:r>
+              <a:t>• Message Broker Redis 7 Pub/Sub xử lý gửi tin nhắn bất đồng bộ theo lô.</a:t>
             </a:r>
           </a:p>
         </p:txBody>
@@ -8305,7 +9283,7 @@
             <a:avLst/>
           </a:prstGeom>
           <a:solidFill>
-            <a:srgbClr val="0B0F19"/>
+            <a:srgbClr val="0B1320"/>
           </a:solidFill>
           <a:ln>
             <a:noFill/>
@@ -8341,8 +9319,8 @@
         </p:nvSpPr>
         <p:spPr>
           <a:xfrm>
-            <a:off x="731520" y="365760"/>
-            <a:ext cx="10515600" cy="365760"/>
+            <a:off x="731520" y="457200"/>
+            <a:ext cx="10698480" cy="1005840"/>
           </a:xfrm>
           <a:prstGeom prst="rect">
             <a:avLst/>
@@ -8350,15 +9328,15 @@
           <a:noFill/>
         </p:spPr>
         <p:txBody>
-          <a:bodyPr wrap="square" tIns="0" bIns="0" lIns="0" rIns="0">
+          <a:bodyPr wrap="square" lIns="0" tIns="0" rIns="0" bIns="0">
             <a:spAutoFit/>
           </a:bodyPr>
           <a:lstStyle/>
           <a:p>
             <a:pPr>
-              <a:defRPr sz="1000" b="1">
-                <a:solidFill>
-                  <a:srgbClr val="0EA5E9"/>
+              <a:defRPr sz="1050" b="1">
+                <a:solidFill>
+                  <a:srgbClr val="FF8C00"/>
                 </a:solidFill>
               </a:defRPr>
             </a:pPr>
@@ -8366,31 +9344,11 @@
               <a:t>THÀNH VIÊN 4 • FRONTEND WEBGIS ENGINEER</a:t>
             </a:r>
           </a:p>
-        </p:txBody>
-      </p:sp>
-      <p:sp>
-        <p:nvSpPr>
-          <p:cNvPr id="4" name="TextBox 3"/>
-          <p:cNvSpPr txBox="1"/>
-          <p:nvPr/>
-        </p:nvSpPr>
-        <p:spPr>
-          <a:xfrm>
-            <a:off x="731520" y="640080"/>
-            <a:ext cx="10515600" cy="640080"/>
-          </a:xfrm>
-          <a:prstGeom prst="rect">
-            <a:avLst/>
-          </a:prstGeom>
-          <a:noFill/>
-        </p:spPr>
-        <p:txBody>
-          <a:bodyPr wrap="square" tIns="0" bIns="0" lIns="0" rIns="0">
-            <a:spAutoFit/>
-          </a:bodyPr>
-          <a:lstStyle/>
-          <a:p>
-            <a:pPr>
+          <a:p>
+            <a:pPr>
+              <a:spcBef>
+                <a:spcPts val="300"/>
+              </a:spcBef>
               <a:defRPr sz="2200" b="1">
                 <a:solidFill>
                   <a:srgbClr val="FFFFFF"/>
@@ -8398,14 +9356,14 @@
               </a:defRPr>
             </a:pPr>
             <a:r>
-              <a:t>PHÂN HỆ WEBGIS COMMAND CENTER &amp; MÔ HÌNH 3D (HUY PHỤ TRÁCH)</a:t>
-            </a:r>
-          </a:p>
-        </p:txBody>
-      </p:sp>
-      <p:sp>
-        <p:nvSpPr>
-          <p:cNvPr id="5" name="Rounded Rectangle 4"/>
+              <a:t>PHÂN HỆ WEBGIS COMMAND CENTER &amp; CẢNH BÁO (HUY PHỤ TRÁCH)</a:t>
+            </a:r>
+          </a:p>
+        </p:txBody>
+      </p:sp>
+      <p:sp>
+        <p:nvSpPr>
+          <p:cNvPr id="4" name="Rounded Rectangle 3"/>
           <p:cNvSpPr/>
           <p:nvPr/>
         </p:nvSpPr>
@@ -8418,11 +9376,11 @@
             <a:avLst/>
           </a:prstGeom>
           <a:solidFill>
-            <a:srgbClr val="151E32"/>
+            <a:srgbClr val="131E31"/>
           </a:solidFill>
-          <a:ln w="15240">
+          <a:ln w="12700">
             <a:solidFill>
-              <a:srgbClr val="2A3B5C"/>
+              <a:srgbClr val="1F3A52"/>
             </a:solidFill>
           </a:ln>
         </p:spPr>
@@ -8450,135 +9408,23 @@
       </p:sp>
       <p:sp>
         <p:nvSpPr>
-          <p:cNvPr id="6" name="TextBox 5"/>
-          <p:cNvSpPr txBox="1"/>
-          <p:nvPr/>
-        </p:nvSpPr>
-        <p:spPr>
-          <a:xfrm>
-            <a:off x="914400" y="1828800"/>
-            <a:ext cx="3017520" cy="4023360"/>
-          </a:xfrm>
-          <a:prstGeom prst="rect">
-            <a:avLst/>
-          </a:prstGeom>
-          <a:noFill/>
-        </p:spPr>
-        <p:txBody>
-          <a:bodyPr wrap="square" tIns="0" bIns="0" lIns="0" rIns="0">
-            <a:spAutoFit/>
-          </a:bodyPr>
-          <a:lstStyle/>
-          <a:p>
-            <a:pPr>
-              <a:defRPr sz="1400" b="1">
-                <a:solidFill>
-                  <a:srgbClr val="0EA5E9"/>
-                </a:solidFill>
-              </a:defRPr>
-            </a:pPr>
-            <a:r>
-              <a:t>Mapbox GL 3D Terrain</a:t>
-            </a:r>
-          </a:p>
-          <a:p>
-            <a:pPr>
-              <a:spcAft>
-                <a:spcPts val="600"/>
-              </a:spcAft>
-              <a:defRPr sz="1000" i="1">
-                <a:solidFill>
-                  <a:srgbClr val="94A3B8"/>
-                </a:solidFill>
-              </a:defRPr>
-            </a:pPr>
-            <a:r>
-              <a:t>Địa hình 3D sườn núi chân thực</a:t>
-            </a:r>
-          </a:p>
-          <a:p>
-            <a:pPr>
-              <a:spcAft>
-                <a:spcPts val="400"/>
-              </a:spcAft>
-              <a:defRPr sz="1050">
-                <a:solidFill>
-                  <a:srgbClr val="FFFFFF"/>
-                </a:solidFill>
-              </a:defRPr>
-            </a:pPr>
-            <a:r>
-              <a:t>•  Phát triển bằng React 18 / Next.js kết hợp Tailwind CSS.</a:t>
-            </a:r>
-          </a:p>
-          <a:p>
-            <a:pPr>
-              <a:spcAft>
-                <a:spcPts val="400"/>
-              </a:spcAft>
-              <a:defRPr sz="1050">
-                <a:solidFill>
-                  <a:srgbClr val="FFFFFF"/>
-                </a:solidFill>
-              </a:defRPr>
-            </a:pPr>
-            <a:r>
-              <a:t>•  Bật lớp bản đồ địa hình 3D (Terrain 3D Elevation) trên nền WebGL.</a:t>
-            </a:r>
-          </a:p>
-          <a:p>
-            <a:pPr>
-              <a:spcAft>
-                <a:spcPts val="400"/>
-              </a:spcAft>
-              <a:defRPr sz="1050">
-                <a:solidFill>
-                  <a:srgbClr val="FFFFFF"/>
-                </a:solidFill>
-              </a:defRPr>
-            </a:pPr>
-            <a:r>
-              <a:t>•  Mô phỏng chân thực độ dốc núi rừng hiểm trở các tỉnh Yên Bái, Lào Cai.</a:t>
-            </a:r>
-          </a:p>
-          <a:p>
-            <a:pPr>
-              <a:spcAft>
-                <a:spcPts val="400"/>
-              </a:spcAft>
-              <a:defRPr sz="1050">
-                <a:solidFill>
-                  <a:srgbClr val="FFFFFF"/>
-                </a:solidFill>
-              </a:defRPr>
-            </a:pPr>
-            <a:r>
-              <a:t>•  Cho phép cán bộ nghiêng, xoay camera 3D 360 độ để quan sát vết nứt sườn đồi.</a:t>
-            </a:r>
-          </a:p>
-        </p:txBody>
-      </p:sp>
-      <p:sp>
-        <p:nvSpPr>
-          <p:cNvPr id="7" name="Rounded Rectangle 6"/>
+          <p:cNvPr id="5" name="Rounded Rectangle 4"/>
           <p:cNvSpPr/>
           <p:nvPr/>
         </p:nvSpPr>
         <p:spPr>
           <a:xfrm>
-            <a:off x="4389120" y="1645920"/>
-            <a:ext cx="3383280" cy="4389120"/>
+            <a:off x="731520" y="1645920"/>
+            <a:ext cx="3383280" cy="73152"/>
           </a:xfrm>
           <a:prstGeom prst="roundRect">
             <a:avLst/>
           </a:prstGeom>
           <a:solidFill>
-            <a:srgbClr val="151E32"/>
+            <a:srgbClr val="00D4FF"/>
           </a:solidFill>
-          <a:ln w="15240">
-            <a:solidFill>
-              <a:srgbClr val="2A3B5C"/>
-            </a:solidFill>
+          <a:ln>
+            <a:noFill/>
           </a:ln>
         </p:spPr>
         <p:style>
@@ -8605,14 +9451,14 @@
       </p:sp>
       <p:sp>
         <p:nvSpPr>
-          <p:cNvPr id="8" name="TextBox 7"/>
+          <p:cNvPr id="6" name="TextBox 5"/>
           <p:cNvSpPr txBox="1"/>
           <p:nvPr/>
         </p:nvSpPr>
         <p:spPr>
           <a:xfrm>
-            <a:off x="4572000" y="1828800"/>
-            <a:ext cx="3017520" cy="4023360"/>
+            <a:off x="914400" y="1810512"/>
+            <a:ext cx="3017520" cy="4160520"/>
           </a:xfrm>
           <a:prstGeom prst="rect">
             <a:avLst/>
@@ -8620,35 +9466,20 @@
           <a:noFill/>
         </p:spPr>
         <p:txBody>
-          <a:bodyPr wrap="square" tIns="0" bIns="0" lIns="0" rIns="0">
+          <a:bodyPr wrap="square" lIns="0" tIns="0" rIns="0" bIns="0">
             <a:spAutoFit/>
           </a:bodyPr>
           <a:lstStyle/>
           <a:p>
             <a:pPr>
-              <a:defRPr sz="1400" b="1">
-                <a:solidFill>
-                  <a:srgbClr val="F97316"/>
-                </a:solidFill>
-              </a:defRPr>
-            </a:pPr>
-            <a:r>
-              <a:t>Mô Hình 3D Hiện Trường Cứu Hộ</a:t>
-            </a:r>
-          </a:p>
-          <a:p>
-            <a:pPr>
-              <a:spcAft>
-                <a:spcPts val="600"/>
-              </a:spcAft>
-              <a:defRPr sz="1000" i="1">
-                <a:solidFill>
-                  <a:srgbClr val="94A3B8"/>
-                </a:solidFill>
-              </a:defRPr>
-            </a:pPr>
-            <a:r>
-              <a:t>3D Rescue Scene Visualization</a:t>
+              <a:defRPr sz="1300" b="1">
+                <a:solidFill>
+                  <a:srgbClr val="00D4FF"/>
+                </a:solidFill>
+              </a:defRPr>
+            </a:pPr>
+            <a:r>
+              <a:t>Mapbox GL 3D Terrain</a:t>
             </a:r>
           </a:p>
           <a:p>
@@ -8656,98 +9487,98 @@
               <a:spcAft>
                 <a:spcPts val="400"/>
               </a:spcAft>
-              <a:defRPr sz="1050">
-                <a:solidFill>
-                  <a:srgbClr val="FFFFFF"/>
-                </a:solidFill>
-              </a:defRPr>
-            </a:pPr>
-            <a:r>
-              <a:t>•  Trực quan hóa không gian hiện trường với 4 lớp marker trực quan:</a:t>
-            </a:r>
-          </a:p>
-          <a:p>
-            <a:pPr>
-              <a:spcAft>
-                <a:spcPts val="400"/>
-              </a:spcAft>
-              <a:defRPr sz="1050">
-                <a:solidFill>
-                  <a:srgbClr val="FFFFFF"/>
-                </a:solidFill>
-              </a:defRPr>
-            </a:pPr>
-            <a:r>
-              <a:t>•  🔴 Danger Zone: Đa giác bùn đất sạt lở 3D phủ trên mặt đất.</a:t>
-            </a:r>
-          </a:p>
-          <a:p>
-            <a:pPr>
-              <a:spcAft>
-                <a:spcPts val="400"/>
-              </a:spcAft>
-              <a:defRPr sz="1050">
-                <a:solidFill>
-                  <a:srgbClr val="FFFFFF"/>
-                </a:solidFill>
-              </a:defRPr>
-            </a:pPr>
-            <a:r>
-              <a:t>•  🟢 Victim: Điểm ghim vị trí người dân gửi SOS kêu cứu từ hiện trường.</a:t>
-            </a:r>
-          </a:p>
-          <a:p>
-            <a:pPr>
-              <a:spcAft>
-                <a:spcPts val="400"/>
-              </a:spcAft>
-              <a:defRPr sz="1050">
-                <a:solidFill>
-                  <a:srgbClr val="FFFFFF"/>
-                </a:solidFill>
-              </a:defRPr>
-            </a:pPr>
-            <a:r>
-              <a:t>•  ⚠ Hazard: Các điểm sạt trượt phụ, vách đá nứt có nguy cơ lăn sập.</a:t>
-            </a:r>
-          </a:p>
-          <a:p>
-            <a:pPr>
-              <a:spcAft>
-                <a:spcPts val="400"/>
-              </a:spcAft>
-              <a:defRPr sz="1050">
-                <a:solidFill>
-                  <a:srgbClr val="FFFFFF"/>
-                </a:solidFill>
-              </a:defRPr>
-            </a:pPr>
-            <a:r>
-              <a:t>•  🚒 Rescue Route: Tuyến đường cứu hộ được AI đề xuất cho xe tiếp cận.</a:t>
-            </a:r>
-          </a:p>
-        </p:txBody>
-      </p:sp>
-      <p:sp>
-        <p:nvSpPr>
-          <p:cNvPr id="9" name="Rounded Rectangle 8"/>
+              <a:defRPr sz="950">
+                <a:solidFill>
+                  <a:srgbClr val="9CB2C9"/>
+                </a:solidFill>
+              </a:defRPr>
+            </a:pPr>
+            <a:r>
+              <a:t>Địa hình 3D sườn núi chân thực</a:t>
+            </a:r>
+          </a:p>
+          <a:p>
+            <a:pPr>
+              <a:spcBef>
+                <a:spcPts val="300"/>
+              </a:spcBef>
+              <a:defRPr sz="1000">
+                <a:solidFill>
+                  <a:srgbClr val="FFFFFF"/>
+                </a:solidFill>
+              </a:defRPr>
+            </a:pPr>
+            <a:r>
+              <a:t>• Phát triển bằng React 18 + Vite kết hợp Tailwind CSS.</a:t>
+            </a:r>
+          </a:p>
+          <a:p>
+            <a:pPr>
+              <a:spcBef>
+                <a:spcPts val="300"/>
+              </a:spcBef>
+              <a:defRPr sz="1000">
+                <a:solidFill>
+                  <a:srgbClr val="FFFFFF"/>
+                </a:solidFill>
+              </a:defRPr>
+            </a:pPr>
+            <a:r>
+              <a:t>• Bật lớp bản đồ địa hình 3D (Terrain 3D Elevation) trên nền WebGL.</a:t>
+            </a:r>
+          </a:p>
+          <a:p>
+            <a:pPr>
+              <a:spcBef>
+                <a:spcPts val="300"/>
+              </a:spcBef>
+              <a:defRPr sz="1000">
+                <a:solidFill>
+                  <a:srgbClr val="FFFFFF"/>
+                </a:solidFill>
+              </a:defRPr>
+            </a:pPr>
+            <a:r>
+              <a:t>• Mô phỏng chân thực độ dốc núi rừng hiểm trở các tỉnh Yên Bái, Lào Cai.</a:t>
+            </a:r>
+          </a:p>
+          <a:p>
+            <a:pPr>
+              <a:spcBef>
+                <a:spcPts val="300"/>
+              </a:spcBef>
+              <a:defRPr sz="1000">
+                <a:solidFill>
+                  <a:srgbClr val="FFFFFF"/>
+                </a:solidFill>
+              </a:defRPr>
+            </a:pPr>
+            <a:r>
+              <a:t>• Cho phép cán bộ nghiêng, xoay camera 3D 360 độ để quan sát vết nứt sườn đồi.</a:t>
+            </a:r>
+          </a:p>
+        </p:txBody>
+      </p:sp>
+      <p:sp>
+        <p:nvSpPr>
+          <p:cNvPr id="7" name="Rounded Rectangle 6"/>
           <p:cNvSpPr/>
           <p:nvPr/>
         </p:nvSpPr>
         <p:spPr>
           <a:xfrm>
-            <a:off x="8046720" y="1645920"/>
+            <a:off x="4389120" y="1645920"/>
             <a:ext cx="3383280" cy="4389120"/>
           </a:xfrm>
           <a:prstGeom prst="roundRect">
             <a:avLst/>
           </a:prstGeom>
           <a:solidFill>
-            <a:srgbClr val="151E32"/>
+            <a:srgbClr val="131E31"/>
           </a:solidFill>
-          <a:ln w="15240">
+          <a:ln w="12700">
             <a:solidFill>
-              <a:srgbClr val="2A3B5C"/>
+              <a:srgbClr val="1F3A52"/>
             </a:solidFill>
           </a:ln>
         </p:spPr>
@@ -8775,14 +9606,57 @@
       </p:sp>
       <p:sp>
         <p:nvSpPr>
-          <p:cNvPr id="10" name="TextBox 9"/>
+          <p:cNvPr id="8" name="Rounded Rectangle 7"/>
+          <p:cNvSpPr/>
+          <p:nvPr/>
+        </p:nvSpPr>
+        <p:spPr>
+          <a:xfrm>
+            <a:off x="4389120" y="1645920"/>
+            <a:ext cx="3383280" cy="73152"/>
+          </a:xfrm>
+          <a:prstGeom prst="roundRect">
+            <a:avLst/>
+          </a:prstGeom>
+          <a:solidFill>
+            <a:srgbClr val="10B981"/>
+          </a:solidFill>
+          <a:ln>
+            <a:noFill/>
+          </a:ln>
+        </p:spPr>
+        <p:style>
+          <a:lnRef idx="1">
+            <a:schemeClr val="accent1"/>
+          </a:lnRef>
+          <a:fillRef idx="3">
+            <a:schemeClr val="accent1"/>
+          </a:fillRef>
+          <a:effectRef idx="2">
+            <a:schemeClr val="accent1"/>
+          </a:effectRef>
+          <a:fontRef idx="minor">
+            <a:schemeClr val="lt1"/>
+          </a:fontRef>
+        </p:style>
+        <p:txBody>
+          <a:bodyPr rtlCol="0" anchor="ctr"/>
+          <a:lstStyle/>
+          <a:p>
+            <a:pPr algn="ctr"/>
+          </a:p>
+        </p:txBody>
+      </p:sp>
+      <p:sp>
+        <p:nvSpPr>
+          <p:cNvPr id="9" name="TextBox 8"/>
           <p:cNvSpPr txBox="1"/>
           <p:nvPr/>
         </p:nvSpPr>
         <p:spPr>
           <a:xfrm>
-            <a:off x="8229600" y="1828800"/>
-            <a:ext cx="3017520" cy="4023360"/>
+            <a:off x="4572000" y="1810512"/>
+            <a:ext cx="3017520" cy="4160520"/>
           </a:xfrm>
           <a:prstGeom prst="rect">
             <a:avLst/>
@@ -8790,35 +9664,20 @@
           <a:noFill/>
         </p:spPr>
         <p:txBody>
-          <a:bodyPr wrap="square" tIns="0" bIns="0" lIns="0" rIns="0">
+          <a:bodyPr wrap="square" lIns="0" tIns="0" rIns="0" bIns="0">
             <a:spAutoFit/>
           </a:bodyPr>
           <a:lstStyle/>
           <a:p>
             <a:pPr>
-              <a:defRPr sz="1400" b="1">
+              <a:defRPr sz="1300" b="1">
                 <a:solidFill>
                   <a:srgbClr val="10B981"/>
                 </a:solidFill>
               </a:defRPr>
             </a:pPr>
             <a:r>
-              <a:t>Thanh Trượt Đối Soát &amp; Thẩm Định</a:t>
-            </a:r>
-          </a:p>
-          <a:p>
-            <a:pPr>
-              <a:spcAft>
-                <a:spcPts val="600"/>
-              </a:spcAft>
-              <a:defRPr sz="1000" i="1">
-                <a:solidFill>
-                  <a:srgbClr val="94A3B8"/>
-                </a:solidFill>
-              </a:defRPr>
-            </a:pPr>
-            <a:r>
-              <a:t>Time-slider Swipe &amp; 1-Click Approval</a:t>
+              <a:t>Đối Soát Ảnh &amp; Thẩm Định</a:t>
             </a:r>
           </a:p>
           <a:p>
@@ -8826,14 +9685,197 @@
               <a:spcAft>
                 <a:spcPts val="400"/>
               </a:spcAft>
-              <a:defRPr sz="1050">
-                <a:solidFill>
-                  <a:srgbClr val="FFFFFF"/>
-                </a:solidFill>
-              </a:defRPr>
-            </a:pPr>
-            <a:r>
-              <a:t>•  Tính năng Time-slider swipe: Kéo thanh trượt qua lại giữa ảnh vệ tinh trước và sau thiên tai.</a:t>
+              <a:defRPr sz="950">
+                <a:solidFill>
+                  <a:srgbClr val="9CB2C9"/>
+                </a:solidFill>
+              </a:defRPr>
+            </a:pPr>
+            <a:r>
+              <a:t>Time-slider Swipe &amp; 1-Click Approval</a:t>
+            </a:r>
+          </a:p>
+          <a:p>
+            <a:pPr>
+              <a:spcBef>
+                <a:spcPts val="300"/>
+              </a:spcBef>
+              <a:defRPr sz="1000">
+                <a:solidFill>
+                  <a:srgbClr val="FFFFFF"/>
+                </a:solidFill>
+              </a:defRPr>
+            </a:pPr>
+            <a:r>
+              <a:t>• Tính năng Time-slider swipe: Kéo thanh trượt đối soát ảnh vệ tinh trước và sau sạt lở.</a:t>
+            </a:r>
+          </a:p>
+          <a:p>
+            <a:pPr>
+              <a:spcBef>
+                <a:spcPts val="300"/>
+              </a:spcBef>
+              <a:defRPr sz="1000">
+                <a:solidFill>
+                  <a:srgbClr val="FFFFFF"/>
+                </a:solidFill>
+              </a:defRPr>
+            </a:pPr>
+            <a:r>
+              <a:t>• Cán bộ trực ban dễ dàng xác minh sự biến mất của thảm thực vật bằng mắt thường.</a:t>
+            </a:r>
+          </a:p>
+          <a:p>
+            <a:pPr>
+              <a:spcBef>
+                <a:spcPts val="300"/>
+              </a:spcBef>
+              <a:defRPr sz="1000">
+                <a:solidFill>
+                  <a:srgbClr val="FFFFFF"/>
+                </a:solidFill>
+              </a:defRPr>
+            </a:pPr>
+            <a:r>
+              <a:t>• Hàng đợi thẩm định sạt lở 1-click: Xem thông tin diện tích, độ dốc, mức nguy cơ và duyệt nhanh.</a:t>
+            </a:r>
+          </a:p>
+          <a:p>
+            <a:pPr>
+              <a:spcBef>
+                <a:spcPts val="300"/>
+              </a:spcBef>
+              <a:defRPr sz="1000">
+                <a:solidFill>
+                  <a:srgbClr val="FFFFFF"/>
+                </a:solidFill>
+              </a:defRPr>
+            </a:pPr>
+            <a:r>
+              <a:t>• Hiển thị các điểm báo cáo hiện trường từ người dân để đối chiếu thực tế.</a:t>
+            </a:r>
+          </a:p>
+        </p:txBody>
+      </p:sp>
+      <p:sp>
+        <p:nvSpPr>
+          <p:cNvPr id="10" name="Rounded Rectangle 9"/>
+          <p:cNvSpPr/>
+          <p:nvPr/>
+        </p:nvSpPr>
+        <p:spPr>
+          <a:xfrm>
+            <a:off x="8046720" y="1645920"/>
+            <a:ext cx="3383280" cy="4389120"/>
+          </a:xfrm>
+          <a:prstGeom prst="roundRect">
+            <a:avLst/>
+          </a:prstGeom>
+          <a:solidFill>
+            <a:srgbClr val="131E31"/>
+          </a:solidFill>
+          <a:ln w="12700">
+            <a:solidFill>
+              <a:srgbClr val="1F3A52"/>
+            </a:solidFill>
+          </a:ln>
+        </p:spPr>
+        <p:style>
+          <a:lnRef idx="1">
+            <a:schemeClr val="accent1"/>
+          </a:lnRef>
+          <a:fillRef idx="3">
+            <a:schemeClr val="accent1"/>
+          </a:fillRef>
+          <a:effectRef idx="2">
+            <a:schemeClr val="accent1"/>
+          </a:effectRef>
+          <a:fontRef idx="minor">
+            <a:schemeClr val="lt1"/>
+          </a:fontRef>
+        </p:style>
+        <p:txBody>
+          <a:bodyPr rtlCol="0" anchor="ctr"/>
+          <a:lstStyle/>
+          <a:p>
+            <a:pPr algn="ctr"/>
+          </a:p>
+        </p:txBody>
+      </p:sp>
+      <p:sp>
+        <p:nvSpPr>
+          <p:cNvPr id="11" name="Rounded Rectangle 10"/>
+          <p:cNvSpPr/>
+          <p:nvPr/>
+        </p:nvSpPr>
+        <p:spPr>
+          <a:xfrm>
+            <a:off x="8046720" y="1645920"/>
+            <a:ext cx="3383280" cy="73152"/>
+          </a:xfrm>
+          <a:prstGeom prst="roundRect">
+            <a:avLst/>
+          </a:prstGeom>
+          <a:solidFill>
+            <a:srgbClr val="FF8C00"/>
+          </a:solidFill>
+          <a:ln>
+            <a:noFill/>
+          </a:ln>
+        </p:spPr>
+        <p:style>
+          <a:lnRef idx="1">
+            <a:schemeClr val="accent1"/>
+          </a:lnRef>
+          <a:fillRef idx="3">
+            <a:schemeClr val="accent1"/>
+          </a:fillRef>
+          <a:effectRef idx="2">
+            <a:schemeClr val="accent1"/>
+          </a:effectRef>
+          <a:fontRef idx="minor">
+            <a:schemeClr val="lt1"/>
+          </a:fontRef>
+        </p:style>
+        <p:txBody>
+          <a:bodyPr rtlCol="0" anchor="ctr"/>
+          <a:lstStyle/>
+          <a:p>
+            <a:pPr algn="ctr"/>
+          </a:p>
+        </p:txBody>
+      </p:sp>
+      <p:sp>
+        <p:nvSpPr>
+          <p:cNvPr id="12" name="TextBox 11"/>
+          <p:cNvSpPr txBox="1"/>
+          <p:nvPr/>
+        </p:nvSpPr>
+        <p:spPr>
+          <a:xfrm>
+            <a:off x="8229600" y="1810512"/>
+            <a:ext cx="3017520" cy="4160520"/>
+          </a:xfrm>
+          <a:prstGeom prst="rect">
+            <a:avLst/>
+          </a:prstGeom>
+          <a:noFill/>
+        </p:spPr>
+        <p:txBody>
+          <a:bodyPr wrap="square" lIns="0" tIns="0" rIns="0" bIns="0">
+            <a:spAutoFit/>
+          </a:bodyPr>
+          <a:lstStyle/>
+          <a:p>
+            <a:pPr>
+              <a:defRPr sz="1300" b="1">
+                <a:solidFill>
+                  <a:srgbClr val="FF8C00"/>
+                </a:solidFill>
+              </a:defRPr>
+            </a:pPr>
+            <a:r>
+              <a:t>Nút Phát Cảnh Báo Khẩn Cấp (Admin)</a:t>
             </a:r>
           </a:p>
           <a:p>
@@ -8841,44 +9883,74 @@
               <a:spcAft>
                 <a:spcPts val="400"/>
               </a:spcAft>
-              <a:defRPr sz="1050">
-                <a:solidFill>
-                  <a:srgbClr val="FFFFFF"/>
-                </a:solidFill>
-              </a:defRPr>
-            </a:pPr>
-            <a:r>
-              <a:t>•  Cán bộ trực ban dễ dàng đối soát sự biến mất của thảm thực vật xanh bằng mắt thường.</a:t>
-            </a:r>
-          </a:p>
-          <a:p>
-            <a:pPr>
-              <a:spcAft>
-                <a:spcPts val="400"/>
-              </a:spcAft>
-              <a:defRPr sz="1050">
-                <a:solidFill>
-                  <a:srgbClr val="FFFFFF"/>
-                </a:solidFill>
-              </a:defRPr>
-            </a:pPr>
-            <a:r>
-              <a:t>•  Hàng đợi thẩm định sạt lở bán tự động: Xem thông tin diện tích, độ dốc và duyệt 1-click.</a:t>
-            </a:r>
-          </a:p>
-          <a:p>
-            <a:pPr>
-              <a:spcAft>
-                <a:spcPts val="400"/>
-              </a:spcAft>
-              <a:defRPr sz="1050">
-                <a:solidFill>
-                  <a:srgbClr val="FFFFFF"/>
-                </a:solidFill>
-              </a:defRPr>
-            </a:pPr>
-            <a:r>
-              <a:t>•  Xuất báo cáo thống kê thiên tai chuẩn định dạng phục vụ cơ quan quản lý.</a:t>
+              <a:defRPr sz="950">
+                <a:solidFill>
+                  <a:srgbClr val="9CB2C9"/>
+                </a:solidFill>
+              </a:defRPr>
+            </a:pPr>
+            <a:r>
+              <a:t>Emergency Broadcast Button</a:t>
+            </a:r>
+          </a:p>
+          <a:p>
+            <a:pPr>
+              <a:spcBef>
+                <a:spcPts val="300"/>
+              </a:spcBef>
+              <a:defRPr sz="1000">
+                <a:solidFill>
+                  <a:srgbClr val="FFFFFF"/>
+                </a:solidFill>
+              </a:defRPr>
+            </a:pPr>
+            <a:r>
+              <a:t>• Nút bấm nổi bật '🚨 Phát Cảnh Báo Khẩn Cấp' chỉ hiển thị với vai trò Admin.</a:t>
+            </a:r>
+          </a:p>
+          <a:p>
+            <a:pPr>
+              <a:spcBef>
+                <a:spcPts val="300"/>
+              </a:spcBef>
+              <a:defRPr sz="1000">
+                <a:solidFill>
+                  <a:srgbClr val="FFFFFF"/>
+                </a:solidFill>
+              </a:defRPr>
+            </a:pPr>
+            <a:r>
+              <a:t>• Chọn phạm vi vùng nguy hiểm theo điểm sạt lở (vùng đệm bán kính) hoặc toàn vùng giám sát.</a:t>
+            </a:r>
+          </a:p>
+          <a:p>
+            <a:pPr>
+              <a:spcBef>
+                <a:spcPts val="300"/>
+              </a:spcBef>
+              <a:defRPr sz="1000">
+                <a:solidFill>
+                  <a:srgbClr val="FFFFFF"/>
+                </a:solidFill>
+              </a:defRPr>
+            </a:pPr>
+            <a:r>
+              <a:t>• Tùy chọn kênh gửi: SMS về số điện thoại, Push Notification về ứng dụng di động, hoặc cả hai.</a:t>
+            </a:r>
+          </a:p>
+          <a:p>
+            <a:pPr>
+              <a:spcBef>
+                <a:spcPts val="300"/>
+              </a:spcBef>
+              <a:defRPr sz="1000">
+                <a:solidFill>
+                  <a:srgbClr val="FFFFFF"/>
+                </a:solidFill>
+              </a:defRPr>
+            </a:pPr>
+            <a:r>
+              <a:t>• Xem trước số người nhận và xác nhận 2 bước an toàn chống bấm nhầm.</a:t>
             </a:r>
           </a:p>
         </p:txBody>
@@ -8916,7 +9988,7 @@
             <a:avLst/>
           </a:prstGeom>
           <a:solidFill>
-            <a:srgbClr val="0B0F19"/>
+            <a:srgbClr val="0B1320"/>
           </a:solidFill>
           <a:ln>
             <a:noFill/>
@@ -8952,8 +10024,8 @@
         </p:nvSpPr>
         <p:spPr>
           <a:xfrm>
-            <a:off x="731520" y="365760"/>
-            <a:ext cx="10515600" cy="365760"/>
+            <a:off x="731520" y="457200"/>
+            <a:ext cx="10698480" cy="1005840"/>
           </a:xfrm>
           <a:prstGeom prst="rect">
             <a:avLst/>
@@ -8961,15 +10033,15 @@
           <a:noFill/>
         </p:spPr>
         <p:txBody>
-          <a:bodyPr wrap="square" tIns="0" bIns="0" lIns="0" rIns="0">
+          <a:bodyPr wrap="square" lIns="0" tIns="0" rIns="0" bIns="0">
             <a:spAutoFit/>
           </a:bodyPr>
           <a:lstStyle/>
           <a:p>
             <a:pPr>
-              <a:defRPr sz="1000" b="1">
-                <a:solidFill>
-                  <a:srgbClr val="0EA5E9"/>
+              <a:defRPr sz="1050" b="1">
+                <a:solidFill>
+                  <a:srgbClr val="FF8C00"/>
                 </a:solidFill>
               </a:defRPr>
             </a:pPr>
@@ -8977,31 +10049,11 @@
               <a:t>THÀNH VIÊN 5 • MOBILE APP ENGINEER</a:t>
             </a:r>
           </a:p>
-        </p:txBody>
-      </p:sp>
-      <p:sp>
-        <p:nvSpPr>
-          <p:cNvPr id="4" name="TextBox 3"/>
-          <p:cNvSpPr txBox="1"/>
-          <p:nvPr/>
-        </p:nvSpPr>
-        <p:spPr>
-          <a:xfrm>
-            <a:off x="731520" y="640080"/>
-            <a:ext cx="10515600" cy="640080"/>
-          </a:xfrm>
-          <a:prstGeom prst="rect">
-            <a:avLst/>
-          </a:prstGeom>
-          <a:noFill/>
-        </p:spPr>
-        <p:txBody>
-          <a:bodyPr wrap="square" tIns="0" bIns="0" lIns="0" rIns="0">
-            <a:spAutoFit/>
-          </a:bodyPr>
-          <a:lstStyle/>
-          <a:p>
-            <a:pPr>
+          <a:p>
+            <a:pPr>
+              <a:spcBef>
+                <a:spcPts val="300"/>
+              </a:spcBef>
               <a:defRPr sz="2200" b="1">
                 <a:solidFill>
                   <a:srgbClr val="FFFFFF"/>
@@ -9016,7 +10068,7 @@
       </p:sp>
       <p:sp>
         <p:nvSpPr>
-          <p:cNvPr id="5" name="Rounded Rectangle 4"/>
+          <p:cNvPr id="4" name="Rounded Rectangle 3"/>
           <p:cNvSpPr/>
           <p:nvPr/>
         </p:nvSpPr>
@@ -9029,11 +10081,11 @@
             <a:avLst/>
           </a:prstGeom>
           <a:solidFill>
-            <a:srgbClr val="151E32"/>
+            <a:srgbClr val="131E31"/>
           </a:solidFill>
-          <a:ln w="15240">
+          <a:ln w="12700">
             <a:solidFill>
-              <a:srgbClr val="2A3B5C"/>
+              <a:srgbClr val="1F3A52"/>
             </a:solidFill>
           </a:ln>
         </p:spPr>
@@ -9061,135 +10113,23 @@
       </p:sp>
       <p:sp>
         <p:nvSpPr>
-          <p:cNvPr id="6" name="TextBox 5"/>
-          <p:cNvSpPr txBox="1"/>
-          <p:nvPr/>
-        </p:nvSpPr>
-        <p:spPr>
-          <a:xfrm>
-            <a:off x="914400" y="1828800"/>
-            <a:ext cx="3017520" cy="4023360"/>
-          </a:xfrm>
-          <a:prstGeom prst="rect">
-            <a:avLst/>
-          </a:prstGeom>
-          <a:noFill/>
-        </p:spPr>
-        <p:txBody>
-          <a:bodyPr wrap="square" tIns="0" bIns="0" lIns="0" rIns="0">
-            <a:spAutoFit/>
-          </a:bodyPr>
-          <a:lstStyle/>
-          <a:p>
-            <a:pPr>
-              <a:defRPr sz="1400" b="1">
-                <a:solidFill>
-                  <a:srgbClr val="0EA5E9"/>
-                </a:solidFill>
-              </a:defRPr>
-            </a:pPr>
-            <a:r>
-              <a:t>Geofencing Ngoại Tuyến Đột Phá</a:t>
-            </a:r>
-          </a:p>
-          <a:p>
-            <a:pPr>
-              <a:spcAft>
-                <a:spcPts val="600"/>
-              </a:spcAft>
-              <a:defRPr sz="1000" i="1">
-                <a:solidFill>
-                  <a:srgbClr val="94A3B8"/>
-                </a:solidFill>
-              </a:defRPr>
-            </a:pPr>
-            <a:r>
-              <a:t>Offline-First SQLite &amp; Ray-Casting</a:t>
-            </a:r>
-          </a:p>
-          <a:p>
-            <a:pPr>
-              <a:spcAft>
-                <a:spcPts val="400"/>
-              </a:spcAft>
-              <a:defRPr sz="1050">
-                <a:solidFill>
-                  <a:srgbClr val="FFFFFF"/>
-                </a:solidFill>
-              </a:defRPr>
-            </a:pPr>
-            <a:r>
-              <a:t>•  Ứng dụng di động Flutter 3.x đa nền tảng (Android &amp; iOS).</a:t>
-            </a:r>
-          </a:p>
-          <a:p>
-            <a:pPr>
-              <a:spcAft>
-                <a:spcPts val="400"/>
-              </a:spcAft>
-              <a:defRPr sz="1050">
-                <a:solidFill>
-                  <a:srgbClr val="FFFFFF"/>
-                </a:solidFill>
-              </a:defRPr>
-            </a:pPr>
-            <a:r>
-              <a:t>•  Bộ nhớ đệm SQLite cục bộ lưu sẵn &gt;= 10,000 đa giác vùng nguy cơ sạt lở (&lt; 15MB).</a:t>
-            </a:r>
-          </a:p>
-          <a:p>
-            <a:pPr>
-              <a:spcAft>
-                <a:spcPts val="400"/>
-              </a:spcAft>
-              <a:defRPr sz="1050">
-                <a:solidFill>
-                  <a:srgbClr val="FFFFFF"/>
-                </a:solidFill>
-              </a:defRPr>
-            </a:pPr>
-            <a:r>
-              <a:t>•  Dịch vụ định vị chạy nền (Background Geolocation) liên tục quét tọa độ GPS mỗi 10 giây.</a:t>
-            </a:r>
-          </a:p>
-          <a:p>
-            <a:pPr>
-              <a:spcAft>
-                <a:spcPts val="400"/>
-              </a:spcAft>
-              <a:defRPr sz="1050">
-                <a:solidFill>
-                  <a:srgbClr val="FFFFFF"/>
-                </a:solidFill>
-              </a:defRPr>
-            </a:pPr>
-            <a:r>
-              <a:t>•  Thuật toán Haversine và Ray-Casting (Point-in-Polygon) kiểm tra không gian siêu tốc (&lt; 20ms).</a:t>
-            </a:r>
-          </a:p>
-        </p:txBody>
-      </p:sp>
-      <p:sp>
-        <p:nvSpPr>
-          <p:cNvPr id="7" name="Rounded Rectangle 6"/>
+          <p:cNvPr id="5" name="Rounded Rectangle 4"/>
           <p:cNvSpPr/>
           <p:nvPr/>
         </p:nvSpPr>
         <p:spPr>
           <a:xfrm>
-            <a:off x="4389120" y="1645920"/>
-            <a:ext cx="3383280" cy="4389120"/>
+            <a:off x="731520" y="1645920"/>
+            <a:ext cx="3383280" cy="73152"/>
           </a:xfrm>
           <a:prstGeom prst="roundRect">
             <a:avLst/>
           </a:prstGeom>
           <a:solidFill>
-            <a:srgbClr val="151E32"/>
+            <a:srgbClr val="00D4FF"/>
           </a:solidFill>
-          <a:ln w="15240">
-            <a:solidFill>
-              <a:srgbClr val="2A3B5C"/>
-            </a:solidFill>
+          <a:ln>
+            <a:noFill/>
           </a:ln>
         </p:spPr>
         <p:style>
@@ -9216,14 +10156,14 @@
       </p:sp>
       <p:sp>
         <p:nvSpPr>
-          <p:cNvPr id="8" name="TextBox 7"/>
+          <p:cNvPr id="6" name="TextBox 5"/>
           <p:cNvSpPr txBox="1"/>
           <p:nvPr/>
         </p:nvSpPr>
         <p:spPr>
           <a:xfrm>
-            <a:off x="4572000" y="1828800"/>
-            <a:ext cx="3017520" cy="4023360"/>
+            <a:off x="914400" y="1810512"/>
+            <a:ext cx="3017520" cy="4160520"/>
           </a:xfrm>
           <a:prstGeom prst="rect">
             <a:avLst/>
@@ -9231,35 +10171,20 @@
           <a:noFill/>
         </p:spPr>
         <p:txBody>
-          <a:bodyPr wrap="square" tIns="0" bIns="0" lIns="0" rIns="0">
+          <a:bodyPr wrap="square" lIns="0" tIns="0" rIns="0" bIns="0">
             <a:spAutoFit/>
           </a:bodyPr>
           <a:lstStyle/>
           <a:p>
             <a:pPr>
-              <a:defRPr sz="1400" b="1">
-                <a:solidFill>
-                  <a:srgbClr val="EF4444"/>
-                </a:solidFill>
-              </a:defRPr>
-            </a:pPr>
-            <a:r>
-              <a:t>Còi Hú Báo Động Khẩn Cấp</a:t>
-            </a:r>
-          </a:p>
-          <a:p>
-            <a:pPr>
-              <a:spcAft>
-                <a:spcPts val="600"/>
-              </a:spcAft>
-              <a:defRPr sz="1000" i="1">
-                <a:solidFill>
-                  <a:srgbClr val="94A3B8"/>
-                </a:solidFill>
-              </a:defRPr>
-            </a:pPr>
-            <a:r>
-              <a:t>Báo động khẩn khi mất mạng</a:t>
+              <a:defRPr sz="1300" b="1">
+                <a:solidFill>
+                  <a:srgbClr val="00D4FF"/>
+                </a:solidFill>
+              </a:defRPr>
+            </a:pPr>
+            <a:r>
+              <a:t>Geofencing Ngoại Tuyến Đột Phá</a:t>
             </a:r>
           </a:p>
           <a:p>
@@ -9267,83 +10192,98 @@
               <a:spcAft>
                 <a:spcPts val="400"/>
               </a:spcAft>
-              <a:defRPr sz="1050">
-                <a:solidFill>
-                  <a:srgbClr val="FFFFFF"/>
-                </a:solidFill>
-              </a:defRPr>
-            </a:pPr>
-            <a:r>
-              <a:t>•  Tự động kích hoạt khi người dân di chuyển vào vùng sạt lở nguy hiểm.</a:t>
-            </a:r>
-          </a:p>
-          <a:p>
-            <a:pPr>
-              <a:spcAft>
-                <a:spcPts val="400"/>
-              </a:spcAft>
-              <a:defRPr sz="1050">
-                <a:solidFill>
-                  <a:srgbClr val="FFFFFF"/>
-                </a:solidFill>
-              </a:defRPr>
-            </a:pPr>
-            <a:r>
-              <a:t>•  HOẠT ĐỘNG 100% NGOẠI TUYẾN ngay cả khi mất sạch sóng 4G/Internet.</a:t>
-            </a:r>
-          </a:p>
-          <a:p>
-            <a:pPr>
-              <a:spcAft>
-                <a:spcPts val="400"/>
-              </a:spcAft>
-              <a:defRPr sz="1050">
-                <a:solidFill>
-                  <a:srgbClr val="FFFFFF"/>
-                </a:solidFill>
-              </a:defRPr>
-            </a:pPr>
-            <a:r>
-              <a:t>•  Chớp màn hình đỏ cảnh báo, rung máy liên tục và hú còi âm lượng tối đa.</a:t>
-            </a:r>
-          </a:p>
-          <a:p>
-            <a:pPr>
-              <a:spcAft>
-                <a:spcPts val="400"/>
-              </a:spcAft>
-              <a:defRPr sz="1050">
-                <a:solidFill>
-                  <a:srgbClr val="FFFFFF"/>
-                </a:solidFill>
-              </a:defRPr>
-            </a:pPr>
-            <a:r>
-              <a:t>•  Có cơ chế bypass chế độ im lặng của điện thoại để đánh thức người dân trong đêm.</a:t>
-            </a:r>
-          </a:p>
-        </p:txBody>
-      </p:sp>
-      <p:sp>
-        <p:nvSpPr>
-          <p:cNvPr id="9" name="Rounded Rectangle 8"/>
+              <a:defRPr sz="950">
+                <a:solidFill>
+                  <a:srgbClr val="9CB2C9"/>
+                </a:solidFill>
+              </a:defRPr>
+            </a:pPr>
+            <a:r>
+              <a:t>Offline-First SQLite &amp; Ray-Casting</a:t>
+            </a:r>
+          </a:p>
+          <a:p>
+            <a:pPr>
+              <a:spcBef>
+                <a:spcPts val="300"/>
+              </a:spcBef>
+              <a:defRPr sz="1000">
+                <a:solidFill>
+                  <a:srgbClr val="FFFFFF"/>
+                </a:solidFill>
+              </a:defRPr>
+            </a:pPr>
+            <a:r>
+              <a:t>• Ứng dụng di động Flutter 3.x đa nền tảng (Android &amp; iOS).</a:t>
+            </a:r>
+          </a:p>
+          <a:p>
+            <a:pPr>
+              <a:spcBef>
+                <a:spcPts val="300"/>
+              </a:spcBef>
+              <a:defRPr sz="1000">
+                <a:solidFill>
+                  <a:srgbClr val="FFFFFF"/>
+                </a:solidFill>
+              </a:defRPr>
+            </a:pPr>
+            <a:r>
+              <a:t>• Bộ nhớ đệm SQLite cục bộ lưu sẵn &gt;= 10,000 đa giác vùng nguy cơ sạt lở (&lt; 15MB).</a:t>
+            </a:r>
+          </a:p>
+          <a:p>
+            <a:pPr>
+              <a:spcBef>
+                <a:spcPts val="300"/>
+              </a:spcBef>
+              <a:defRPr sz="1000">
+                <a:solidFill>
+                  <a:srgbClr val="FFFFFF"/>
+                </a:solidFill>
+              </a:defRPr>
+            </a:pPr>
+            <a:r>
+              <a:t>• Dịch vụ định vị chạy nền (Background Geolocation) liên tục quét tọa độ GPS mỗi 10 giây.</a:t>
+            </a:r>
+          </a:p>
+          <a:p>
+            <a:pPr>
+              <a:spcBef>
+                <a:spcPts val="300"/>
+              </a:spcBef>
+              <a:defRPr sz="1000">
+                <a:solidFill>
+                  <a:srgbClr val="FFFFFF"/>
+                </a:solidFill>
+              </a:defRPr>
+            </a:pPr>
+            <a:r>
+              <a:t>• Thuật toán Haversine và Ray-Casting (Point-in-Polygon) kiểm tra không gian siêu tốc (&lt; 20ms).</a:t>
+            </a:r>
+          </a:p>
+        </p:txBody>
+      </p:sp>
+      <p:sp>
+        <p:nvSpPr>
+          <p:cNvPr id="7" name="Rounded Rectangle 6"/>
           <p:cNvSpPr/>
           <p:nvPr/>
         </p:nvSpPr>
         <p:spPr>
           <a:xfrm>
-            <a:off x="8046720" y="1645920"/>
+            <a:off x="4389120" y="1645920"/>
             <a:ext cx="3383280" cy="4389120"/>
           </a:xfrm>
           <a:prstGeom prst="roundRect">
             <a:avLst/>
           </a:prstGeom>
           <a:solidFill>
-            <a:srgbClr val="151E32"/>
+            <a:srgbClr val="131E31"/>
           </a:solidFill>
-          <a:ln w="15240">
+          <a:ln w="12700">
             <a:solidFill>
-              <a:srgbClr val="2A3B5C"/>
+              <a:srgbClr val="1F3A52"/>
             </a:solidFill>
           </a:ln>
         </p:spPr>
@@ -9371,14 +10311,57 @@
       </p:sp>
       <p:sp>
         <p:nvSpPr>
-          <p:cNvPr id="10" name="TextBox 9"/>
+          <p:cNvPr id="8" name="Rounded Rectangle 7"/>
+          <p:cNvSpPr/>
+          <p:nvPr/>
+        </p:nvSpPr>
+        <p:spPr>
+          <a:xfrm>
+            <a:off x="4389120" y="1645920"/>
+            <a:ext cx="3383280" cy="73152"/>
+          </a:xfrm>
+          <a:prstGeom prst="roundRect">
+            <a:avLst/>
+          </a:prstGeom>
+          <a:solidFill>
+            <a:srgbClr val="EF4444"/>
+          </a:solidFill>
+          <a:ln>
+            <a:noFill/>
+          </a:ln>
+        </p:spPr>
+        <p:style>
+          <a:lnRef idx="1">
+            <a:schemeClr val="accent1"/>
+          </a:lnRef>
+          <a:fillRef idx="3">
+            <a:schemeClr val="accent1"/>
+          </a:fillRef>
+          <a:effectRef idx="2">
+            <a:schemeClr val="accent1"/>
+          </a:effectRef>
+          <a:fontRef idx="minor">
+            <a:schemeClr val="lt1"/>
+          </a:fontRef>
+        </p:style>
+        <p:txBody>
+          <a:bodyPr rtlCol="0" anchor="ctr"/>
+          <a:lstStyle/>
+          <a:p>
+            <a:pPr algn="ctr"/>
+          </a:p>
+        </p:txBody>
+      </p:sp>
+      <p:sp>
+        <p:nvSpPr>
+          <p:cNvPr id="9" name="TextBox 8"/>
           <p:cNvSpPr txBox="1"/>
           <p:nvPr/>
         </p:nvSpPr>
         <p:spPr>
           <a:xfrm>
-            <a:off x="8229600" y="1828800"/>
-            <a:ext cx="3017520" cy="4023360"/>
+            <a:off x="4572000" y="1810512"/>
+            <a:ext cx="3017520" cy="4160520"/>
           </a:xfrm>
           <a:prstGeom prst="rect">
             <a:avLst/>
@@ -9386,35 +10369,20 @@
           <a:noFill/>
         </p:spPr>
         <p:txBody>
-          <a:bodyPr wrap="square" tIns="0" bIns="0" lIns="0" rIns="0">
+          <a:bodyPr wrap="square" lIns="0" tIns="0" rIns="0" bIns="0">
             <a:spAutoFit/>
           </a:bodyPr>
           <a:lstStyle/>
           <a:p>
             <a:pPr>
-              <a:defRPr sz="1400" b="1">
-                <a:solidFill>
-                  <a:srgbClr val="10B981"/>
-                </a:solidFill>
-              </a:defRPr>
-            </a:pPr>
-            <a:r>
-              <a:t>SOS 1-Chạm &amp; Live Rescue Tracking</a:t>
-            </a:r>
-          </a:p>
-          <a:p>
-            <a:pPr>
-              <a:spcAft>
-                <a:spcPts val="600"/>
-              </a:spcAft>
-              <a:defRPr sz="1000" i="1">
-                <a:solidFill>
-                  <a:srgbClr val="94A3B8"/>
-                </a:solidFill>
-              </a:defRPr>
-            </a:pPr>
-            <a:r>
-              <a:t>1-Tap SOS &amp; Live Tracking</a:t>
+              <a:defRPr sz="1300" b="1">
+                <a:solidFill>
+                  <a:srgbClr val="EF4444"/>
+                </a:solidFill>
+              </a:defRPr>
+            </a:pPr>
+            <a:r>
+              <a:t>Còi Hú Báo Động Khẩn Cấp</a:t>
             </a:r>
           </a:p>
           <a:p>
@@ -9422,14 +10390,197 @@
               <a:spcAft>
                 <a:spcPts val="400"/>
               </a:spcAft>
-              <a:defRPr sz="1050">
-                <a:solidFill>
-                  <a:srgbClr val="FFFFFF"/>
-                </a:solidFill>
-              </a:defRPr>
-            </a:pPr>
-            <a:r>
-              <a:t>•  Nút SOS khẩn cấp nổi bật: 1-chạm tự động lấy tọa độ GPS chuẩn xác và chụp ảnh hiện trường.</a:t>
+              <a:defRPr sz="950">
+                <a:solidFill>
+                  <a:srgbClr val="9CB2C9"/>
+                </a:solidFill>
+              </a:defRPr>
+            </a:pPr>
+            <a:r>
+              <a:t>Báo động khẩn khi mất mạng</a:t>
+            </a:r>
+          </a:p>
+          <a:p>
+            <a:pPr>
+              <a:spcBef>
+                <a:spcPts val="300"/>
+              </a:spcBef>
+              <a:defRPr sz="1000">
+                <a:solidFill>
+                  <a:srgbClr val="FFFFFF"/>
+                </a:solidFill>
+              </a:defRPr>
+            </a:pPr>
+            <a:r>
+              <a:t>• Tự động kích hoạt khi người dân di chuyển vào vùng sạt lở nguy hiểm.</a:t>
+            </a:r>
+          </a:p>
+          <a:p>
+            <a:pPr>
+              <a:spcBef>
+                <a:spcPts val="300"/>
+              </a:spcBef>
+              <a:defRPr sz="1000">
+                <a:solidFill>
+                  <a:srgbClr val="FFFFFF"/>
+                </a:solidFill>
+              </a:defRPr>
+            </a:pPr>
+            <a:r>
+              <a:t>• HOẠT ĐỘNG 100% NGOẠI TUYẾN ngay cả khi mất sạch sóng 4G/Internet.</a:t>
+            </a:r>
+          </a:p>
+          <a:p>
+            <a:pPr>
+              <a:spcBef>
+                <a:spcPts val="300"/>
+              </a:spcBef>
+              <a:defRPr sz="1000">
+                <a:solidFill>
+                  <a:srgbClr val="FFFFFF"/>
+                </a:solidFill>
+              </a:defRPr>
+            </a:pPr>
+            <a:r>
+              <a:t>• Chớp màn hình đỏ cảnh báo, rung máy liên tục và hú còi âm lượng tối đa.</a:t>
+            </a:r>
+          </a:p>
+          <a:p>
+            <a:pPr>
+              <a:spcBef>
+                <a:spcPts val="300"/>
+              </a:spcBef>
+              <a:defRPr sz="1000">
+                <a:solidFill>
+                  <a:srgbClr val="FFFFFF"/>
+                </a:solidFill>
+              </a:defRPr>
+            </a:pPr>
+            <a:r>
+              <a:t>• Có cơ chế bypass chế độ im lặng của điện thoại để đánh thức người dân trong đêm.</a:t>
+            </a:r>
+          </a:p>
+        </p:txBody>
+      </p:sp>
+      <p:sp>
+        <p:nvSpPr>
+          <p:cNvPr id="10" name="Rounded Rectangle 9"/>
+          <p:cNvSpPr/>
+          <p:nvPr/>
+        </p:nvSpPr>
+        <p:spPr>
+          <a:xfrm>
+            <a:off x="8046720" y="1645920"/>
+            <a:ext cx="3383280" cy="4389120"/>
+          </a:xfrm>
+          <a:prstGeom prst="roundRect">
+            <a:avLst/>
+          </a:prstGeom>
+          <a:solidFill>
+            <a:srgbClr val="131E31"/>
+          </a:solidFill>
+          <a:ln w="12700">
+            <a:solidFill>
+              <a:srgbClr val="1F3A52"/>
+            </a:solidFill>
+          </a:ln>
+        </p:spPr>
+        <p:style>
+          <a:lnRef idx="1">
+            <a:schemeClr val="accent1"/>
+          </a:lnRef>
+          <a:fillRef idx="3">
+            <a:schemeClr val="accent1"/>
+          </a:fillRef>
+          <a:effectRef idx="2">
+            <a:schemeClr val="accent1"/>
+          </a:effectRef>
+          <a:fontRef idx="minor">
+            <a:schemeClr val="lt1"/>
+          </a:fontRef>
+        </p:style>
+        <p:txBody>
+          <a:bodyPr rtlCol="0" anchor="ctr"/>
+          <a:lstStyle/>
+          <a:p>
+            <a:pPr algn="ctr"/>
+          </a:p>
+        </p:txBody>
+      </p:sp>
+      <p:sp>
+        <p:nvSpPr>
+          <p:cNvPr id="11" name="Rounded Rectangle 10"/>
+          <p:cNvSpPr/>
+          <p:nvPr/>
+        </p:nvSpPr>
+        <p:spPr>
+          <a:xfrm>
+            <a:off x="8046720" y="1645920"/>
+            <a:ext cx="3383280" cy="73152"/>
+          </a:xfrm>
+          <a:prstGeom prst="roundRect">
+            <a:avLst/>
+          </a:prstGeom>
+          <a:solidFill>
+            <a:srgbClr val="10B981"/>
+          </a:solidFill>
+          <a:ln>
+            <a:noFill/>
+          </a:ln>
+        </p:spPr>
+        <p:style>
+          <a:lnRef idx="1">
+            <a:schemeClr val="accent1"/>
+          </a:lnRef>
+          <a:fillRef idx="3">
+            <a:schemeClr val="accent1"/>
+          </a:fillRef>
+          <a:effectRef idx="2">
+            <a:schemeClr val="accent1"/>
+          </a:effectRef>
+          <a:fontRef idx="minor">
+            <a:schemeClr val="lt1"/>
+          </a:fontRef>
+        </p:style>
+        <p:txBody>
+          <a:bodyPr rtlCol="0" anchor="ctr"/>
+          <a:lstStyle/>
+          <a:p>
+            <a:pPr algn="ctr"/>
+          </a:p>
+        </p:txBody>
+      </p:sp>
+      <p:sp>
+        <p:nvSpPr>
+          <p:cNvPr id="12" name="TextBox 11"/>
+          <p:cNvSpPr txBox="1"/>
+          <p:nvPr/>
+        </p:nvSpPr>
+        <p:spPr>
+          <a:xfrm>
+            <a:off x="8229600" y="1810512"/>
+            <a:ext cx="3017520" cy="4160520"/>
+          </a:xfrm>
+          <a:prstGeom prst="rect">
+            <a:avLst/>
+          </a:prstGeom>
+          <a:noFill/>
+        </p:spPr>
+        <p:txBody>
+          <a:bodyPr wrap="square" lIns="0" tIns="0" rIns="0" bIns="0">
+            <a:spAutoFit/>
+          </a:bodyPr>
+          <a:lstStyle/>
+          <a:p>
+            <a:pPr>
+              <a:defRPr sz="1300" b="1">
+                <a:solidFill>
+                  <a:srgbClr val="10B981"/>
+                </a:solidFill>
+              </a:defRPr>
+            </a:pPr>
+            <a:r>
+              <a:t>Nhận Cảnh Báo &amp; Báo Cáo Hiện Trường</a:t>
             </a:r>
           </a:p>
           <a:p>
@@ -9437,44 +10588,74 @@
               <a:spcAft>
                 <a:spcPts val="400"/>
               </a:spcAft>
-              <a:defRPr sz="1050">
-                <a:solidFill>
-                  <a:srgbClr val="FFFFFF"/>
-                </a:solidFill>
-              </a:defRPr>
-            </a:pPr>
-            <a:r>
-              <a:t>•  Tự động lưu vào hàng đợi SQLite gửi đi ngay khi có lại kết nối mạng.</a:t>
-            </a:r>
-          </a:p>
-          <a:p>
-            <a:pPr>
-              <a:spcAft>
-                <a:spcPts val="400"/>
-              </a:spcAft>
-              <a:defRPr sz="1050">
-                <a:solidFill>
-                  <a:srgbClr val="FFFFFF"/>
-                </a:solidFill>
-              </a:defRPr>
-            </a:pPr>
-            <a:r>
-              <a:t>•  Màn hình Live Rescue Tracking hiển thị tiến trình cứu nạn (Đã nhận -&gt; Đội cứu hộ đang đến).</a:t>
-            </a:r>
-          </a:p>
-          <a:p>
-            <a:pPr>
-              <a:spcAft>
-                <a:spcPts val="400"/>
-              </a:spcAft>
-              <a:defRPr sz="1050">
-                <a:solidFill>
-                  <a:srgbClr val="FFFFFF"/>
-                </a:solidFill>
-              </a:defRPr>
-            </a:pPr>
-            <a:r>
-              <a:t>•  Hiển thị vị trí xe cứu nạn và thời gian dự kiến tiếp cận (ETA) trên bản đồ.</a:t>
+              <a:defRPr sz="950">
+                <a:solidFill>
+                  <a:srgbClr val="9CB2C9"/>
+                </a:solidFill>
+              </a:defRPr>
+            </a:pPr>
+            <a:r>
+              <a:t>Push/SMS Alert &amp; Field Reports</a:t>
+            </a:r>
+          </a:p>
+          <a:p>
+            <a:pPr>
+              <a:spcBef>
+                <a:spcPts val="300"/>
+              </a:spcBef>
+              <a:defRPr sz="1000">
+                <a:solidFill>
+                  <a:srgbClr val="FFFFFF"/>
+                </a:solidFill>
+              </a:defRPr>
+            </a:pPr>
+            <a:r>
+              <a:t>• Nhận thông báo khẩn cấp toàn màn hình từ Admin qua Firebase Cloud Messaging (FCM).</a:t>
+            </a:r>
+          </a:p>
+          <a:p>
+            <a:pPr>
+              <a:spcBef>
+                <a:spcPts val="300"/>
+              </a:spcBef>
+              <a:defRPr sz="1000">
+                <a:solidFill>
+                  <a:srgbClr val="FFFFFF"/>
+                </a:solidFill>
+              </a:defRPr>
+            </a:pPr>
+            <a:r>
+              <a:t>• Đăng ký vùng quan tâm và cập nhật số điện thoại nhận tin nhắn SMS cảnh báo.</a:t>
+            </a:r>
+          </a:p>
+          <a:p>
+            <a:pPr>
+              <a:spcBef>
+                <a:spcPts val="300"/>
+              </a:spcBef>
+              <a:defRPr sz="1000">
+                <a:solidFill>
+                  <a:srgbClr val="FFFFFF"/>
+                </a:solidFill>
+              </a:defRPr>
+            </a:pPr>
+            <a:r>
+              <a:t>• Module Báo cáo hiện trường: Chụp ảnh thực địa và gửi tọa độ GPS vết nứt/trượt đất.</a:t>
+            </a:r>
+          </a:p>
+          <a:p>
+            <a:pPr>
+              <a:spcBef>
+                <a:spcPts val="300"/>
+              </a:spcBef>
+              <a:defRPr sz="1000">
+                <a:solidFill>
+                  <a:srgbClr val="FFFFFF"/>
+                </a:solidFill>
+              </a:defRPr>
+            </a:pPr>
+            <a:r>
+              <a:t>• Lưu hàng đợi cục bộ tự động đồng bộ khi có lại kết nối mạng.</a:t>
             </a:r>
           </a:p>
         </p:txBody>
